--- a/20242-NLP-LLM/lecture notes/Part 3 - Introduction to Large Lanuage Models/Part 2 Word Embeddings.pptx
+++ b/20242-NLP-LLM/lecture notes/Part 3 - Introduction to Large Lanuage Models/Part 2 Word Embeddings.pptx
@@ -9,12 +9,12 @@
   </p:notesMasterIdLst>
   <p:sldIdLst>
     <p:sldId id="455" r:id="rId2"/>
-    <p:sldId id="459" r:id="rId3"/>
-    <p:sldId id="460" r:id="rId4"/>
-    <p:sldId id="466" r:id="rId5"/>
-    <p:sldId id="462" r:id="rId6"/>
-    <p:sldId id="467" r:id="rId7"/>
-    <p:sldId id="468" r:id="rId8"/>
+    <p:sldId id="477" r:id="rId3"/>
+    <p:sldId id="459" r:id="rId4"/>
+    <p:sldId id="460" r:id="rId5"/>
+    <p:sldId id="466" r:id="rId6"/>
+    <p:sldId id="462" r:id="rId7"/>
+    <p:sldId id="471" r:id="rId8"/>
     <p:sldId id="469" r:id="rId9"/>
     <p:sldId id="470" r:id="rId10"/>
     <p:sldId id="461" r:id="rId11"/>
@@ -157,9 +157,8 @@
 <file path=ppt/revisionInfo.xml><?xml version="1.0" encoding="utf-8"?>
 <p1510:revInfo xmlns:a="http://schemas.openxmlformats.org/drawingml/2006/main" xmlns:r="http://schemas.openxmlformats.org/officeDocument/2006/relationships" xmlns:p1510="http://schemas.microsoft.com/office/powerpoint/2015/10/main">
   <p1510:revLst>
-    <p1510:client id="{5C86E801-D2EF-92BA-0550-CFAF0E1AFAFC}" v="82" dt="2025-03-15T08:07:49.192"/>
-    <p1510:client id="{66E75AB1-FCE8-0FCD-8995-E220AF9681CC}" v="351" dt="2025-03-15T07:27:28.249"/>
-    <p1510:client id="{BAA24B5F-E316-4807-ADAF-14922A29E8E2}" v="33" dt="2025-03-15T11:50:08.141"/>
+    <p1510:client id="{0F6A92A6-FC46-466F-A1EC-286E38E3120A}" v="62" dt="2025-03-18T02:48:22.800"/>
+    <p1510:client id="{62069D60-D12A-7A57-A3B1-F34941615567}" v="112" dt="2025-03-17T14:17:29.335"/>
   </p1510:revLst>
 </p1510:revInfo>
 </file>
@@ -167,404 +166,676 @@
 <file path=ppt/changesInfos/changesInfo1.xml><?xml version="1.0" encoding="utf-8"?>
 <pc:chgInfo xmlns:a="http://schemas.openxmlformats.org/drawingml/2006/main" xmlns:r="http://schemas.openxmlformats.org/officeDocument/2006/relationships" xmlns:ac="http://schemas.microsoft.com/office/drawing/2013/main/command" xmlns:pc="http://schemas.microsoft.com/office/powerpoint/2013/main/command">
   <pc:docChgLst>
-    <pc:chgData name="Mohammed Fasha" userId="cc64f42d-a1a6-4f08-b97b-0c37f877119f" providerId="ADAL" clId="{BAA24B5F-E316-4807-ADAF-14922A29E8E2}"/>
-    <pc:docChg chg="undo custSel addSld modSld sldOrd">
-      <pc:chgData name="Mohammed Fasha" userId="cc64f42d-a1a6-4f08-b97b-0c37f877119f" providerId="ADAL" clId="{BAA24B5F-E316-4807-ADAF-14922A29E8E2}" dt="2025-03-15T11:50:13.661" v="227" actId="12"/>
+    <pc:chgData name="Mohammed Fasha" userId="cc64f42d-a1a6-4f08-b97b-0c37f877119f" providerId="ADAL" clId="{0F6A92A6-FC46-466F-A1EC-286E38E3120A}"/>
+    <pc:docChg chg="undo custSel addSld delSld modSld">
+      <pc:chgData name="Mohammed Fasha" userId="cc64f42d-a1a6-4f08-b97b-0c37f877119f" providerId="ADAL" clId="{0F6A92A6-FC46-466F-A1EC-286E38E3120A}" dt="2025-03-18T04:57:12.217" v="586" actId="47"/>
       <pc:docMkLst>
         <pc:docMk/>
       </pc:docMkLst>
-      <pc:sldChg chg="addSp delSp modSp add mod chgLayout">
-        <pc:chgData name="Mohammed Fasha" userId="cc64f42d-a1a6-4f08-b97b-0c37f877119f" providerId="ADAL" clId="{BAA24B5F-E316-4807-ADAF-14922A29E8E2}" dt="2025-03-15T09:30:10.852" v="75" actId="20577"/>
+      <pc:sldChg chg="modSp mod">
+        <pc:chgData name="Mohammed Fasha" userId="cc64f42d-a1a6-4f08-b97b-0c37f877119f" providerId="ADAL" clId="{0F6A92A6-FC46-466F-A1EC-286E38E3120A}" dt="2025-03-18T02:37:01.142" v="535" actId="20577"/>
         <pc:sldMkLst>
           <pc:docMk/>
-          <pc:sldMk cId="3259240421" sldId="458"/>
+          <pc:sldMk cId="1489447582" sldId="455"/>
         </pc:sldMkLst>
         <pc:spChg chg="mod">
-          <ac:chgData name="Mohammed Fasha" userId="cc64f42d-a1a6-4f08-b97b-0c37f877119f" providerId="ADAL" clId="{BAA24B5F-E316-4807-ADAF-14922A29E8E2}" dt="2025-03-15T09:29:55.442" v="40" actId="1036"/>
+          <ac:chgData name="Mohammed Fasha" userId="cc64f42d-a1a6-4f08-b97b-0c37f877119f" providerId="ADAL" clId="{0F6A92A6-FC46-466F-A1EC-286E38E3120A}" dt="2025-03-18T02:37:01.142" v="535" actId="20577"/>
           <ac:spMkLst>
             <pc:docMk/>
-            <pc:sldMk cId="3259240421" sldId="458"/>
-            <ac:spMk id="2" creationId="{00000000-0000-0000-0000-000000000000}"/>
-          </ac:spMkLst>
-        </pc:spChg>
-        <pc:spChg chg="mod">
-          <ac:chgData name="Mohammed Fasha" userId="cc64f42d-a1a6-4f08-b97b-0c37f877119f" providerId="ADAL" clId="{BAA24B5F-E316-4807-ADAF-14922A29E8E2}" dt="2025-03-15T09:29:55.442" v="40" actId="1036"/>
-          <ac:spMkLst>
-            <pc:docMk/>
-            <pc:sldMk cId="3259240421" sldId="458"/>
-            <ac:spMk id="3" creationId="{00000000-0000-0000-0000-000000000000}"/>
-          </ac:spMkLst>
-        </pc:spChg>
-        <pc:spChg chg="add del mod ord">
-          <ac:chgData name="Mohammed Fasha" userId="cc64f42d-a1a6-4f08-b97b-0c37f877119f" providerId="ADAL" clId="{BAA24B5F-E316-4807-ADAF-14922A29E8E2}" dt="2025-03-15T09:29:42.049" v="2" actId="700"/>
-          <ac:spMkLst>
-            <pc:docMk/>
-            <pc:sldMk cId="3259240421" sldId="458"/>
-            <ac:spMk id="4" creationId="{33C25889-268B-713E-B7E2-8EEBE6DE3B2A}"/>
-          </ac:spMkLst>
-        </pc:spChg>
-        <pc:spChg chg="mod">
-          <ac:chgData name="Mohammed Fasha" userId="cc64f42d-a1a6-4f08-b97b-0c37f877119f" providerId="ADAL" clId="{BAA24B5F-E316-4807-ADAF-14922A29E8E2}" dt="2025-03-15T09:29:55.442" v="40" actId="1036"/>
-          <ac:spMkLst>
-            <pc:docMk/>
-            <pc:sldMk cId="3259240421" sldId="458"/>
-            <ac:spMk id="5" creationId="{00000000-0000-0000-0000-000000000000}"/>
-          </ac:spMkLst>
-        </pc:spChg>
-        <pc:spChg chg="add del mod ord">
-          <ac:chgData name="Mohammed Fasha" userId="cc64f42d-a1a6-4f08-b97b-0c37f877119f" providerId="ADAL" clId="{BAA24B5F-E316-4807-ADAF-14922A29E8E2}" dt="2025-03-15T09:29:42.049" v="2" actId="700"/>
-          <ac:spMkLst>
-            <pc:docMk/>
-            <pc:sldMk cId="3259240421" sldId="458"/>
-            <ac:spMk id="6" creationId="{A45441DB-71E6-CF02-C2E9-EFA7BF970AC0}"/>
-          </ac:spMkLst>
-        </pc:spChg>
-        <pc:spChg chg="mod">
-          <ac:chgData name="Mohammed Fasha" userId="cc64f42d-a1a6-4f08-b97b-0c37f877119f" providerId="ADAL" clId="{BAA24B5F-E316-4807-ADAF-14922A29E8E2}" dt="2025-03-15T09:29:55.442" v="40" actId="1036"/>
-          <ac:spMkLst>
-            <pc:docMk/>
-            <pc:sldMk cId="3259240421" sldId="458"/>
-            <ac:spMk id="7" creationId="{00000000-0000-0000-0000-000000000000}"/>
-          </ac:spMkLst>
-        </pc:spChg>
-        <pc:spChg chg="add mod ord">
-          <ac:chgData name="Mohammed Fasha" userId="cc64f42d-a1a6-4f08-b97b-0c37f877119f" providerId="ADAL" clId="{BAA24B5F-E316-4807-ADAF-14922A29E8E2}" dt="2025-03-15T09:30:10.852" v="75" actId="20577"/>
-          <ac:spMkLst>
-            <pc:docMk/>
-            <pc:sldMk cId="3259240421" sldId="458"/>
-            <ac:spMk id="8" creationId="{844C69F2-05F6-5350-5064-3146E8C405FE}"/>
-          </ac:spMkLst>
-        </pc:spChg>
-        <pc:spChg chg="add mod ord">
-          <ac:chgData name="Mohammed Fasha" userId="cc64f42d-a1a6-4f08-b97b-0c37f877119f" providerId="ADAL" clId="{BAA24B5F-E316-4807-ADAF-14922A29E8E2}" dt="2025-03-15T09:29:58.853" v="41" actId="700"/>
-          <ac:spMkLst>
-            <pc:docMk/>
-            <pc:sldMk cId="3259240421" sldId="458"/>
-            <ac:spMk id="9" creationId="{E77C13ED-BA33-EFC5-E059-C36C28A72D68}"/>
-          </ac:spMkLst>
-        </pc:spChg>
-        <pc:spChg chg="del">
-          <ac:chgData name="Mohammed Fasha" userId="cc64f42d-a1a6-4f08-b97b-0c37f877119f" providerId="ADAL" clId="{BAA24B5F-E316-4807-ADAF-14922A29E8E2}" dt="2025-03-15T09:29:47.435" v="3" actId="478"/>
-          <ac:spMkLst>
-            <pc:docMk/>
-            <pc:sldMk cId="3259240421" sldId="458"/>
-            <ac:spMk id="10" creationId="{00000000-0000-0000-0000-000000000000}"/>
-          </ac:spMkLst>
-        </pc:spChg>
-        <pc:spChg chg="mod">
-          <ac:chgData name="Mohammed Fasha" userId="cc64f42d-a1a6-4f08-b97b-0c37f877119f" providerId="ADAL" clId="{BAA24B5F-E316-4807-ADAF-14922A29E8E2}" dt="2025-03-15T09:29:55.442" v="40" actId="1036"/>
-          <ac:spMkLst>
-            <pc:docMk/>
-            <pc:sldMk cId="3259240421" sldId="458"/>
-            <ac:spMk id="15" creationId="{00000000-0000-0000-0000-000000000000}"/>
-          </ac:spMkLst>
-        </pc:spChg>
-        <pc:spChg chg="mod">
-          <ac:chgData name="Mohammed Fasha" userId="cc64f42d-a1a6-4f08-b97b-0c37f877119f" providerId="ADAL" clId="{BAA24B5F-E316-4807-ADAF-14922A29E8E2}" dt="2025-03-15T09:29:55.442" v="40" actId="1036"/>
-          <ac:spMkLst>
-            <pc:docMk/>
-            <pc:sldMk cId="3259240421" sldId="458"/>
-            <ac:spMk id="16" creationId="{00000000-0000-0000-0000-000000000000}"/>
-          </ac:spMkLst>
-        </pc:spChg>
-        <pc:spChg chg="mod">
-          <ac:chgData name="Mohammed Fasha" userId="cc64f42d-a1a6-4f08-b97b-0c37f877119f" providerId="ADAL" clId="{BAA24B5F-E316-4807-ADAF-14922A29E8E2}" dt="2025-03-15T09:29:55.442" v="40" actId="1036"/>
-          <ac:spMkLst>
-            <pc:docMk/>
-            <pc:sldMk cId="3259240421" sldId="458"/>
-            <ac:spMk id="22" creationId="{00000000-0000-0000-0000-000000000000}"/>
-          </ac:spMkLst>
-        </pc:spChg>
-        <pc:spChg chg="del">
-          <ac:chgData name="Mohammed Fasha" userId="cc64f42d-a1a6-4f08-b97b-0c37f877119f" providerId="ADAL" clId="{BAA24B5F-E316-4807-ADAF-14922A29E8E2}" dt="2025-03-15T09:29:51.486" v="4" actId="478"/>
-          <ac:spMkLst>
-            <pc:docMk/>
-            <pc:sldMk cId="3259240421" sldId="458"/>
-            <ac:spMk id="45060" creationId="{00000000-0000-0000-0000-000000000000}"/>
+            <pc:sldMk cId="1489447582" sldId="455"/>
+            <ac:spMk id="8" creationId="{107CF054-390C-DCFC-C9A6-9E95C859A175}"/>
           </ac:spMkLst>
         </pc:spChg>
       </pc:sldChg>
-      <pc:sldChg chg="modSp new mod">
-        <pc:chgData name="Mohammed Fasha" userId="cc64f42d-a1a6-4f08-b97b-0c37f877119f" providerId="ADAL" clId="{BAA24B5F-E316-4807-ADAF-14922A29E8E2}" dt="2025-03-15T10:54:27.780" v="83" actId="113"/>
+      <pc:sldChg chg="addSp delSp modSp mod modClrScheme chgLayout">
+        <pc:chgData name="Mohammed Fasha" userId="cc64f42d-a1a6-4f08-b97b-0c37f877119f" providerId="ADAL" clId="{0F6A92A6-FC46-466F-A1EC-286E38E3120A}" dt="2025-03-17T14:38:14.346" v="59" actId="14100"/>
         <pc:sldMkLst>
           <pc:docMk/>
           <pc:sldMk cId="48836864" sldId="459"/>
         </pc:sldMkLst>
         <pc:spChg chg="mod">
-          <ac:chgData name="Mohammed Fasha" userId="cc64f42d-a1a6-4f08-b97b-0c37f877119f" providerId="ADAL" clId="{BAA24B5F-E316-4807-ADAF-14922A29E8E2}" dt="2025-03-15T10:54:27.780" v="83" actId="113"/>
+          <ac:chgData name="Mohammed Fasha" userId="cc64f42d-a1a6-4f08-b97b-0c37f877119f" providerId="ADAL" clId="{0F6A92A6-FC46-466F-A1EC-286E38E3120A}" dt="2025-03-17T14:37:38.457" v="50" actId="26606"/>
           <ac:spMkLst>
             <pc:docMk/>
             <pc:sldMk cId="48836864" sldId="459"/>
             <ac:spMk id="2" creationId="{155C2314-3CF3-F0A9-685A-3156E5CE2674}"/>
           </ac:spMkLst>
         </pc:spChg>
-        <pc:spChg chg="mod">
-          <ac:chgData name="Mohammed Fasha" userId="cc64f42d-a1a6-4f08-b97b-0c37f877119f" providerId="ADAL" clId="{BAA24B5F-E316-4807-ADAF-14922A29E8E2}" dt="2025-03-15T10:54:22.602" v="78" actId="21"/>
+        <pc:spChg chg="mod ord">
+          <ac:chgData name="Mohammed Fasha" userId="cc64f42d-a1a6-4f08-b97b-0c37f877119f" providerId="ADAL" clId="{0F6A92A6-FC46-466F-A1EC-286E38E3120A}" dt="2025-03-17T14:38:14.346" v="59" actId="14100"/>
           <ac:spMkLst>
             <pc:docMk/>
             <pc:sldMk cId="48836864" sldId="459"/>
             <ac:spMk id="3" creationId="{B1CD1ADE-0294-A1FB-F5E9-1676C5183664}"/>
           </ac:spMkLst>
         </pc:spChg>
+        <pc:picChg chg="add mod">
+          <ac:chgData name="Mohammed Fasha" userId="cc64f42d-a1a6-4f08-b97b-0c37f877119f" providerId="ADAL" clId="{0F6A92A6-FC46-466F-A1EC-286E38E3120A}" dt="2025-03-17T14:38:11.721" v="58" actId="1076"/>
+          <ac:picMkLst>
+            <pc:docMk/>
+            <pc:sldMk cId="48836864" sldId="459"/>
+            <ac:picMk id="5" creationId="{C6DBBC5E-1505-3C9E-BC4A-D989A6A248A4}"/>
+          </ac:picMkLst>
+        </pc:picChg>
+        <pc:picChg chg="add del mod">
+          <ac:chgData name="Mohammed Fasha" userId="cc64f42d-a1a6-4f08-b97b-0c37f877119f" providerId="ADAL" clId="{0F6A92A6-FC46-466F-A1EC-286E38E3120A}" dt="2025-03-17T14:38:04.327" v="55" actId="478"/>
+          <ac:picMkLst>
+            <pc:docMk/>
+            <pc:sldMk cId="48836864" sldId="459"/>
+            <ac:picMk id="2050" creationId="{09D0301F-3995-0626-F659-923E8B7772AB}"/>
+          </ac:picMkLst>
+        </pc:picChg>
       </pc:sldChg>
-      <pc:sldChg chg="addSp modSp new mod">
-        <pc:chgData name="Mohammed Fasha" userId="cc64f42d-a1a6-4f08-b97b-0c37f877119f" providerId="ADAL" clId="{BAA24B5F-E316-4807-ADAF-14922A29E8E2}" dt="2025-03-15T11:11:44.181" v="127" actId="12385"/>
-        <pc:sldMkLst>
-          <pc:docMk/>
-          <pc:sldMk cId="928322667" sldId="460"/>
-        </pc:sldMkLst>
-        <pc:spChg chg="mod">
-          <ac:chgData name="Mohammed Fasha" userId="cc64f42d-a1a6-4f08-b97b-0c37f877119f" providerId="ADAL" clId="{BAA24B5F-E316-4807-ADAF-14922A29E8E2}" dt="2025-03-15T10:54:55.846" v="95" actId="113"/>
-          <ac:spMkLst>
-            <pc:docMk/>
-            <pc:sldMk cId="928322667" sldId="460"/>
-            <ac:spMk id="2" creationId="{51BB7355-8D6D-8485-0894-0AB532961579}"/>
-          </ac:spMkLst>
-        </pc:spChg>
-        <pc:spChg chg="mod">
-          <ac:chgData name="Mohammed Fasha" userId="cc64f42d-a1a6-4f08-b97b-0c37f877119f" providerId="ADAL" clId="{BAA24B5F-E316-4807-ADAF-14922A29E8E2}" dt="2025-03-15T10:58:15.086" v="98" actId="21"/>
-          <ac:spMkLst>
-            <pc:docMk/>
-            <pc:sldMk cId="928322667" sldId="460"/>
-            <ac:spMk id="3" creationId="{978D9617-84BF-81D4-C219-85A58FE307F3}"/>
-          </ac:spMkLst>
-        </pc:spChg>
-        <pc:graphicFrameChg chg="add mod modGraphic">
-          <ac:chgData name="Mohammed Fasha" userId="cc64f42d-a1a6-4f08-b97b-0c37f877119f" providerId="ADAL" clId="{BAA24B5F-E316-4807-ADAF-14922A29E8E2}" dt="2025-03-15T11:11:44.181" v="127" actId="12385"/>
-          <ac:graphicFrameMkLst>
-            <pc:docMk/>
-            <pc:sldMk cId="928322667" sldId="460"/>
-            <ac:graphicFrameMk id="4" creationId="{E227B7C6-2CDC-88BB-C41D-BC7307D9374E}"/>
-          </ac:graphicFrameMkLst>
-        </pc:graphicFrameChg>
-      </pc:sldChg>
-      <pc:sldChg chg="addSp delSp modSp add mod">
-        <pc:chgData name="Mohammed Fasha" userId="cc64f42d-a1a6-4f08-b97b-0c37f877119f" providerId="ADAL" clId="{BAA24B5F-E316-4807-ADAF-14922A29E8E2}" dt="2025-03-15T11:17:03.543" v="216" actId="21"/>
+      <pc:sldChg chg="modSp mod">
+        <pc:chgData name="Mohammed Fasha" userId="cc64f42d-a1a6-4f08-b97b-0c37f877119f" providerId="ADAL" clId="{0F6A92A6-FC46-466F-A1EC-286E38E3120A}" dt="2025-03-17T14:33:30.790" v="46" actId="27636"/>
         <pc:sldMkLst>
           <pc:docMk/>
           <pc:sldMk cId="1395444050" sldId="461"/>
         </pc:sldMkLst>
-        <pc:spChg chg="del">
-          <ac:chgData name="Mohammed Fasha" userId="cc64f42d-a1a6-4f08-b97b-0c37f877119f" providerId="ADAL" clId="{BAA24B5F-E316-4807-ADAF-14922A29E8E2}" dt="2025-03-15T10:57:59.724" v="96"/>
+        <pc:spChg chg="mod">
+          <ac:chgData name="Mohammed Fasha" userId="cc64f42d-a1a6-4f08-b97b-0c37f877119f" providerId="ADAL" clId="{0F6A92A6-FC46-466F-A1EC-286E38E3120A}" dt="2025-03-17T14:33:01.997" v="29"/>
           <ac:spMkLst>
             <pc:docMk/>
             <pc:sldMk cId="1395444050" sldId="461"/>
-            <ac:spMk id="3" creationId="{35E93A62-9443-3145-BE7E-7623D69C8376}"/>
+            <ac:spMk id="2" creationId="{138B03B8-D3CB-E120-0A40-13913A6145E3}"/>
           </ac:spMkLst>
         </pc:spChg>
-        <pc:spChg chg="add del mod">
-          <ac:chgData name="Mohammed Fasha" userId="cc64f42d-a1a6-4f08-b97b-0c37f877119f" providerId="ADAL" clId="{BAA24B5F-E316-4807-ADAF-14922A29E8E2}" dt="2025-03-15T11:04:11.870" v="104"/>
-          <ac:spMkLst>
-            <pc:docMk/>
-            <pc:sldMk cId="1395444050" sldId="461"/>
-            <ac:spMk id="6" creationId="{7623C3C0-E9C3-5221-3C5D-F8F78B7A1D59}"/>
-          </ac:spMkLst>
-        </pc:spChg>
-        <pc:spChg chg="add mod">
-          <ac:chgData name="Mohammed Fasha" userId="cc64f42d-a1a6-4f08-b97b-0c37f877119f" providerId="ADAL" clId="{BAA24B5F-E316-4807-ADAF-14922A29E8E2}" dt="2025-03-15T11:17:03.543" v="216" actId="21"/>
+        <pc:spChg chg="mod">
+          <ac:chgData name="Mohammed Fasha" userId="cc64f42d-a1a6-4f08-b97b-0c37f877119f" providerId="ADAL" clId="{0F6A92A6-FC46-466F-A1EC-286E38E3120A}" dt="2025-03-17T14:33:30.790" v="46" actId="27636"/>
           <ac:spMkLst>
             <pc:docMk/>
             <pc:sldMk cId="1395444050" sldId="461"/>
             <ac:spMk id="7" creationId="{CB06B31B-619A-A1D9-FE73-ACF05C08B9EA}"/>
           </ac:spMkLst>
         </pc:spChg>
-        <pc:graphicFrameChg chg="add del mod">
-          <ac:chgData name="Mohammed Fasha" userId="cc64f42d-a1a6-4f08-b97b-0c37f877119f" providerId="ADAL" clId="{BAA24B5F-E316-4807-ADAF-14922A29E8E2}" dt="2025-03-15T10:58:18.495" v="99" actId="21"/>
-          <ac:graphicFrameMkLst>
-            <pc:docMk/>
-            <pc:sldMk cId="1395444050" sldId="461"/>
-            <ac:graphicFrameMk id="4" creationId="{E227B7C6-2CDC-88BB-C41D-BC7307D9374E}"/>
-          </ac:graphicFrameMkLst>
-        </pc:graphicFrameChg>
-        <pc:picChg chg="add del mod">
-          <ac:chgData name="Mohammed Fasha" userId="cc64f42d-a1a6-4f08-b97b-0c37f877119f" providerId="ADAL" clId="{BAA24B5F-E316-4807-ADAF-14922A29E8E2}" dt="2025-03-15T11:17:03.543" v="216" actId="21"/>
-          <ac:picMkLst>
-            <pc:docMk/>
-            <pc:sldMk cId="1395444050" sldId="461"/>
-            <ac:picMk id="1026" creationId="{FF83FE64-97DB-E58E-0CC0-7EF8621200C9}"/>
-          </ac:picMkLst>
-        </pc:picChg>
       </pc:sldChg>
-      <pc:sldChg chg="addSp modSp add mod ord">
-        <pc:chgData name="Mohammed Fasha" userId="cc64f42d-a1a6-4f08-b97b-0c37f877119f" providerId="ADAL" clId="{BAA24B5F-E316-4807-ADAF-14922A29E8E2}" dt="2025-03-15T11:17:15.321" v="223" actId="1076"/>
-        <pc:sldMkLst>
-          <pc:docMk/>
-          <pc:sldMk cId="2284286539" sldId="462"/>
-        </pc:sldMkLst>
-        <pc:spChg chg="mod">
-          <ac:chgData name="Mohammed Fasha" userId="cc64f42d-a1a6-4f08-b97b-0c37f877119f" providerId="ADAL" clId="{BAA24B5F-E316-4807-ADAF-14922A29E8E2}" dt="2025-03-15T11:16:57.225" v="211" actId="113"/>
-          <ac:spMkLst>
-            <pc:docMk/>
-            <pc:sldMk cId="2284286539" sldId="462"/>
-            <ac:spMk id="2" creationId="{C87CB883-DFFD-09F6-5356-084C060B0614}"/>
-          </ac:spMkLst>
-        </pc:spChg>
-        <pc:spChg chg="mod">
-          <ac:chgData name="Mohammed Fasha" userId="cc64f42d-a1a6-4f08-b97b-0c37f877119f" providerId="ADAL" clId="{BAA24B5F-E316-4807-ADAF-14922A29E8E2}" dt="2025-03-15T11:17:08.019" v="218" actId="27636"/>
-          <ac:spMkLst>
-            <pc:docMk/>
-            <pc:sldMk cId="2284286539" sldId="462"/>
-            <ac:spMk id="3" creationId="{36DAAF18-EF8F-EF3B-EC26-A6DD77CB63EC}"/>
-          </ac:spMkLst>
-        </pc:spChg>
-        <pc:picChg chg="add mod">
-          <ac:chgData name="Mohammed Fasha" userId="cc64f42d-a1a6-4f08-b97b-0c37f877119f" providerId="ADAL" clId="{BAA24B5F-E316-4807-ADAF-14922A29E8E2}" dt="2025-03-15T11:17:15.321" v="223" actId="1076"/>
-          <ac:picMkLst>
-            <pc:docMk/>
-            <pc:sldMk cId="2284286539" sldId="462"/>
-            <ac:picMk id="1026" creationId="{FF83FE64-97DB-E58E-0CC0-7EF8621200C9}"/>
-          </ac:picMkLst>
-        </pc:picChg>
-      </pc:sldChg>
-      <pc:sldChg chg="add">
-        <pc:chgData name="Mohammed Fasha" userId="cc64f42d-a1a6-4f08-b97b-0c37f877119f" providerId="ADAL" clId="{BAA24B5F-E316-4807-ADAF-14922A29E8E2}" dt="2025-03-15T10:54:33.100" v="87"/>
-        <pc:sldMkLst>
-          <pc:docMk/>
-          <pc:sldMk cId="3026790438" sldId="463"/>
-        </pc:sldMkLst>
-      </pc:sldChg>
-      <pc:sldChg chg="add">
-        <pc:chgData name="Mohammed Fasha" userId="cc64f42d-a1a6-4f08-b97b-0c37f877119f" providerId="ADAL" clId="{BAA24B5F-E316-4807-ADAF-14922A29E8E2}" dt="2025-03-15T10:54:33.205" v="88"/>
-        <pc:sldMkLst>
-          <pc:docMk/>
-          <pc:sldMk cId="559781770" sldId="464"/>
-        </pc:sldMkLst>
-      </pc:sldChg>
-      <pc:sldChg chg="add">
-        <pc:chgData name="Mohammed Fasha" userId="cc64f42d-a1a6-4f08-b97b-0c37f877119f" providerId="ADAL" clId="{BAA24B5F-E316-4807-ADAF-14922A29E8E2}" dt="2025-03-15T10:54:33.392" v="89"/>
-        <pc:sldMkLst>
-          <pc:docMk/>
-          <pc:sldMk cId="1438401834" sldId="465"/>
-        </pc:sldMkLst>
-      </pc:sldChg>
-      <pc:sldChg chg="addSp delSp modSp add mod">
-        <pc:chgData name="Mohammed Fasha" userId="cc64f42d-a1a6-4f08-b97b-0c37f877119f" providerId="ADAL" clId="{BAA24B5F-E316-4807-ADAF-14922A29E8E2}" dt="2025-03-15T11:15:39.043" v="200" actId="14100"/>
-        <pc:sldMkLst>
-          <pc:docMk/>
-          <pc:sldMk cId="446689935" sldId="466"/>
-        </pc:sldMkLst>
-        <pc:spChg chg="mod">
-          <ac:chgData name="Mohammed Fasha" userId="cc64f42d-a1a6-4f08-b97b-0c37f877119f" providerId="ADAL" clId="{BAA24B5F-E316-4807-ADAF-14922A29E8E2}" dt="2025-03-15T11:12:35.210" v="138" actId="27636"/>
-          <ac:spMkLst>
-            <pc:docMk/>
-            <pc:sldMk cId="446689935" sldId="466"/>
-            <ac:spMk id="3" creationId="{01739F70-6609-23E4-8242-5877432501A5}"/>
-          </ac:spMkLst>
-        </pc:spChg>
-        <pc:spChg chg="add del">
-          <ac:chgData name="Mohammed Fasha" userId="cc64f42d-a1a6-4f08-b97b-0c37f877119f" providerId="ADAL" clId="{BAA24B5F-E316-4807-ADAF-14922A29E8E2}" dt="2025-03-15T11:13:25.879" v="158" actId="478"/>
-          <ac:spMkLst>
-            <pc:docMk/>
-            <pc:sldMk cId="446689935" sldId="466"/>
-            <ac:spMk id="5" creationId="{D602607A-5907-D5F1-7A45-DBAC8C1F402C}"/>
-          </ac:spMkLst>
-        </pc:spChg>
-        <pc:spChg chg="add mod">
-          <ac:chgData name="Mohammed Fasha" userId="cc64f42d-a1a6-4f08-b97b-0c37f877119f" providerId="ADAL" clId="{BAA24B5F-E316-4807-ADAF-14922A29E8E2}" dt="2025-03-15T11:15:39.043" v="200" actId="14100"/>
-          <ac:spMkLst>
-            <pc:docMk/>
-            <pc:sldMk cId="446689935" sldId="466"/>
-            <ac:spMk id="6" creationId="{92914B84-CEDA-F1F7-43A7-C8BAE37A70A8}"/>
-          </ac:spMkLst>
-        </pc:spChg>
-        <pc:graphicFrameChg chg="add mod modGraphic">
-          <ac:chgData name="Mohammed Fasha" userId="cc64f42d-a1a6-4f08-b97b-0c37f877119f" providerId="ADAL" clId="{BAA24B5F-E316-4807-ADAF-14922A29E8E2}" dt="2025-03-15T11:12:40.755" v="139" actId="1076"/>
-          <ac:graphicFrameMkLst>
-            <pc:docMk/>
-            <pc:sldMk cId="446689935" sldId="466"/>
-            <ac:graphicFrameMk id="4" creationId="{1E03E6E9-29DB-6231-D36D-166BD1A4B0BC}"/>
-          </ac:graphicFrameMkLst>
-        </pc:graphicFrameChg>
-        <pc:picChg chg="add mod">
-          <ac:chgData name="Mohammed Fasha" userId="cc64f42d-a1a6-4f08-b97b-0c37f877119f" providerId="ADAL" clId="{BAA24B5F-E316-4807-ADAF-14922A29E8E2}" dt="2025-03-15T11:12:44.215" v="140" actId="1076"/>
-          <ac:picMkLst>
-            <pc:docMk/>
-            <pc:sldMk cId="446689935" sldId="466"/>
-            <ac:picMk id="3074" creationId="{7838B5EC-812C-CDC8-5CFB-BD8E43326345}"/>
-          </ac:picMkLst>
-        </pc:picChg>
-      </pc:sldChg>
-      <pc:sldChg chg="modSp new mod">
-        <pc:chgData name="Mohammed Fasha" userId="cc64f42d-a1a6-4f08-b97b-0c37f877119f" providerId="ADAL" clId="{BAA24B5F-E316-4807-ADAF-14922A29E8E2}" dt="2025-03-15T11:50:13.661" v="227" actId="12"/>
+      <pc:sldChg chg="del">
+        <pc:chgData name="Mohammed Fasha" userId="cc64f42d-a1a6-4f08-b97b-0c37f877119f" providerId="ADAL" clId="{0F6A92A6-FC46-466F-A1EC-286E38E3120A}" dt="2025-03-17T14:38:51.198" v="60" actId="2696"/>
         <pc:sldMkLst>
           <pc:docMk/>
           <pc:sldMk cId="1353442942" sldId="467"/>
         </pc:sldMkLst>
-        <pc:spChg chg="mod">
-          <ac:chgData name="Mohammed Fasha" userId="cc64f42d-a1a6-4f08-b97b-0c37f877119f" providerId="ADAL" clId="{BAA24B5F-E316-4807-ADAF-14922A29E8E2}" dt="2025-03-15T11:50:13.661" v="227" actId="12"/>
-          <ac:spMkLst>
-            <pc:docMk/>
-            <pc:sldMk cId="1353442942" sldId="467"/>
-            <ac:spMk id="3" creationId="{D4586A0B-3C3C-CE61-6FE2-FBE78CD3EEBA}"/>
-          </ac:spMkLst>
-        </pc:spChg>
       </pc:sldChg>
-      <pc:sldChg chg="add">
-        <pc:chgData name="Mohammed Fasha" userId="cc64f42d-a1a6-4f08-b97b-0c37f877119f" providerId="ADAL" clId="{BAA24B5F-E316-4807-ADAF-14922A29E8E2}" dt="2025-03-15T11:17:00.994" v="213"/>
+      <pc:sldChg chg="del">
+        <pc:chgData name="Mohammed Fasha" userId="cc64f42d-a1a6-4f08-b97b-0c37f877119f" providerId="ADAL" clId="{0F6A92A6-FC46-466F-A1EC-286E38E3120A}" dt="2025-03-17T14:39:27.881" v="64" actId="47"/>
         <pc:sldMkLst>
           <pc:docMk/>
           <pc:sldMk cId="885699272" sldId="468"/>
         </pc:sldMkLst>
       </pc:sldChg>
-      <pc:sldChg chg="add">
-        <pc:chgData name="Mohammed Fasha" userId="cc64f42d-a1a6-4f08-b97b-0c37f877119f" providerId="ADAL" clId="{BAA24B5F-E316-4807-ADAF-14922A29E8E2}" dt="2025-03-15T11:17:01.159" v="214"/>
+      <pc:sldChg chg="modSp mod">
+        <pc:chgData name="Mohammed Fasha" userId="cc64f42d-a1a6-4f08-b97b-0c37f877119f" providerId="ADAL" clId="{0F6A92A6-FC46-466F-A1EC-286E38E3120A}" dt="2025-03-17T14:40:17.818" v="84" actId="27636"/>
         <pc:sldMkLst>
           <pc:docMk/>
           <pc:sldMk cId="2161886032" sldId="469"/>
         </pc:sldMkLst>
+        <pc:spChg chg="mod">
+          <ac:chgData name="Mohammed Fasha" userId="cc64f42d-a1a6-4f08-b97b-0c37f877119f" providerId="ADAL" clId="{0F6A92A6-FC46-466F-A1EC-286E38E3120A}" dt="2025-03-17T14:32:44.192" v="27"/>
+          <ac:spMkLst>
+            <pc:docMk/>
+            <pc:sldMk cId="2161886032" sldId="469"/>
+            <ac:spMk id="2" creationId="{ED4FA32C-6F9C-9804-E093-09E74C9799C1}"/>
+          </ac:spMkLst>
+        </pc:spChg>
+        <pc:spChg chg="mod">
+          <ac:chgData name="Mohammed Fasha" userId="cc64f42d-a1a6-4f08-b97b-0c37f877119f" providerId="ADAL" clId="{0F6A92A6-FC46-466F-A1EC-286E38E3120A}" dt="2025-03-17T14:40:17.818" v="84" actId="27636"/>
+          <ac:spMkLst>
+            <pc:docMk/>
+            <pc:sldMk cId="2161886032" sldId="469"/>
+            <ac:spMk id="3" creationId="{770A7C21-6D02-B7DF-767E-E64352F45247}"/>
+          </ac:spMkLst>
+        </pc:spChg>
       </pc:sldChg>
-      <pc:sldChg chg="add">
-        <pc:chgData name="Mohammed Fasha" userId="cc64f42d-a1a6-4f08-b97b-0c37f877119f" providerId="ADAL" clId="{BAA24B5F-E316-4807-ADAF-14922A29E8E2}" dt="2025-03-15T11:17:01.295" v="215"/>
+      <pc:sldChg chg="addSp delSp modSp mod">
+        <pc:chgData name="Mohammed Fasha" userId="cc64f42d-a1a6-4f08-b97b-0c37f877119f" providerId="ADAL" clId="{0F6A92A6-FC46-466F-A1EC-286E38E3120A}" dt="2025-03-17T14:32:20.173" v="25" actId="27636"/>
         <pc:sldMkLst>
           <pc:docMk/>
           <pc:sldMk cId="228845551" sldId="470"/>
         </pc:sldMkLst>
+        <pc:spChg chg="add del mod">
+          <ac:chgData name="Mohammed Fasha" userId="cc64f42d-a1a6-4f08-b97b-0c37f877119f" providerId="ADAL" clId="{0F6A92A6-FC46-466F-A1EC-286E38E3120A}" dt="2025-03-17T14:31:53.366" v="15"/>
+          <ac:spMkLst>
+            <pc:docMk/>
+            <pc:sldMk cId="228845551" sldId="470"/>
+            <ac:spMk id="2" creationId="{7F64B6DA-ED95-BF11-2E4C-2DFDC2E7185E}"/>
+          </ac:spMkLst>
+        </pc:spChg>
+        <pc:spChg chg="mod">
+          <ac:chgData name="Mohammed Fasha" userId="cc64f42d-a1a6-4f08-b97b-0c37f877119f" providerId="ADAL" clId="{0F6A92A6-FC46-466F-A1EC-286E38E3120A}" dt="2025-03-17T14:32:20.173" v="25" actId="27636"/>
+          <ac:spMkLst>
+            <pc:docMk/>
+            <pc:sldMk cId="228845551" sldId="470"/>
+            <ac:spMk id="3" creationId="{83BE0D35-F5BE-5721-912E-D6942DC23075}"/>
+          </ac:spMkLst>
+        </pc:spChg>
+        <pc:spChg chg="add mod">
+          <ac:chgData name="Mohammed Fasha" userId="cc64f42d-a1a6-4f08-b97b-0c37f877119f" providerId="ADAL" clId="{0F6A92A6-FC46-466F-A1EC-286E38E3120A}" dt="2025-03-17T14:31:51.225" v="13"/>
+          <ac:spMkLst>
+            <pc:docMk/>
+            <pc:sldMk cId="228845551" sldId="470"/>
+            <ac:spMk id="4" creationId="{BE57F77A-E83D-97EF-1829-633F8DD32E26}"/>
+          </ac:spMkLst>
+        </pc:spChg>
       </pc:sldChg>
-    </pc:docChg>
-  </pc:docChgLst>
-  <pc:docChgLst>
-    <pc:chgData name="Mohammed Fasha" userId="cc64f42d-a1a6-4f08-b97b-0c37f877119f" providerId="ADAL" clId="{5980B3BB-4EB6-4E37-92BF-3A2A8F4B2C7A}"/>
-    <pc:docChg chg="custSel modSld">
-      <pc:chgData name="Mohammed Fasha" userId="cc64f42d-a1a6-4f08-b97b-0c37f877119f" providerId="ADAL" clId="{5980B3BB-4EB6-4E37-92BF-3A2A8F4B2C7A}" dt="2024-10-15T02:28:13.535" v="0" actId="478"/>
-      <pc:docMkLst>
-        <pc:docMk/>
-      </pc:docMkLst>
-      <pc:sldChg chg="delSp mod">
-        <pc:chgData name="Mohammed Fasha" userId="cc64f42d-a1a6-4f08-b97b-0c37f877119f" providerId="ADAL" clId="{5980B3BB-4EB6-4E37-92BF-3A2A8F4B2C7A}" dt="2024-10-15T02:28:13.535" v="0" actId="478"/>
+      <pc:sldChg chg="modSp new mod">
+        <pc:chgData name="Mohammed Fasha" userId="cc64f42d-a1a6-4f08-b97b-0c37f877119f" providerId="ADAL" clId="{0F6A92A6-FC46-466F-A1EC-286E38E3120A}" dt="2025-03-17T14:39:47.242" v="67" actId="27636"/>
         <pc:sldMkLst>
           <pc:docMk/>
-          <pc:sldMk cId="2297456757" sldId="483"/>
+          <pc:sldMk cId="1729735699" sldId="471"/>
+        </pc:sldMkLst>
+        <pc:spChg chg="mod">
+          <ac:chgData name="Mohammed Fasha" userId="cc64f42d-a1a6-4f08-b97b-0c37f877119f" providerId="ADAL" clId="{0F6A92A6-FC46-466F-A1EC-286E38E3120A}" dt="2025-03-17T14:39:47.242" v="67" actId="27636"/>
+          <ac:spMkLst>
+            <pc:docMk/>
+            <pc:sldMk cId="1729735699" sldId="471"/>
+            <ac:spMk id="3" creationId="{F03A864D-27D6-2882-82A2-FC76937F57AC}"/>
+          </ac:spMkLst>
+        </pc:spChg>
+      </pc:sldChg>
+      <pc:sldChg chg="addSp modSp new del mod">
+        <pc:chgData name="Mohammed Fasha" userId="cc64f42d-a1a6-4f08-b97b-0c37f877119f" providerId="ADAL" clId="{0F6A92A6-FC46-466F-A1EC-286E38E3120A}" dt="2025-03-18T04:57:10.317" v="585" actId="2696"/>
+        <pc:sldMkLst>
+          <pc:docMk/>
+          <pc:sldMk cId="2766696385" sldId="472"/>
+        </pc:sldMkLst>
+        <pc:spChg chg="mod">
+          <ac:chgData name="Mohammed Fasha" userId="cc64f42d-a1a6-4f08-b97b-0c37f877119f" providerId="ADAL" clId="{0F6A92A6-FC46-466F-A1EC-286E38E3120A}" dt="2025-03-18T02:19:07.816" v="96" actId="113"/>
+          <ac:spMkLst>
+            <pc:docMk/>
+            <pc:sldMk cId="2766696385" sldId="472"/>
+            <ac:spMk id="2" creationId="{4452D5B9-2871-5EBC-A17B-8B8ADA8C4D99}"/>
+          </ac:spMkLst>
+        </pc:spChg>
+        <pc:spChg chg="mod">
+          <ac:chgData name="Mohammed Fasha" userId="cc64f42d-a1a6-4f08-b97b-0c37f877119f" providerId="ADAL" clId="{0F6A92A6-FC46-466F-A1EC-286E38E3120A}" dt="2025-03-18T02:18:59.725" v="87" actId="21"/>
+          <ac:spMkLst>
+            <pc:docMk/>
+            <pc:sldMk cId="2766696385" sldId="472"/>
+            <ac:spMk id="3" creationId="{79E5C41B-2FD3-F992-A765-8444BB41DA04}"/>
+          </ac:spMkLst>
+        </pc:spChg>
+        <pc:picChg chg="add mod">
+          <ac:chgData name="Mohammed Fasha" userId="cc64f42d-a1a6-4f08-b97b-0c37f877119f" providerId="ADAL" clId="{0F6A92A6-FC46-466F-A1EC-286E38E3120A}" dt="2025-03-18T02:42:09.841" v="548" actId="1076"/>
+          <ac:picMkLst>
+            <pc:docMk/>
+            <pc:sldMk cId="2766696385" sldId="472"/>
+            <ac:picMk id="4098" creationId="{025DC2D0-6CA1-4038-E4E8-460213DD782D}"/>
+          </ac:picMkLst>
+        </pc:picChg>
+      </pc:sldChg>
+      <pc:sldChg chg="addSp delSp modSp new del mod">
+        <pc:chgData name="Mohammed Fasha" userId="cc64f42d-a1a6-4f08-b97b-0c37f877119f" providerId="ADAL" clId="{0F6A92A6-FC46-466F-A1EC-286E38E3120A}" dt="2025-03-18T04:57:10.317" v="585" actId="2696"/>
+        <pc:sldMkLst>
+          <pc:docMk/>
+          <pc:sldMk cId="4180559926" sldId="473"/>
+        </pc:sldMkLst>
+        <pc:spChg chg="mod">
+          <ac:chgData name="Mohammed Fasha" userId="cc64f42d-a1a6-4f08-b97b-0c37f877119f" providerId="ADAL" clId="{0F6A92A6-FC46-466F-A1EC-286E38E3120A}" dt="2025-03-18T02:19:27.391" v="107" actId="113"/>
+          <ac:spMkLst>
+            <pc:docMk/>
+            <pc:sldMk cId="4180559926" sldId="473"/>
+            <ac:spMk id="2" creationId="{8B7D17C4-6900-2C0F-0B47-9A5FCC6EA098}"/>
+          </ac:spMkLst>
+        </pc:spChg>
+        <pc:spChg chg="mod">
+          <ac:chgData name="Mohammed Fasha" userId="cc64f42d-a1a6-4f08-b97b-0c37f877119f" providerId="ADAL" clId="{0F6A92A6-FC46-466F-A1EC-286E38E3120A}" dt="2025-03-18T02:19:23.100" v="102" actId="21"/>
+          <ac:spMkLst>
+            <pc:docMk/>
+            <pc:sldMk cId="4180559926" sldId="473"/>
+            <ac:spMk id="3" creationId="{C9361DA7-17F8-D8A5-8BD1-3E036B1B7481}"/>
+          </ac:spMkLst>
+        </pc:spChg>
+        <pc:picChg chg="add del mod">
+          <ac:chgData name="Mohammed Fasha" userId="cc64f42d-a1a6-4f08-b97b-0c37f877119f" providerId="ADAL" clId="{0F6A92A6-FC46-466F-A1EC-286E38E3120A}" dt="2025-03-18T02:40:39.450" v="539" actId="22"/>
+          <ac:picMkLst>
+            <pc:docMk/>
+            <pc:sldMk cId="4180559926" sldId="473"/>
+            <ac:picMk id="5" creationId="{5A3C67CC-E1A4-5501-1743-F4AEBE201B9C}"/>
+          </ac:picMkLst>
+        </pc:picChg>
+        <pc:picChg chg="add mod">
+          <ac:chgData name="Mohammed Fasha" userId="cc64f42d-a1a6-4f08-b97b-0c37f877119f" providerId="ADAL" clId="{0F6A92A6-FC46-466F-A1EC-286E38E3120A}" dt="2025-03-18T02:42:46.847" v="555" actId="1076"/>
+          <ac:picMkLst>
+            <pc:docMk/>
+            <pc:sldMk cId="4180559926" sldId="473"/>
+            <ac:picMk id="2050" creationId="{7630116A-9923-96DA-8CF5-ADBBBEB7A036}"/>
+          </ac:picMkLst>
+        </pc:picChg>
+        <pc:picChg chg="add mod">
+          <ac:chgData name="Mohammed Fasha" userId="cc64f42d-a1a6-4f08-b97b-0c37f877119f" providerId="ADAL" clId="{0F6A92A6-FC46-466F-A1EC-286E38E3120A}" dt="2025-03-18T02:42:48.015" v="556" actId="1076"/>
+          <ac:picMkLst>
+            <pc:docMk/>
+            <pc:sldMk cId="4180559926" sldId="473"/>
+            <ac:picMk id="2052" creationId="{EB087AD0-73F9-30FA-5ABB-5FA070408EF8}"/>
+          </ac:picMkLst>
+        </pc:picChg>
+      </pc:sldChg>
+      <pc:sldChg chg="addSp modSp add del mod">
+        <pc:chgData name="Mohammed Fasha" userId="cc64f42d-a1a6-4f08-b97b-0c37f877119f" providerId="ADAL" clId="{0F6A92A6-FC46-466F-A1EC-286E38E3120A}" dt="2025-03-18T04:57:10.317" v="585" actId="2696"/>
+        <pc:sldMkLst>
+          <pc:docMk/>
+          <pc:sldMk cId="3886989038" sldId="474"/>
+        </pc:sldMkLst>
+        <pc:spChg chg="mod">
+          <ac:chgData name="Mohammed Fasha" userId="cc64f42d-a1a6-4f08-b97b-0c37f877119f" providerId="ADAL" clId="{0F6A92A6-FC46-466F-A1EC-286E38E3120A}" dt="2025-03-18T02:19:41.981" v="114" actId="113"/>
+          <ac:spMkLst>
+            <pc:docMk/>
+            <pc:sldMk cId="3886989038" sldId="474"/>
+            <ac:spMk id="2" creationId="{9CF2ADF3-F48A-EB49-7342-FC2BDB58C924}"/>
+          </ac:spMkLst>
+        </pc:spChg>
+        <pc:spChg chg="mod">
+          <ac:chgData name="Mohammed Fasha" userId="cc64f42d-a1a6-4f08-b97b-0c37f877119f" providerId="ADAL" clId="{0F6A92A6-FC46-466F-A1EC-286E38E3120A}" dt="2025-03-18T02:43:57.732" v="559" actId="14100"/>
+          <ac:spMkLst>
+            <pc:docMk/>
+            <pc:sldMk cId="3886989038" sldId="474"/>
+            <ac:spMk id="3" creationId="{33F57CBD-BDEE-A091-DC95-C0CF009F3621}"/>
+          </ac:spMkLst>
+        </pc:spChg>
+        <pc:picChg chg="add mod">
+          <ac:chgData name="Mohammed Fasha" userId="cc64f42d-a1a6-4f08-b97b-0c37f877119f" providerId="ADAL" clId="{0F6A92A6-FC46-466F-A1EC-286E38E3120A}" dt="2025-03-18T02:43:54.290" v="558" actId="1076"/>
+          <ac:picMkLst>
+            <pc:docMk/>
+            <pc:sldMk cId="3886989038" sldId="474"/>
+            <ac:picMk id="5122" creationId="{F2502AE8-6FF3-3DFC-ACDD-63C906EA0049}"/>
+          </ac:picMkLst>
+        </pc:picChg>
+      </pc:sldChg>
+      <pc:sldChg chg="addSp modSp add del mod">
+        <pc:chgData name="Mohammed Fasha" userId="cc64f42d-a1a6-4f08-b97b-0c37f877119f" providerId="ADAL" clId="{0F6A92A6-FC46-466F-A1EC-286E38E3120A}" dt="2025-03-18T04:57:10.317" v="585" actId="2696"/>
+        <pc:sldMkLst>
+          <pc:docMk/>
+          <pc:sldMk cId="2121122174" sldId="475"/>
+        </pc:sldMkLst>
+        <pc:spChg chg="mod">
+          <ac:chgData name="Mohammed Fasha" userId="cc64f42d-a1a6-4f08-b97b-0c37f877119f" providerId="ADAL" clId="{0F6A92A6-FC46-466F-A1EC-286E38E3120A}" dt="2025-03-18T02:19:58.553" v="121" actId="113"/>
+          <ac:spMkLst>
+            <pc:docMk/>
+            <pc:sldMk cId="2121122174" sldId="475"/>
+            <ac:spMk id="2" creationId="{034644BA-C533-71FC-2C08-CE0B1E6B70FB}"/>
+          </ac:spMkLst>
+        </pc:spChg>
+        <pc:spChg chg="mod">
+          <ac:chgData name="Mohammed Fasha" userId="cc64f42d-a1a6-4f08-b97b-0c37f877119f" providerId="ADAL" clId="{0F6A92A6-FC46-466F-A1EC-286E38E3120A}" dt="2025-03-18T02:46:14.881" v="569" actId="14100"/>
+          <ac:spMkLst>
+            <pc:docMk/>
+            <pc:sldMk cId="2121122174" sldId="475"/>
+            <ac:spMk id="3" creationId="{E646A0DA-1B84-8ED0-EB37-1184187E49A0}"/>
+          </ac:spMkLst>
+        </pc:spChg>
+        <pc:spChg chg="add">
+          <ac:chgData name="Mohammed Fasha" userId="cc64f42d-a1a6-4f08-b97b-0c37f877119f" providerId="ADAL" clId="{0F6A92A6-FC46-466F-A1EC-286E38E3120A}" dt="2025-03-18T02:44:58.943" v="560"/>
+          <ac:spMkLst>
+            <pc:docMk/>
+            <pc:sldMk cId="2121122174" sldId="475"/>
+            <ac:spMk id="4" creationId="{044390B4-4495-AD64-202E-3159467E9114}"/>
+          </ac:spMkLst>
+        </pc:spChg>
+        <pc:picChg chg="add mod">
+          <ac:chgData name="Mohammed Fasha" userId="cc64f42d-a1a6-4f08-b97b-0c37f877119f" providerId="ADAL" clId="{0F6A92A6-FC46-466F-A1EC-286E38E3120A}" dt="2025-03-18T02:46:11.470" v="568" actId="1076"/>
+          <ac:picMkLst>
+            <pc:docMk/>
+            <pc:sldMk cId="2121122174" sldId="475"/>
+            <ac:picMk id="6148" creationId="{20CF0278-6C37-7374-B778-0F7349739BD4}"/>
+          </ac:picMkLst>
+        </pc:picChg>
+      </pc:sldChg>
+      <pc:sldChg chg="addSp modSp add del mod">
+        <pc:chgData name="Mohammed Fasha" userId="cc64f42d-a1a6-4f08-b97b-0c37f877119f" providerId="ADAL" clId="{0F6A92A6-FC46-466F-A1EC-286E38E3120A}" dt="2025-03-18T04:57:10.317" v="585" actId="2696"/>
+        <pc:sldMkLst>
+          <pc:docMk/>
+          <pc:sldMk cId="3813044436" sldId="476"/>
+        </pc:sldMkLst>
+        <pc:spChg chg="mod">
+          <ac:chgData name="Mohammed Fasha" userId="cc64f42d-a1a6-4f08-b97b-0c37f877119f" providerId="ADAL" clId="{0F6A92A6-FC46-466F-A1EC-286E38E3120A}" dt="2025-03-18T02:20:12.430" v="128" actId="113"/>
+          <ac:spMkLst>
+            <pc:docMk/>
+            <pc:sldMk cId="3813044436" sldId="476"/>
+            <ac:spMk id="2" creationId="{A2227078-7C24-6BBE-77CD-F9CDDA21086E}"/>
+          </ac:spMkLst>
+        </pc:spChg>
+        <pc:spChg chg="mod">
+          <ac:chgData name="Mohammed Fasha" userId="cc64f42d-a1a6-4f08-b97b-0c37f877119f" providerId="ADAL" clId="{0F6A92A6-FC46-466F-A1EC-286E38E3120A}" dt="2025-03-18T02:48:17.415" v="574" actId="27636"/>
+          <ac:spMkLst>
+            <pc:docMk/>
+            <pc:sldMk cId="3813044436" sldId="476"/>
+            <ac:spMk id="3" creationId="{B5680A53-1621-580E-DC68-4CC426721DC7}"/>
+          </ac:spMkLst>
+        </pc:spChg>
+        <pc:spChg chg="add mod">
+          <ac:chgData name="Mohammed Fasha" userId="cc64f42d-a1a6-4f08-b97b-0c37f877119f" providerId="ADAL" clId="{0F6A92A6-FC46-466F-A1EC-286E38E3120A}" dt="2025-03-18T02:48:33.776" v="584" actId="1076"/>
+          <ac:spMkLst>
+            <pc:docMk/>
+            <pc:sldMk cId="3813044436" sldId="476"/>
+            <ac:spMk id="5" creationId="{2C79CABB-8FF8-C238-31C7-C756933F0AFC}"/>
+          </ac:spMkLst>
+        </pc:spChg>
+      </pc:sldChg>
+      <pc:sldChg chg="addSp delSp modSp new mod modClrScheme chgLayout">
+        <pc:chgData name="Mohammed Fasha" userId="cc64f42d-a1a6-4f08-b97b-0c37f877119f" providerId="ADAL" clId="{0F6A92A6-FC46-466F-A1EC-286E38E3120A}" dt="2025-03-18T02:20:48.718" v="171" actId="26606"/>
+        <pc:sldMkLst>
+          <pc:docMk/>
+          <pc:sldMk cId="1668182246" sldId="477"/>
+        </pc:sldMkLst>
+        <pc:spChg chg="del mod ord">
+          <ac:chgData name="Mohammed Fasha" userId="cc64f42d-a1a6-4f08-b97b-0c37f877119f" providerId="ADAL" clId="{0F6A92A6-FC46-466F-A1EC-286E38E3120A}" dt="2025-03-18T02:20:18.302" v="130" actId="700"/>
+          <ac:spMkLst>
+            <pc:docMk/>
+            <pc:sldMk cId="1668182246" sldId="477"/>
+            <ac:spMk id="2" creationId="{480EB751-1AC3-164C-8ED7-DFF76B255433}"/>
+          </ac:spMkLst>
+        </pc:spChg>
+        <pc:spChg chg="del">
+          <ac:chgData name="Mohammed Fasha" userId="cc64f42d-a1a6-4f08-b97b-0c37f877119f" providerId="ADAL" clId="{0F6A92A6-FC46-466F-A1EC-286E38E3120A}" dt="2025-03-18T02:20:18.302" v="130" actId="700"/>
+          <ac:spMkLst>
+            <pc:docMk/>
+            <pc:sldMk cId="1668182246" sldId="477"/>
+            <ac:spMk id="3" creationId="{0B59A71D-8D56-3575-D385-E6CCABA0E109}"/>
+          </ac:spMkLst>
+        </pc:spChg>
+        <pc:spChg chg="add del mod ord">
+          <ac:chgData name="Mohammed Fasha" userId="cc64f42d-a1a6-4f08-b97b-0c37f877119f" providerId="ADAL" clId="{0F6A92A6-FC46-466F-A1EC-286E38E3120A}" dt="2025-03-18T02:20:22.533" v="131" actId="700"/>
+          <ac:spMkLst>
+            <pc:docMk/>
+            <pc:sldMk cId="1668182246" sldId="477"/>
+            <ac:spMk id="4" creationId="{2CCC674E-0FE3-C50D-D1F5-86649D89E5EC}"/>
+          </ac:spMkLst>
+        </pc:spChg>
+        <pc:spChg chg="add mod ord">
+          <ac:chgData name="Mohammed Fasha" userId="cc64f42d-a1a6-4f08-b97b-0c37f877119f" providerId="ADAL" clId="{0F6A92A6-FC46-466F-A1EC-286E38E3120A}" dt="2025-03-18T02:20:48.718" v="171" actId="26606"/>
+          <ac:spMkLst>
+            <pc:docMk/>
+            <pc:sldMk cId="1668182246" sldId="477"/>
+            <ac:spMk id="5" creationId="{41133BFA-5BB3-2A95-7FFB-71799237C144}"/>
+          </ac:spMkLst>
+        </pc:spChg>
+        <pc:spChg chg="add del mod ord">
+          <ac:chgData name="Mohammed Fasha" userId="cc64f42d-a1a6-4f08-b97b-0c37f877119f" providerId="ADAL" clId="{0F6A92A6-FC46-466F-A1EC-286E38E3120A}" dt="2025-03-18T02:20:48.718" v="171" actId="26606"/>
+          <ac:spMkLst>
+            <pc:docMk/>
+            <pc:sldMk cId="1668182246" sldId="477"/>
+            <ac:spMk id="6" creationId="{F055FB20-75AA-C3E2-08F5-78605162D8E3}"/>
+          </ac:spMkLst>
+        </pc:spChg>
+        <pc:picChg chg="add del">
+          <ac:chgData name="Mohammed Fasha" userId="cc64f42d-a1a6-4f08-b97b-0c37f877119f" providerId="ADAL" clId="{0F6A92A6-FC46-466F-A1EC-286E38E3120A}" dt="2025-03-18T02:20:48.718" v="171" actId="26606"/>
+          <ac:picMkLst>
+            <pc:docMk/>
+            <pc:sldMk cId="1668182246" sldId="477"/>
+            <ac:picMk id="8" creationId="{A8AE14D0-945A-04D7-0E42-6429905FE345}"/>
+          </ac:picMkLst>
+        </pc:picChg>
+      </pc:sldChg>
+      <pc:sldChg chg="addSp delSp modSp new del mod modClrScheme chgLayout">
+        <pc:chgData name="Mohammed Fasha" userId="cc64f42d-a1a6-4f08-b97b-0c37f877119f" providerId="ADAL" clId="{0F6A92A6-FC46-466F-A1EC-286E38E3120A}" dt="2025-03-18T04:57:10.317" v="585" actId="2696"/>
+        <pc:sldMkLst>
+          <pc:docMk/>
+          <pc:sldMk cId="4029215541" sldId="478"/>
+        </pc:sldMkLst>
+        <pc:spChg chg="del mod ord">
+          <ac:chgData name="Mohammed Fasha" userId="cc64f42d-a1a6-4f08-b97b-0c37f877119f" providerId="ADAL" clId="{0F6A92A6-FC46-466F-A1EC-286E38E3120A}" dt="2025-03-18T02:20:59.138" v="173" actId="700"/>
+          <ac:spMkLst>
+            <pc:docMk/>
+            <pc:sldMk cId="4029215541" sldId="478"/>
+            <ac:spMk id="2" creationId="{2514CBE5-0B96-313A-9EEC-507BA7D771F0}"/>
+          </ac:spMkLst>
+        </pc:spChg>
+        <pc:spChg chg="del mod ord">
+          <ac:chgData name="Mohammed Fasha" userId="cc64f42d-a1a6-4f08-b97b-0c37f877119f" providerId="ADAL" clId="{0F6A92A6-FC46-466F-A1EC-286E38E3120A}" dt="2025-03-18T02:20:59.138" v="173" actId="700"/>
+          <ac:spMkLst>
+            <pc:docMk/>
+            <pc:sldMk cId="4029215541" sldId="478"/>
+            <ac:spMk id="3" creationId="{5F0ADC11-941B-F19D-E1DA-9066DA3AC0F1}"/>
+          </ac:spMkLst>
+        </pc:spChg>
+        <pc:spChg chg="add mod ord">
+          <ac:chgData name="Mohammed Fasha" userId="cc64f42d-a1a6-4f08-b97b-0c37f877119f" providerId="ADAL" clId="{0F6A92A6-FC46-466F-A1EC-286E38E3120A}" dt="2025-03-18T02:21:12.820" v="213" actId="313"/>
+          <ac:spMkLst>
+            <pc:docMk/>
+            <pc:sldMk cId="4029215541" sldId="478"/>
+            <ac:spMk id="4" creationId="{793E821F-BAF6-0898-5351-94EACE7EC986}"/>
+          </ac:spMkLst>
+        </pc:spChg>
+        <pc:spChg chg="add mod ord">
+          <ac:chgData name="Mohammed Fasha" userId="cc64f42d-a1a6-4f08-b97b-0c37f877119f" providerId="ADAL" clId="{0F6A92A6-FC46-466F-A1EC-286E38E3120A}" dt="2025-03-18T02:20:59.138" v="173" actId="700"/>
+          <ac:spMkLst>
+            <pc:docMk/>
+            <pc:sldMk cId="4029215541" sldId="478"/>
+            <ac:spMk id="5" creationId="{1A932A36-31D2-0C47-D223-E7AF6CE8B777}"/>
+          </ac:spMkLst>
+        </pc:spChg>
+      </pc:sldChg>
+      <pc:sldChg chg="modSp new del mod">
+        <pc:chgData name="Mohammed Fasha" userId="cc64f42d-a1a6-4f08-b97b-0c37f877119f" providerId="ADAL" clId="{0F6A92A6-FC46-466F-A1EC-286E38E3120A}" dt="2025-03-18T04:57:10.317" v="585" actId="2696"/>
+        <pc:sldMkLst>
+          <pc:docMk/>
+          <pc:sldMk cId="1482389771" sldId="479"/>
+        </pc:sldMkLst>
+        <pc:spChg chg="mod">
+          <ac:chgData name="Mohammed Fasha" userId="cc64f42d-a1a6-4f08-b97b-0c37f877119f" providerId="ADAL" clId="{0F6A92A6-FC46-466F-A1EC-286E38E3120A}" dt="2025-03-18T02:21:36.912" v="223" actId="113"/>
+          <ac:spMkLst>
+            <pc:docMk/>
+            <pc:sldMk cId="1482389771" sldId="479"/>
+            <ac:spMk id="2" creationId="{CB035CE7-80AB-8635-4D30-14DEED3D6874}"/>
+          </ac:spMkLst>
+        </pc:spChg>
+        <pc:spChg chg="mod">
+          <ac:chgData name="Mohammed Fasha" userId="cc64f42d-a1a6-4f08-b97b-0c37f877119f" providerId="ADAL" clId="{0F6A92A6-FC46-466F-A1EC-286E38E3120A}" dt="2025-03-18T02:21:33.290" v="218" actId="21"/>
+          <ac:spMkLst>
+            <pc:docMk/>
+            <pc:sldMk cId="1482389771" sldId="479"/>
+            <ac:spMk id="3" creationId="{F3111502-A9CC-025F-C1CA-98E6013AA1B7}"/>
+          </ac:spMkLst>
+        </pc:spChg>
+      </pc:sldChg>
+      <pc:sldChg chg="modSp add del mod">
+        <pc:chgData name="Mohammed Fasha" userId="cc64f42d-a1a6-4f08-b97b-0c37f877119f" providerId="ADAL" clId="{0F6A92A6-FC46-466F-A1EC-286E38E3120A}" dt="2025-03-18T04:57:10.317" v="585" actId="2696"/>
+        <pc:sldMkLst>
+          <pc:docMk/>
+          <pc:sldMk cId="3600746956" sldId="480"/>
+        </pc:sldMkLst>
+        <pc:spChg chg="mod">
+          <ac:chgData name="Mohammed Fasha" userId="cc64f42d-a1a6-4f08-b97b-0c37f877119f" providerId="ADAL" clId="{0F6A92A6-FC46-466F-A1EC-286E38E3120A}" dt="2025-03-18T02:21:51.405" v="230" actId="113"/>
+          <ac:spMkLst>
+            <pc:docMk/>
+            <pc:sldMk cId="3600746956" sldId="480"/>
+            <ac:spMk id="2" creationId="{216EFD43-EC78-2760-4441-6FA5BB144341}"/>
+          </ac:spMkLst>
+        </pc:spChg>
+        <pc:spChg chg="mod">
+          <ac:chgData name="Mohammed Fasha" userId="cc64f42d-a1a6-4f08-b97b-0c37f877119f" providerId="ADAL" clId="{0F6A92A6-FC46-466F-A1EC-286E38E3120A}" dt="2025-03-18T02:21:47.479" v="225" actId="21"/>
+          <ac:spMkLst>
+            <pc:docMk/>
+            <pc:sldMk cId="3600746956" sldId="480"/>
+            <ac:spMk id="3" creationId="{F475C58F-C92D-F889-C5B6-A17F6FDA146D}"/>
+          </ac:spMkLst>
+        </pc:spChg>
+      </pc:sldChg>
+      <pc:sldChg chg="modSp add del mod">
+        <pc:chgData name="Mohammed Fasha" userId="cc64f42d-a1a6-4f08-b97b-0c37f877119f" providerId="ADAL" clId="{0F6A92A6-FC46-466F-A1EC-286E38E3120A}" dt="2025-03-18T04:57:10.317" v="585" actId="2696"/>
+        <pc:sldMkLst>
+          <pc:docMk/>
+          <pc:sldMk cId="2640097628" sldId="481"/>
+        </pc:sldMkLst>
+        <pc:spChg chg="mod">
+          <ac:chgData name="Mohammed Fasha" userId="cc64f42d-a1a6-4f08-b97b-0c37f877119f" providerId="ADAL" clId="{0F6A92A6-FC46-466F-A1EC-286E38E3120A}" dt="2025-03-18T02:22:08.346" v="237" actId="113"/>
+          <ac:spMkLst>
+            <pc:docMk/>
+            <pc:sldMk cId="2640097628" sldId="481"/>
+            <ac:spMk id="2" creationId="{EE500019-8324-2143-7CB7-6F3BC99C24FF}"/>
+          </ac:spMkLst>
+        </pc:spChg>
+        <pc:spChg chg="mod">
+          <ac:chgData name="Mohammed Fasha" userId="cc64f42d-a1a6-4f08-b97b-0c37f877119f" providerId="ADAL" clId="{0F6A92A6-FC46-466F-A1EC-286E38E3120A}" dt="2025-03-18T02:22:03.964" v="232" actId="21"/>
+          <ac:spMkLst>
+            <pc:docMk/>
+            <pc:sldMk cId="2640097628" sldId="481"/>
+            <ac:spMk id="3" creationId="{F40983DB-FB32-D093-B285-908335E0EBCB}"/>
+          </ac:spMkLst>
+        </pc:spChg>
+      </pc:sldChg>
+      <pc:sldChg chg="addSp delSp modSp new del mod">
+        <pc:chgData name="Mohammed Fasha" userId="cc64f42d-a1a6-4f08-b97b-0c37f877119f" providerId="ADAL" clId="{0F6A92A6-FC46-466F-A1EC-286E38E3120A}" dt="2025-03-18T04:57:10.317" v="585" actId="2696"/>
+        <pc:sldMkLst>
+          <pc:docMk/>
+          <pc:sldMk cId="2594727727" sldId="482"/>
+        </pc:sldMkLst>
+        <pc:spChg chg="mod">
+          <ac:chgData name="Mohammed Fasha" userId="cc64f42d-a1a6-4f08-b97b-0c37f877119f" providerId="ADAL" clId="{0F6A92A6-FC46-466F-A1EC-286E38E3120A}" dt="2025-03-18T02:29:59.903" v="364" actId="113"/>
+          <ac:spMkLst>
+            <pc:docMk/>
+            <pc:sldMk cId="2594727727" sldId="482"/>
+            <ac:spMk id="2" creationId="{EACFC16C-8860-B029-0EE9-E73174EF5713}"/>
+          </ac:spMkLst>
+        </pc:spChg>
+        <pc:spChg chg="mod">
+          <ac:chgData name="Mohammed Fasha" userId="cc64f42d-a1a6-4f08-b97b-0c37f877119f" providerId="ADAL" clId="{0F6A92A6-FC46-466F-A1EC-286E38E3120A}" dt="2025-03-18T02:25:37.533" v="293" actId="14100"/>
+          <ac:spMkLst>
+            <pc:docMk/>
+            <pc:sldMk cId="2594727727" sldId="482"/>
+            <ac:spMk id="3" creationId="{F2BED763-A0A8-5732-8758-7FD0E4F9D426}"/>
+          </ac:spMkLst>
+        </pc:spChg>
+        <pc:spChg chg="add">
+          <ac:chgData name="Mohammed Fasha" userId="cc64f42d-a1a6-4f08-b97b-0c37f877119f" providerId="ADAL" clId="{0F6A92A6-FC46-466F-A1EC-286E38E3120A}" dt="2025-03-18T02:25:40.375" v="294"/>
+          <ac:spMkLst>
+            <pc:docMk/>
+            <pc:sldMk cId="2594727727" sldId="482"/>
+            <ac:spMk id="4" creationId="{648BC27D-70F7-9339-C6A4-8F1FD5105A26}"/>
+          </ac:spMkLst>
+        </pc:spChg>
+        <pc:spChg chg="add del mod">
+          <ac:chgData name="Mohammed Fasha" userId="cc64f42d-a1a6-4f08-b97b-0c37f877119f" providerId="ADAL" clId="{0F6A92A6-FC46-466F-A1EC-286E38E3120A}" dt="2025-03-18T02:35:02.545" v="507" actId="1076"/>
+          <ac:spMkLst>
+            <pc:docMk/>
+            <pc:sldMk cId="2594727727" sldId="482"/>
+            <ac:spMk id="5" creationId="{18F80362-1732-E569-BE73-51486D1CD695}"/>
+          </ac:spMkLst>
+        </pc:spChg>
+        <pc:spChg chg="add">
+          <ac:chgData name="Mohammed Fasha" userId="cc64f42d-a1a6-4f08-b97b-0c37f877119f" providerId="ADAL" clId="{0F6A92A6-FC46-466F-A1EC-286E38E3120A}" dt="2025-03-18T02:25:49.702" v="296"/>
+          <ac:spMkLst>
+            <pc:docMk/>
+            <pc:sldMk cId="2594727727" sldId="482"/>
+            <ac:spMk id="6" creationId="{05CF45DF-F9F3-4A55-FFD9-1F7E626D8DFF}"/>
+          </ac:spMkLst>
+        </pc:spChg>
+        <pc:picChg chg="add mod">
+          <ac:chgData name="Mohammed Fasha" userId="cc64f42d-a1a6-4f08-b97b-0c37f877119f" providerId="ADAL" clId="{0F6A92A6-FC46-466F-A1EC-286E38E3120A}" dt="2025-03-18T02:35:07.740" v="509" actId="1076"/>
+          <ac:picMkLst>
+            <pc:docMk/>
+            <pc:sldMk cId="2594727727" sldId="482"/>
+            <ac:picMk id="8" creationId="{AB7816A1-1E19-6FFB-9D01-9972659A1DFA}"/>
+          </ac:picMkLst>
+        </pc:picChg>
+      </pc:sldChg>
+      <pc:sldChg chg="addSp modSp add del mod">
+        <pc:chgData name="Mohammed Fasha" userId="cc64f42d-a1a6-4f08-b97b-0c37f877119f" providerId="ADAL" clId="{0F6A92A6-FC46-466F-A1EC-286E38E3120A}" dt="2025-03-18T04:57:10.317" v="585" actId="2696"/>
+        <pc:sldMkLst>
+          <pc:docMk/>
+          <pc:sldMk cId="395748561" sldId="483"/>
+        </pc:sldMkLst>
+        <pc:spChg chg="mod">
+          <ac:chgData name="Mohammed Fasha" userId="cc64f42d-a1a6-4f08-b97b-0c37f877119f" providerId="ADAL" clId="{0F6A92A6-FC46-466F-A1EC-286E38E3120A}" dt="2025-03-18T02:29:45.039" v="355" actId="113"/>
+          <ac:spMkLst>
+            <pc:docMk/>
+            <pc:sldMk cId="395748561" sldId="483"/>
+            <ac:spMk id="2" creationId="{82FAE5B0-8B42-A9B6-913D-6BC3C8CE02B4}"/>
+          </ac:spMkLst>
+        </pc:spChg>
+        <pc:spChg chg="mod">
+          <ac:chgData name="Mohammed Fasha" userId="cc64f42d-a1a6-4f08-b97b-0c37f877119f" providerId="ADAL" clId="{0F6A92A6-FC46-466F-A1EC-286E38E3120A}" dt="2025-03-18T02:32:56.805" v="407" actId="948"/>
+          <ac:spMkLst>
+            <pc:docMk/>
+            <pc:sldMk cId="395748561" sldId="483"/>
+            <ac:spMk id="3" creationId="{F5393F2B-7C45-0710-E1FA-4562BC905689}"/>
+          </ac:spMkLst>
+        </pc:spChg>
+        <pc:spChg chg="add mod">
+          <ac:chgData name="Mohammed Fasha" userId="cc64f42d-a1a6-4f08-b97b-0c37f877119f" providerId="ADAL" clId="{0F6A92A6-FC46-466F-A1EC-286E38E3120A}" dt="2025-03-18T02:29:28.065" v="349" actId="1076"/>
+          <ac:spMkLst>
+            <pc:docMk/>
+            <pc:sldMk cId="395748561" sldId="483"/>
+            <ac:spMk id="4" creationId="{48DA7D80-E0D4-EBF4-547D-9B64B160E756}"/>
+          </ac:spMkLst>
+        </pc:spChg>
+      </pc:sldChg>
+      <pc:sldChg chg="addSp modSp add del mod">
+        <pc:chgData name="Mohammed Fasha" userId="cc64f42d-a1a6-4f08-b97b-0c37f877119f" providerId="ADAL" clId="{0F6A92A6-FC46-466F-A1EC-286E38E3120A}" dt="2025-03-18T04:57:10.317" v="585" actId="2696"/>
+        <pc:sldMkLst>
+          <pc:docMk/>
+          <pc:sldMk cId="1898826015" sldId="484"/>
+        </pc:sldMkLst>
+        <pc:spChg chg="mod">
+          <ac:chgData name="Mohammed Fasha" userId="cc64f42d-a1a6-4f08-b97b-0c37f877119f" providerId="ADAL" clId="{0F6A92A6-FC46-466F-A1EC-286E38E3120A}" dt="2025-03-18T02:30:16.761" v="373" actId="113"/>
+          <ac:spMkLst>
+            <pc:docMk/>
+            <pc:sldMk cId="1898826015" sldId="484"/>
+            <ac:spMk id="2" creationId="{D779CBF4-EB4D-4CA8-B5D3-C93329CF2647}"/>
+          </ac:spMkLst>
+        </pc:spChg>
+        <pc:spChg chg="mod">
+          <ac:chgData name="Mohammed Fasha" userId="cc64f42d-a1a6-4f08-b97b-0c37f877119f" providerId="ADAL" clId="{0F6A92A6-FC46-466F-A1EC-286E38E3120A}" dt="2025-03-18T02:31:14.338" v="401" actId="14100"/>
+          <ac:spMkLst>
+            <pc:docMk/>
+            <pc:sldMk cId="1898826015" sldId="484"/>
+            <ac:spMk id="3" creationId="{3BA454D4-9812-1209-CD60-8EB223E38EEF}"/>
+          </ac:spMkLst>
+        </pc:spChg>
+        <pc:spChg chg="add mod">
+          <ac:chgData name="Mohammed Fasha" userId="cc64f42d-a1a6-4f08-b97b-0c37f877119f" providerId="ADAL" clId="{0F6A92A6-FC46-466F-A1EC-286E38E3120A}" dt="2025-03-18T02:33:26.635" v="416" actId="1076"/>
+          <ac:spMkLst>
+            <pc:docMk/>
+            <pc:sldMk cId="1898826015" sldId="484"/>
+            <ac:spMk id="4" creationId="{F66949F1-BF3E-9D3B-4FE8-CC86D498208F}"/>
+          </ac:spMkLst>
+        </pc:spChg>
+      </pc:sldChg>
+      <pc:sldChg chg="add del">
+        <pc:chgData name="Mohammed Fasha" userId="cc64f42d-a1a6-4f08-b97b-0c37f877119f" providerId="ADAL" clId="{0F6A92A6-FC46-466F-A1EC-286E38E3120A}" dt="2025-03-18T04:57:12.217" v="586" actId="47"/>
+        <pc:sldMkLst>
+          <pc:docMk/>
+          <pc:sldMk cId="2357244130" sldId="485"/>
         </pc:sldMkLst>
       </pc:sldChg>
-    </pc:docChg>
-  </pc:docChgLst>
-  <pc:docChgLst>
-    <pc:chgData name="Mohammed Fasha" userId="cc64f42d-a1a6-4f08-b97b-0c37f877119f" providerId="ADAL" clId="{4C71ED24-115E-432D-933D-C801DA3E52F1}"/>
-    <pc:docChg chg="delSld">
-      <pc:chgData name="Mohammed Fasha" userId="cc64f42d-a1a6-4f08-b97b-0c37f877119f" providerId="ADAL" clId="{4C71ED24-115E-432D-933D-C801DA3E52F1}" dt="2024-12-29T03:12:49.974" v="2" actId="47"/>
-      <pc:docMkLst>
-        <pc:docMk/>
-      </pc:docMkLst>
-      <pc:sldChg chg="del">
-        <pc:chgData name="Mohammed Fasha" userId="cc64f42d-a1a6-4f08-b97b-0c37f877119f" providerId="ADAL" clId="{4C71ED24-115E-432D-933D-C801DA3E52F1}" dt="2024-12-29T03:12:48.360" v="0" actId="47"/>
+      <pc:sldChg chg="delSp modSp add del mod">
+        <pc:chgData name="Mohammed Fasha" userId="cc64f42d-a1a6-4f08-b97b-0c37f877119f" providerId="ADAL" clId="{0F6A92A6-FC46-466F-A1EC-286E38E3120A}" dt="2025-03-18T04:57:10.317" v="585" actId="2696"/>
         <pc:sldMkLst>
           <pc:docMk/>
-          <pc:sldMk cId="2341000601" sldId="701"/>
+          <pc:sldMk cId="2842851281" sldId="486"/>
         </pc:sldMkLst>
-      </pc:sldChg>
-      <pc:sldChg chg="del">
-        <pc:chgData name="Mohammed Fasha" userId="cc64f42d-a1a6-4f08-b97b-0c37f877119f" providerId="ADAL" clId="{4C71ED24-115E-432D-933D-C801DA3E52F1}" dt="2024-12-29T03:12:49.133" v="1" actId="47"/>
-        <pc:sldMkLst>
-          <pc:docMk/>
-          <pc:sldMk cId="3519698944" sldId="702"/>
-        </pc:sldMkLst>
-      </pc:sldChg>
-      <pc:sldChg chg="del">
-        <pc:chgData name="Mohammed Fasha" userId="cc64f42d-a1a6-4f08-b97b-0c37f877119f" providerId="ADAL" clId="{4C71ED24-115E-432D-933D-C801DA3E52F1}" dt="2024-12-29T03:12:49.974" v="2" actId="47"/>
-        <pc:sldMkLst>
-          <pc:docMk/>
-          <pc:sldMk cId="3934257344" sldId="703"/>
-        </pc:sldMkLst>
+        <pc:spChg chg="mod">
+          <ac:chgData name="Mohammed Fasha" userId="cc64f42d-a1a6-4f08-b97b-0c37f877119f" providerId="ADAL" clId="{0F6A92A6-FC46-466F-A1EC-286E38E3120A}" dt="2025-03-18T02:34:14.790" v="492" actId="20577"/>
+          <ac:spMkLst>
+            <pc:docMk/>
+            <pc:sldMk cId="2842851281" sldId="486"/>
+            <ac:spMk id="2" creationId="{33305948-F64F-5764-8258-F72ACF557022}"/>
+          </ac:spMkLst>
+        </pc:spChg>
+        <pc:spChg chg="mod">
+          <ac:chgData name="Mohammed Fasha" userId="cc64f42d-a1a6-4f08-b97b-0c37f877119f" providerId="ADAL" clId="{0F6A92A6-FC46-466F-A1EC-286E38E3120A}" dt="2025-03-18T02:34:45.917" v="503" actId="27636"/>
+          <ac:spMkLst>
+            <pc:docMk/>
+            <pc:sldMk cId="2842851281" sldId="486"/>
+            <ac:spMk id="3" creationId="{9B51F95D-5599-9D1A-17E3-049E587B0402}"/>
+          </ac:spMkLst>
+        </pc:spChg>
+        <pc:spChg chg="mod">
+          <ac:chgData name="Mohammed Fasha" userId="cc64f42d-a1a6-4f08-b97b-0c37f877119f" providerId="ADAL" clId="{0F6A92A6-FC46-466F-A1EC-286E38E3120A}" dt="2025-03-18T02:36:29.747" v="520" actId="20577"/>
+          <ac:spMkLst>
+            <pc:docMk/>
+            <pc:sldMk cId="2842851281" sldId="486"/>
+            <ac:spMk id="5" creationId="{0E875229-EE15-C44C-F1A7-4DB41F5AF424}"/>
+          </ac:spMkLst>
+        </pc:spChg>
+        <pc:picChg chg="del">
+          <ac:chgData name="Mohammed Fasha" userId="cc64f42d-a1a6-4f08-b97b-0c37f877119f" providerId="ADAL" clId="{0F6A92A6-FC46-466F-A1EC-286E38E3120A}" dt="2025-03-18T02:36:06.491" v="513" actId="21"/>
+          <ac:picMkLst>
+            <pc:docMk/>
+            <pc:sldMk cId="2842851281" sldId="486"/>
+            <ac:picMk id="8" creationId="{56EAB362-4498-3680-79F0-AF103DB7E266}"/>
+          </ac:picMkLst>
+        </pc:picChg>
       </pc:sldChg>
     </pc:docChg>
   </pc:docChgLst>
@@ -595,38 +866,6 @@
           <pc:docMk/>
           <pc:sldMk cId="1294835954" sldId="288"/>
         </pc:sldMkLst>
-        <pc:spChg chg="add mod ord">
-          <ac:chgData name="Mohammed Fasha" userId="S::mohammed.fasha@uop.edu.jo::cc64f42d-a1a6-4f08-b97b-0c37f877119f" providerId="AD" clId="Web-{5C86E801-D2EF-92BA-0550-CFAF0E1AFAFC}" dt="2025-03-15T08:04:38.360" v="44"/>
-          <ac:spMkLst>
-            <pc:docMk/>
-            <pc:sldMk cId="1294835954" sldId="288"/>
-            <ac:spMk id="2" creationId="{1C0BAC20-0B32-B24D-BB75-14C7E39C7B03}"/>
-          </ac:spMkLst>
-        </pc:spChg>
-        <pc:spChg chg="add mod ord">
-          <ac:chgData name="Mohammed Fasha" userId="S::mohammed.fasha@uop.edu.jo::cc64f42d-a1a6-4f08-b97b-0c37f877119f" providerId="AD" clId="Web-{5C86E801-D2EF-92BA-0550-CFAF0E1AFAFC}" dt="2025-03-15T08:05:47.252" v="62" actId="20577"/>
-          <ac:spMkLst>
-            <pc:docMk/>
-            <pc:sldMk cId="1294835954" sldId="288"/>
-            <ac:spMk id="3" creationId="{93D80A20-86B2-9CDB-4FC5-35E048AB60B7}"/>
-          </ac:spMkLst>
-        </pc:spChg>
-        <pc:spChg chg="mod">
-          <ac:chgData name="Mohammed Fasha" userId="S::mohammed.fasha@uop.edu.jo::cc64f42d-a1a6-4f08-b97b-0c37f877119f" providerId="AD" clId="Web-{5C86E801-D2EF-92BA-0550-CFAF0E1AFAFC}" dt="2025-03-15T08:04:50.907" v="46" actId="20577"/>
-          <ac:spMkLst>
-            <pc:docMk/>
-            <pc:sldMk cId="1294835954" sldId="288"/>
-            <ac:spMk id="26" creationId="{00000000-0000-0000-0000-000000000000}"/>
-          </ac:spMkLst>
-        </pc:spChg>
-        <pc:spChg chg="del">
-          <ac:chgData name="Mohammed Fasha" userId="S::mohammed.fasha@uop.edu.jo::cc64f42d-a1a6-4f08-b97b-0c37f877119f" providerId="AD" clId="Web-{5C86E801-D2EF-92BA-0550-CFAF0E1AFAFC}" dt="2025-03-15T08:04:58.142" v="50"/>
-          <ac:spMkLst>
-            <pc:docMk/>
-            <pc:sldMk cId="1294835954" sldId="288"/>
-            <ac:spMk id="28" creationId="{00000000-0000-0000-0000-000000000000}"/>
-          </ac:spMkLst>
-        </pc:spChg>
       </pc:sldChg>
       <pc:sldChg chg="add">
         <pc:chgData name="Mohammed Fasha" userId="S::mohammed.fasha@uop.edu.jo::cc64f42d-a1a6-4f08-b97b-0c37f877119f" providerId="AD" clId="Web-{5C86E801-D2EF-92BA-0550-CFAF0E1AFAFC}" dt="2025-03-15T08:04:09.547" v="20"/>
@@ -761,14 +1000,6 @@
             <ac:spMk id="8" creationId="{107CF054-390C-DCFC-C9A6-9E95C859A175}"/>
           </ac:spMkLst>
         </pc:spChg>
-        <pc:picChg chg="add del mod">
-          <ac:chgData name="Mohammed Fasha" userId="S::mohammed.fasha@uop.edu.jo::cc64f42d-a1a6-4f08-b97b-0c37f877119f" providerId="AD" clId="Web-{5C86E801-D2EF-92BA-0550-CFAF0E1AFAFC}" dt="2025-03-15T08:02:34.732" v="17"/>
-          <ac:picMkLst>
-            <pc:docMk/>
-            <pc:sldMk cId="1489447582" sldId="455"/>
-            <ac:picMk id="2" creationId="{9038431E-6940-6731-1AE4-6370343137A2}"/>
-          </ac:picMkLst>
-        </pc:picChg>
       </pc:sldChg>
       <pc:sldChg chg="del">
         <pc:chgData name="Mohammed Fasha" userId="S::mohammed.fasha@uop.edu.jo::cc64f42d-a1a6-4f08-b97b-0c37f877119f" providerId="AD" clId="Web-{5C86E801-D2EF-92BA-0550-CFAF0E1AFAFC}" dt="2025-03-15T08:02:15.216" v="15"/>
@@ -791,14 +1022,6 @@
             <ac:spMk id="2" creationId="{0D249FBB-3121-E31B-EA14-7A6C8004056E}"/>
           </ac:spMkLst>
         </pc:spChg>
-        <pc:spChg chg="del">
-          <ac:chgData name="Mohammed Fasha" userId="S::mohammed.fasha@uop.edu.jo::cc64f42d-a1a6-4f08-b97b-0c37f877119f" providerId="AD" clId="Web-{5C86E801-D2EF-92BA-0550-CFAF0E1AFAFC}" dt="2025-03-15T08:07:44.395" v="75"/>
-          <ac:spMkLst>
-            <pc:docMk/>
-            <pc:sldMk cId="3313801511" sldId="456"/>
-            <ac:spMk id="3" creationId="{A858C915-02B0-797B-4818-39DDCE655AE7}"/>
-          </ac:spMkLst>
-        </pc:spChg>
         <pc:spChg chg="add mod">
           <ac:chgData name="Mohammed Fasha" userId="S::mohammed.fasha@uop.edu.jo::cc64f42d-a1a6-4f08-b97b-0c37f877119f" providerId="AD" clId="Web-{5C86E801-D2EF-92BA-0550-CFAF0E1AFAFC}" dt="2025-03-15T08:07:49.192" v="76"/>
           <ac:spMkLst>
@@ -807,14 +1030,6 @@
             <ac:spMk id="6" creationId="{028F3588-3A35-59C9-046D-8544746B15CF}"/>
           </ac:spMkLst>
         </pc:spChg>
-        <pc:picChg chg="add del mod ord">
-          <ac:chgData name="Mohammed Fasha" userId="S::mohammed.fasha@uop.edu.jo::cc64f42d-a1a6-4f08-b97b-0c37f877119f" providerId="AD" clId="Web-{5C86E801-D2EF-92BA-0550-CFAF0E1AFAFC}" dt="2025-03-15T08:07:49.192" v="76"/>
-          <ac:picMkLst>
-            <pc:docMk/>
-            <pc:sldMk cId="3313801511" sldId="456"/>
-            <ac:picMk id="4" creationId="{AC22CF93-F4C6-1D84-9CE4-A8CABC7A0D33}"/>
-          </ac:picMkLst>
-        </pc:picChg>
       </pc:sldChg>
       <pc:sldChg chg="del">
         <pc:chgData name="Mohammed Fasha" userId="S::mohammed.fasha@uop.edu.jo::cc64f42d-a1a6-4f08-b97b-0c37f877119f" providerId="AD" clId="Web-{5C86E801-D2EF-92BA-0550-CFAF0E1AFAFC}" dt="2025-03-15T08:02:15.216" v="14"/>
@@ -959,6 +1174,282 @@
           </pc:sldLayoutMkLst>
         </pc:sldLayoutChg>
       </pc:sldMasterChg>
+    </pc:docChg>
+  </pc:docChgLst>
+  <pc:docChgLst>
+    <pc:chgData name="Mohammed Fasha" userId="cc64f42d-a1a6-4f08-b97b-0c37f877119f" providerId="ADAL" clId="{BAA24B5F-E316-4807-ADAF-14922A29E8E2}"/>
+    <pc:docChg chg="undo custSel addSld modSld sldOrd">
+      <pc:chgData name="Mohammed Fasha" userId="cc64f42d-a1a6-4f08-b97b-0c37f877119f" providerId="ADAL" clId="{BAA24B5F-E316-4807-ADAF-14922A29E8E2}" dt="2025-03-15T11:50:13.661" v="227" actId="12"/>
+      <pc:docMkLst>
+        <pc:docMk/>
+      </pc:docMkLst>
+      <pc:sldChg chg="addSp delSp modSp add mod chgLayout">
+        <pc:chgData name="Mohammed Fasha" userId="cc64f42d-a1a6-4f08-b97b-0c37f877119f" providerId="ADAL" clId="{BAA24B5F-E316-4807-ADAF-14922A29E8E2}" dt="2025-03-15T09:30:10.852" v="75" actId="20577"/>
+        <pc:sldMkLst>
+          <pc:docMk/>
+          <pc:sldMk cId="3259240421" sldId="458"/>
+        </pc:sldMkLst>
+        <pc:spChg chg="mod">
+          <ac:chgData name="Mohammed Fasha" userId="cc64f42d-a1a6-4f08-b97b-0c37f877119f" providerId="ADAL" clId="{BAA24B5F-E316-4807-ADAF-14922A29E8E2}" dt="2025-03-15T09:29:55.442" v="40" actId="1036"/>
+          <ac:spMkLst>
+            <pc:docMk/>
+            <pc:sldMk cId="3259240421" sldId="458"/>
+            <ac:spMk id="2" creationId="{00000000-0000-0000-0000-000000000000}"/>
+          </ac:spMkLst>
+        </pc:spChg>
+        <pc:spChg chg="mod">
+          <ac:chgData name="Mohammed Fasha" userId="cc64f42d-a1a6-4f08-b97b-0c37f877119f" providerId="ADAL" clId="{BAA24B5F-E316-4807-ADAF-14922A29E8E2}" dt="2025-03-15T09:29:55.442" v="40" actId="1036"/>
+          <ac:spMkLst>
+            <pc:docMk/>
+            <pc:sldMk cId="3259240421" sldId="458"/>
+            <ac:spMk id="3" creationId="{00000000-0000-0000-0000-000000000000}"/>
+          </ac:spMkLst>
+        </pc:spChg>
+        <pc:spChg chg="mod">
+          <ac:chgData name="Mohammed Fasha" userId="cc64f42d-a1a6-4f08-b97b-0c37f877119f" providerId="ADAL" clId="{BAA24B5F-E316-4807-ADAF-14922A29E8E2}" dt="2025-03-15T09:29:55.442" v="40" actId="1036"/>
+          <ac:spMkLst>
+            <pc:docMk/>
+            <pc:sldMk cId="3259240421" sldId="458"/>
+            <ac:spMk id="5" creationId="{00000000-0000-0000-0000-000000000000}"/>
+          </ac:spMkLst>
+        </pc:spChg>
+        <pc:spChg chg="mod">
+          <ac:chgData name="Mohammed Fasha" userId="cc64f42d-a1a6-4f08-b97b-0c37f877119f" providerId="ADAL" clId="{BAA24B5F-E316-4807-ADAF-14922A29E8E2}" dt="2025-03-15T09:29:55.442" v="40" actId="1036"/>
+          <ac:spMkLst>
+            <pc:docMk/>
+            <pc:sldMk cId="3259240421" sldId="458"/>
+            <ac:spMk id="7" creationId="{00000000-0000-0000-0000-000000000000}"/>
+          </ac:spMkLst>
+        </pc:spChg>
+        <pc:spChg chg="add mod ord">
+          <ac:chgData name="Mohammed Fasha" userId="cc64f42d-a1a6-4f08-b97b-0c37f877119f" providerId="ADAL" clId="{BAA24B5F-E316-4807-ADAF-14922A29E8E2}" dt="2025-03-15T09:30:10.852" v="75" actId="20577"/>
+          <ac:spMkLst>
+            <pc:docMk/>
+            <pc:sldMk cId="3259240421" sldId="458"/>
+            <ac:spMk id="8" creationId="{844C69F2-05F6-5350-5064-3146E8C405FE}"/>
+          </ac:spMkLst>
+        </pc:spChg>
+        <pc:spChg chg="add mod ord">
+          <ac:chgData name="Mohammed Fasha" userId="cc64f42d-a1a6-4f08-b97b-0c37f877119f" providerId="ADAL" clId="{BAA24B5F-E316-4807-ADAF-14922A29E8E2}" dt="2025-03-15T09:29:58.853" v="41" actId="700"/>
+          <ac:spMkLst>
+            <pc:docMk/>
+            <pc:sldMk cId="3259240421" sldId="458"/>
+            <ac:spMk id="9" creationId="{E77C13ED-BA33-EFC5-E059-C36C28A72D68}"/>
+          </ac:spMkLst>
+        </pc:spChg>
+        <pc:spChg chg="mod">
+          <ac:chgData name="Mohammed Fasha" userId="cc64f42d-a1a6-4f08-b97b-0c37f877119f" providerId="ADAL" clId="{BAA24B5F-E316-4807-ADAF-14922A29E8E2}" dt="2025-03-15T09:29:55.442" v="40" actId="1036"/>
+          <ac:spMkLst>
+            <pc:docMk/>
+            <pc:sldMk cId="3259240421" sldId="458"/>
+            <ac:spMk id="15" creationId="{00000000-0000-0000-0000-000000000000}"/>
+          </ac:spMkLst>
+        </pc:spChg>
+        <pc:spChg chg="mod">
+          <ac:chgData name="Mohammed Fasha" userId="cc64f42d-a1a6-4f08-b97b-0c37f877119f" providerId="ADAL" clId="{BAA24B5F-E316-4807-ADAF-14922A29E8E2}" dt="2025-03-15T09:29:55.442" v="40" actId="1036"/>
+          <ac:spMkLst>
+            <pc:docMk/>
+            <pc:sldMk cId="3259240421" sldId="458"/>
+            <ac:spMk id="16" creationId="{00000000-0000-0000-0000-000000000000}"/>
+          </ac:spMkLst>
+        </pc:spChg>
+        <pc:spChg chg="mod">
+          <ac:chgData name="Mohammed Fasha" userId="cc64f42d-a1a6-4f08-b97b-0c37f877119f" providerId="ADAL" clId="{BAA24B5F-E316-4807-ADAF-14922A29E8E2}" dt="2025-03-15T09:29:55.442" v="40" actId="1036"/>
+          <ac:spMkLst>
+            <pc:docMk/>
+            <pc:sldMk cId="3259240421" sldId="458"/>
+            <ac:spMk id="22" creationId="{00000000-0000-0000-0000-000000000000}"/>
+          </ac:spMkLst>
+        </pc:spChg>
+      </pc:sldChg>
+      <pc:sldChg chg="modSp new mod">
+        <pc:chgData name="Mohammed Fasha" userId="cc64f42d-a1a6-4f08-b97b-0c37f877119f" providerId="ADAL" clId="{BAA24B5F-E316-4807-ADAF-14922A29E8E2}" dt="2025-03-15T10:54:27.780" v="83" actId="113"/>
+        <pc:sldMkLst>
+          <pc:docMk/>
+          <pc:sldMk cId="48836864" sldId="459"/>
+        </pc:sldMkLst>
+        <pc:spChg chg="mod">
+          <ac:chgData name="Mohammed Fasha" userId="cc64f42d-a1a6-4f08-b97b-0c37f877119f" providerId="ADAL" clId="{BAA24B5F-E316-4807-ADAF-14922A29E8E2}" dt="2025-03-15T10:54:27.780" v="83" actId="113"/>
+          <ac:spMkLst>
+            <pc:docMk/>
+            <pc:sldMk cId="48836864" sldId="459"/>
+            <ac:spMk id="2" creationId="{155C2314-3CF3-F0A9-685A-3156E5CE2674}"/>
+          </ac:spMkLst>
+        </pc:spChg>
+        <pc:spChg chg="mod">
+          <ac:chgData name="Mohammed Fasha" userId="cc64f42d-a1a6-4f08-b97b-0c37f877119f" providerId="ADAL" clId="{BAA24B5F-E316-4807-ADAF-14922A29E8E2}" dt="2025-03-15T10:54:22.602" v="78" actId="21"/>
+          <ac:spMkLst>
+            <pc:docMk/>
+            <pc:sldMk cId="48836864" sldId="459"/>
+            <ac:spMk id="3" creationId="{B1CD1ADE-0294-A1FB-F5E9-1676C5183664}"/>
+          </ac:spMkLst>
+        </pc:spChg>
+      </pc:sldChg>
+      <pc:sldChg chg="addSp modSp new mod">
+        <pc:chgData name="Mohammed Fasha" userId="cc64f42d-a1a6-4f08-b97b-0c37f877119f" providerId="ADAL" clId="{BAA24B5F-E316-4807-ADAF-14922A29E8E2}" dt="2025-03-15T11:11:44.181" v="127" actId="12385"/>
+        <pc:sldMkLst>
+          <pc:docMk/>
+          <pc:sldMk cId="928322667" sldId="460"/>
+        </pc:sldMkLst>
+        <pc:spChg chg="mod">
+          <ac:chgData name="Mohammed Fasha" userId="cc64f42d-a1a6-4f08-b97b-0c37f877119f" providerId="ADAL" clId="{BAA24B5F-E316-4807-ADAF-14922A29E8E2}" dt="2025-03-15T10:54:55.846" v="95" actId="113"/>
+          <ac:spMkLst>
+            <pc:docMk/>
+            <pc:sldMk cId="928322667" sldId="460"/>
+            <ac:spMk id="2" creationId="{51BB7355-8D6D-8485-0894-0AB532961579}"/>
+          </ac:spMkLst>
+        </pc:spChg>
+        <pc:spChg chg="mod">
+          <ac:chgData name="Mohammed Fasha" userId="cc64f42d-a1a6-4f08-b97b-0c37f877119f" providerId="ADAL" clId="{BAA24B5F-E316-4807-ADAF-14922A29E8E2}" dt="2025-03-15T10:58:15.086" v="98" actId="21"/>
+          <ac:spMkLst>
+            <pc:docMk/>
+            <pc:sldMk cId="928322667" sldId="460"/>
+            <ac:spMk id="3" creationId="{978D9617-84BF-81D4-C219-85A58FE307F3}"/>
+          </ac:spMkLst>
+        </pc:spChg>
+        <pc:graphicFrameChg chg="add mod modGraphic">
+          <ac:chgData name="Mohammed Fasha" userId="cc64f42d-a1a6-4f08-b97b-0c37f877119f" providerId="ADAL" clId="{BAA24B5F-E316-4807-ADAF-14922A29E8E2}" dt="2025-03-15T11:11:44.181" v="127" actId="12385"/>
+          <ac:graphicFrameMkLst>
+            <pc:docMk/>
+            <pc:sldMk cId="928322667" sldId="460"/>
+            <ac:graphicFrameMk id="4" creationId="{E227B7C6-2CDC-88BB-C41D-BC7307D9374E}"/>
+          </ac:graphicFrameMkLst>
+        </pc:graphicFrameChg>
+      </pc:sldChg>
+      <pc:sldChg chg="addSp delSp modSp add mod">
+        <pc:chgData name="Mohammed Fasha" userId="cc64f42d-a1a6-4f08-b97b-0c37f877119f" providerId="ADAL" clId="{BAA24B5F-E316-4807-ADAF-14922A29E8E2}" dt="2025-03-15T11:17:03.543" v="216" actId="21"/>
+        <pc:sldMkLst>
+          <pc:docMk/>
+          <pc:sldMk cId="1395444050" sldId="461"/>
+        </pc:sldMkLst>
+        <pc:spChg chg="add mod">
+          <ac:chgData name="Mohammed Fasha" userId="cc64f42d-a1a6-4f08-b97b-0c37f877119f" providerId="ADAL" clId="{BAA24B5F-E316-4807-ADAF-14922A29E8E2}" dt="2025-03-15T11:17:03.543" v="216" actId="21"/>
+          <ac:spMkLst>
+            <pc:docMk/>
+            <pc:sldMk cId="1395444050" sldId="461"/>
+            <ac:spMk id="7" creationId="{CB06B31B-619A-A1D9-FE73-ACF05C08B9EA}"/>
+          </ac:spMkLst>
+        </pc:spChg>
+      </pc:sldChg>
+      <pc:sldChg chg="addSp modSp add mod ord">
+        <pc:chgData name="Mohammed Fasha" userId="cc64f42d-a1a6-4f08-b97b-0c37f877119f" providerId="ADAL" clId="{BAA24B5F-E316-4807-ADAF-14922A29E8E2}" dt="2025-03-15T11:17:15.321" v="223" actId="1076"/>
+        <pc:sldMkLst>
+          <pc:docMk/>
+          <pc:sldMk cId="2284286539" sldId="462"/>
+        </pc:sldMkLst>
+        <pc:spChg chg="mod">
+          <ac:chgData name="Mohammed Fasha" userId="cc64f42d-a1a6-4f08-b97b-0c37f877119f" providerId="ADAL" clId="{BAA24B5F-E316-4807-ADAF-14922A29E8E2}" dt="2025-03-15T11:16:57.225" v="211" actId="113"/>
+          <ac:spMkLst>
+            <pc:docMk/>
+            <pc:sldMk cId="2284286539" sldId="462"/>
+            <ac:spMk id="2" creationId="{C87CB883-DFFD-09F6-5356-084C060B0614}"/>
+          </ac:spMkLst>
+        </pc:spChg>
+        <pc:spChg chg="mod">
+          <ac:chgData name="Mohammed Fasha" userId="cc64f42d-a1a6-4f08-b97b-0c37f877119f" providerId="ADAL" clId="{BAA24B5F-E316-4807-ADAF-14922A29E8E2}" dt="2025-03-15T11:17:08.019" v="218" actId="27636"/>
+          <ac:spMkLst>
+            <pc:docMk/>
+            <pc:sldMk cId="2284286539" sldId="462"/>
+            <ac:spMk id="3" creationId="{36DAAF18-EF8F-EF3B-EC26-A6DD77CB63EC}"/>
+          </ac:spMkLst>
+        </pc:spChg>
+        <pc:picChg chg="add mod">
+          <ac:chgData name="Mohammed Fasha" userId="cc64f42d-a1a6-4f08-b97b-0c37f877119f" providerId="ADAL" clId="{BAA24B5F-E316-4807-ADAF-14922A29E8E2}" dt="2025-03-15T11:17:15.321" v="223" actId="1076"/>
+          <ac:picMkLst>
+            <pc:docMk/>
+            <pc:sldMk cId="2284286539" sldId="462"/>
+            <ac:picMk id="1026" creationId="{FF83FE64-97DB-E58E-0CC0-7EF8621200C9}"/>
+          </ac:picMkLst>
+        </pc:picChg>
+      </pc:sldChg>
+      <pc:sldChg chg="add">
+        <pc:chgData name="Mohammed Fasha" userId="cc64f42d-a1a6-4f08-b97b-0c37f877119f" providerId="ADAL" clId="{BAA24B5F-E316-4807-ADAF-14922A29E8E2}" dt="2025-03-15T10:54:33.100" v="87"/>
+        <pc:sldMkLst>
+          <pc:docMk/>
+          <pc:sldMk cId="3026790438" sldId="463"/>
+        </pc:sldMkLst>
+      </pc:sldChg>
+      <pc:sldChg chg="add">
+        <pc:chgData name="Mohammed Fasha" userId="cc64f42d-a1a6-4f08-b97b-0c37f877119f" providerId="ADAL" clId="{BAA24B5F-E316-4807-ADAF-14922A29E8E2}" dt="2025-03-15T10:54:33.205" v="88"/>
+        <pc:sldMkLst>
+          <pc:docMk/>
+          <pc:sldMk cId="559781770" sldId="464"/>
+        </pc:sldMkLst>
+      </pc:sldChg>
+      <pc:sldChg chg="add">
+        <pc:chgData name="Mohammed Fasha" userId="cc64f42d-a1a6-4f08-b97b-0c37f877119f" providerId="ADAL" clId="{BAA24B5F-E316-4807-ADAF-14922A29E8E2}" dt="2025-03-15T10:54:33.392" v="89"/>
+        <pc:sldMkLst>
+          <pc:docMk/>
+          <pc:sldMk cId="1438401834" sldId="465"/>
+        </pc:sldMkLst>
+      </pc:sldChg>
+      <pc:sldChg chg="addSp delSp modSp add mod">
+        <pc:chgData name="Mohammed Fasha" userId="cc64f42d-a1a6-4f08-b97b-0c37f877119f" providerId="ADAL" clId="{BAA24B5F-E316-4807-ADAF-14922A29E8E2}" dt="2025-03-15T11:15:39.043" v="200" actId="14100"/>
+        <pc:sldMkLst>
+          <pc:docMk/>
+          <pc:sldMk cId="446689935" sldId="466"/>
+        </pc:sldMkLst>
+        <pc:spChg chg="mod">
+          <ac:chgData name="Mohammed Fasha" userId="cc64f42d-a1a6-4f08-b97b-0c37f877119f" providerId="ADAL" clId="{BAA24B5F-E316-4807-ADAF-14922A29E8E2}" dt="2025-03-15T11:12:35.210" v="138" actId="27636"/>
+          <ac:spMkLst>
+            <pc:docMk/>
+            <pc:sldMk cId="446689935" sldId="466"/>
+            <ac:spMk id="3" creationId="{01739F70-6609-23E4-8242-5877432501A5}"/>
+          </ac:spMkLst>
+        </pc:spChg>
+        <pc:spChg chg="add mod">
+          <ac:chgData name="Mohammed Fasha" userId="cc64f42d-a1a6-4f08-b97b-0c37f877119f" providerId="ADAL" clId="{BAA24B5F-E316-4807-ADAF-14922A29E8E2}" dt="2025-03-15T11:15:39.043" v="200" actId="14100"/>
+          <ac:spMkLst>
+            <pc:docMk/>
+            <pc:sldMk cId="446689935" sldId="466"/>
+            <ac:spMk id="6" creationId="{92914B84-CEDA-F1F7-43A7-C8BAE37A70A8}"/>
+          </ac:spMkLst>
+        </pc:spChg>
+        <pc:graphicFrameChg chg="add mod modGraphic">
+          <ac:chgData name="Mohammed Fasha" userId="cc64f42d-a1a6-4f08-b97b-0c37f877119f" providerId="ADAL" clId="{BAA24B5F-E316-4807-ADAF-14922A29E8E2}" dt="2025-03-15T11:12:40.755" v="139" actId="1076"/>
+          <ac:graphicFrameMkLst>
+            <pc:docMk/>
+            <pc:sldMk cId="446689935" sldId="466"/>
+            <ac:graphicFrameMk id="4" creationId="{1E03E6E9-29DB-6231-D36D-166BD1A4B0BC}"/>
+          </ac:graphicFrameMkLst>
+        </pc:graphicFrameChg>
+        <pc:picChg chg="add mod">
+          <ac:chgData name="Mohammed Fasha" userId="cc64f42d-a1a6-4f08-b97b-0c37f877119f" providerId="ADAL" clId="{BAA24B5F-E316-4807-ADAF-14922A29E8E2}" dt="2025-03-15T11:12:44.215" v="140" actId="1076"/>
+          <ac:picMkLst>
+            <pc:docMk/>
+            <pc:sldMk cId="446689935" sldId="466"/>
+            <ac:picMk id="3074" creationId="{7838B5EC-812C-CDC8-5CFB-BD8E43326345}"/>
+          </ac:picMkLst>
+        </pc:picChg>
+      </pc:sldChg>
+      <pc:sldChg chg="modSp new mod">
+        <pc:chgData name="Mohammed Fasha" userId="cc64f42d-a1a6-4f08-b97b-0c37f877119f" providerId="ADAL" clId="{BAA24B5F-E316-4807-ADAF-14922A29E8E2}" dt="2025-03-15T11:50:13.661" v="227" actId="12"/>
+        <pc:sldMkLst>
+          <pc:docMk/>
+          <pc:sldMk cId="1353442942" sldId="467"/>
+        </pc:sldMkLst>
+      </pc:sldChg>
+      <pc:sldChg chg="add">
+        <pc:chgData name="Mohammed Fasha" userId="cc64f42d-a1a6-4f08-b97b-0c37f877119f" providerId="ADAL" clId="{BAA24B5F-E316-4807-ADAF-14922A29E8E2}" dt="2025-03-15T11:17:00.994" v="213"/>
+        <pc:sldMkLst>
+          <pc:docMk/>
+          <pc:sldMk cId="885699272" sldId="468"/>
+        </pc:sldMkLst>
+      </pc:sldChg>
+      <pc:sldChg chg="add">
+        <pc:chgData name="Mohammed Fasha" userId="cc64f42d-a1a6-4f08-b97b-0c37f877119f" providerId="ADAL" clId="{BAA24B5F-E316-4807-ADAF-14922A29E8E2}" dt="2025-03-15T11:17:01.159" v="214"/>
+        <pc:sldMkLst>
+          <pc:docMk/>
+          <pc:sldMk cId="2161886032" sldId="469"/>
+        </pc:sldMkLst>
+      </pc:sldChg>
+      <pc:sldChg chg="add">
+        <pc:chgData name="Mohammed Fasha" userId="cc64f42d-a1a6-4f08-b97b-0c37f877119f" providerId="ADAL" clId="{BAA24B5F-E316-4807-ADAF-14922A29E8E2}" dt="2025-03-15T11:17:01.295" v="215"/>
+        <pc:sldMkLst>
+          <pc:docMk/>
+          <pc:sldMk cId="228845551" sldId="470"/>
+        </pc:sldMkLst>
+      </pc:sldChg>
     </pc:docChg>
   </pc:docChgLst>
   <pc:docChgLst>
@@ -1230,120 +1721,19 @@
     </pc:docChg>
   </pc:docChgLst>
   <pc:docChgLst>
-    <pc:chgData name="Mohammed Fasha" userId="cc64f42d-a1a6-4f08-b97b-0c37f877119f" providerId="ADAL" clId="{2E5FBF59-3168-4932-9518-582502FE1AD5}"/>
-    <pc:docChg chg="undo custSel delSld modSld">
-      <pc:chgData name="Mohammed Fasha" userId="cc64f42d-a1a6-4f08-b97b-0c37f877119f" providerId="ADAL" clId="{2E5FBF59-3168-4932-9518-582502FE1AD5}" dt="2024-12-24T08:08:19.987" v="550" actId="20577"/>
+    <pc:chgData name="Mohammed Fasha" userId="cc64f42d-a1a6-4f08-b97b-0c37f877119f" providerId="ADAL" clId="{5980B3BB-4EB6-4E37-92BF-3A2A8F4B2C7A}"/>
+    <pc:docChg chg="custSel modSld">
+      <pc:chgData name="Mohammed Fasha" userId="cc64f42d-a1a6-4f08-b97b-0c37f877119f" providerId="ADAL" clId="{5980B3BB-4EB6-4E37-92BF-3A2A8F4B2C7A}" dt="2024-10-15T02:28:13.535" v="0" actId="478"/>
       <pc:docMkLst>
         <pc:docMk/>
       </pc:docMkLst>
-      <pc:sldChg chg="delSp">
-        <pc:chgData name="Mohammed Fasha" userId="cc64f42d-a1a6-4f08-b97b-0c37f877119f" providerId="ADAL" clId="{2E5FBF59-3168-4932-9518-582502FE1AD5}" dt="2024-11-19T07:40:47.121" v="208" actId="478"/>
-        <pc:sldMkLst>
-          <pc:docMk/>
-          <pc:sldMk cId="391491219" sldId="428"/>
-        </pc:sldMkLst>
-      </pc:sldChg>
-      <pc:sldChg chg="modSp">
-        <pc:chgData name="Mohammed Fasha" userId="cc64f42d-a1a6-4f08-b97b-0c37f877119f" providerId="ADAL" clId="{2E5FBF59-3168-4932-9518-582502FE1AD5}" dt="2024-12-03T07:43:58.007" v="456" actId="1076"/>
-        <pc:sldMkLst>
-          <pc:docMk/>
-          <pc:sldMk cId="3339445507" sldId="430"/>
-        </pc:sldMkLst>
-      </pc:sldChg>
-      <pc:sldChg chg="modSp">
-        <pc:chgData name="Mohammed Fasha" userId="cc64f42d-a1a6-4f08-b97b-0c37f877119f" providerId="ADAL" clId="{2E5FBF59-3168-4932-9518-582502FE1AD5}" dt="2024-12-03T07:45:08.136" v="474" actId="20577"/>
-        <pc:sldMkLst>
-          <pc:docMk/>
-          <pc:sldMk cId="3389046835" sldId="431"/>
-        </pc:sldMkLst>
-      </pc:sldChg>
-      <pc:sldChg chg="modSp">
-        <pc:chgData name="Mohammed Fasha" userId="cc64f42d-a1a6-4f08-b97b-0c37f877119f" providerId="ADAL" clId="{2E5FBF59-3168-4932-9518-582502FE1AD5}" dt="2024-11-10T06:33:09.727" v="37" actId="207"/>
-        <pc:sldMkLst>
-          <pc:docMk/>
-          <pc:sldMk cId="2726994946" sldId="479"/>
-        </pc:sldMkLst>
-      </pc:sldChg>
-      <pc:sldChg chg="modSp">
-        <pc:chgData name="Mohammed Fasha" userId="cc64f42d-a1a6-4f08-b97b-0c37f877119f" providerId="ADAL" clId="{2E5FBF59-3168-4932-9518-582502FE1AD5}" dt="2024-11-19T07:44:28.766" v="211" actId="20577"/>
+      <pc:sldChg chg="delSp mod">
+        <pc:chgData name="Mohammed Fasha" userId="cc64f42d-a1a6-4f08-b97b-0c37f877119f" providerId="ADAL" clId="{5980B3BB-4EB6-4E37-92BF-3A2A8F4B2C7A}" dt="2024-10-15T02:28:13.535" v="0" actId="478"/>
         <pc:sldMkLst>
           <pc:docMk/>
           <pc:sldMk cId="2297456757" sldId="483"/>
         </pc:sldMkLst>
       </pc:sldChg>
-      <pc:sldChg chg="modSp">
-        <pc:chgData name="Mohammed Fasha" userId="cc64f42d-a1a6-4f08-b97b-0c37f877119f" providerId="ADAL" clId="{2E5FBF59-3168-4932-9518-582502FE1AD5}" dt="2024-11-10T06:45:09.392" v="40" actId="20577"/>
-        <pc:sldMkLst>
-          <pc:docMk/>
-          <pc:sldMk cId="3474268344" sldId="596"/>
-        </pc:sldMkLst>
-      </pc:sldChg>
-      <pc:sldChg chg="modSp">
-        <pc:chgData name="Mohammed Fasha" userId="cc64f42d-a1a6-4f08-b97b-0c37f877119f" providerId="ADAL" clId="{2E5FBF59-3168-4932-9518-582502FE1AD5}" dt="2024-12-03T07:47:21.561" v="476" actId="6549"/>
-        <pc:sldMkLst>
-          <pc:docMk/>
-          <pc:sldMk cId="399592497" sldId="613"/>
-        </pc:sldMkLst>
-      </pc:sldChg>
-      <pc:sldChg chg="modSp">
-        <pc:chgData name="Mohammed Fasha" userId="cc64f42d-a1a6-4f08-b97b-0c37f877119f" providerId="ADAL" clId="{2E5FBF59-3168-4932-9518-582502FE1AD5}" dt="2024-12-03T07:49:02.980" v="478" actId="207"/>
-        <pc:sldMkLst>
-          <pc:docMk/>
-          <pc:sldMk cId="3329135496" sldId="617"/>
-        </pc:sldMkLst>
-      </pc:sldChg>
-      <pc:sldChg chg="modSp">
-        <pc:chgData name="Mohammed Fasha" userId="cc64f42d-a1a6-4f08-b97b-0c37f877119f" providerId="ADAL" clId="{2E5FBF59-3168-4932-9518-582502FE1AD5}" dt="2024-12-24T08:05:16.608" v="482" actId="403"/>
-        <pc:sldMkLst>
-          <pc:docMk/>
-          <pc:sldMk cId="2990045589" sldId="659"/>
-        </pc:sldMkLst>
-      </pc:sldChg>
-      <pc:sldChg chg="modSp">
-        <pc:chgData name="Mohammed Fasha" userId="cc64f42d-a1a6-4f08-b97b-0c37f877119f" providerId="ADAL" clId="{2E5FBF59-3168-4932-9518-582502FE1AD5}" dt="2024-12-24T08:08:19.987" v="550" actId="20577"/>
-        <pc:sldMkLst>
-          <pc:docMk/>
-          <pc:sldMk cId="2680231355" sldId="669"/>
-        </pc:sldMkLst>
-      </pc:sldChg>
-      <pc:sldChg chg="addSp modSp">
-        <pc:chgData name="Mohammed Fasha" userId="cc64f42d-a1a6-4f08-b97b-0c37f877119f" providerId="ADAL" clId="{2E5FBF59-3168-4932-9518-582502FE1AD5}" dt="2024-12-24T08:05:52.910" v="488" actId="1076"/>
-        <pc:sldMkLst>
-          <pc:docMk/>
-          <pc:sldMk cId="916102856" sldId="685"/>
-        </pc:sldMkLst>
-      </pc:sldChg>
-      <pc:sldChg chg="modSp">
-        <pc:chgData name="Mohammed Fasha" userId="cc64f42d-a1a6-4f08-b97b-0c37f877119f" providerId="ADAL" clId="{2E5FBF59-3168-4932-9518-582502FE1AD5}" dt="2024-11-19T07:03:29.557" v="206" actId="207"/>
-        <pc:sldMkLst>
-          <pc:docMk/>
-          <pc:sldMk cId="32004852" sldId="708"/>
-        </pc:sldMkLst>
-      </pc:sldChg>
-    </pc:docChg>
-  </pc:docChgLst>
-  <pc:docChgLst>
-    <pc:chgData name="Mohammed Fasha" userId="cc64f42d-a1a6-4f08-b97b-0c37f877119f" providerId="ADAL" clId="{6804A8E6-8D7F-46E3-B091-66A8F6B926BF}"/>
-    <pc:docChg chg="custSel modMainMaster">
-      <pc:chgData name="Mohammed Fasha" userId="cc64f42d-a1a6-4f08-b97b-0c37f877119f" providerId="ADAL" clId="{6804A8E6-8D7F-46E3-B091-66A8F6B926BF}" dt="2024-11-09T05:15:35.019" v="2" actId="1076"/>
-      <pc:docMkLst>
-        <pc:docMk/>
-      </pc:docMkLst>
-      <pc:sldMasterChg chg="delSp mod modSldLayout">
-        <pc:chgData name="Mohammed Fasha" userId="cc64f42d-a1a6-4f08-b97b-0c37f877119f" providerId="ADAL" clId="{6804A8E6-8D7F-46E3-B091-66A8F6B926BF}" dt="2024-11-09T05:15:35.019" v="2" actId="1076"/>
-        <pc:sldMasterMkLst>
-          <pc:docMk/>
-          <pc:sldMasterMk cId="742811419" sldId="2147483648"/>
-        </pc:sldMasterMkLst>
-        <pc:sldLayoutChg chg="addSp modSp mod">
-          <pc:chgData name="Mohammed Fasha" userId="cc64f42d-a1a6-4f08-b97b-0c37f877119f" providerId="ADAL" clId="{6804A8E6-8D7F-46E3-B091-66A8F6B926BF}" dt="2024-11-09T05:15:35.019" v="2" actId="1076"/>
-          <pc:sldLayoutMkLst>
-            <pc:docMk/>
-            <pc:sldMasterMk cId="742811419" sldId="2147483648"/>
-            <pc:sldLayoutMk cId="4063788262" sldId="2147483649"/>
-          </pc:sldLayoutMkLst>
-        </pc:sldLayoutChg>
-      </pc:sldMasterChg>
     </pc:docChg>
   </pc:docChgLst>
   <pc:docChgLst>
@@ -1724,22 +2114,6 @@
           <pc:docMk/>
           <pc:sldMk cId="2282942957" sldId="456"/>
         </pc:sldMkLst>
-        <pc:spChg chg="mod">
-          <ac:chgData name="Mohammed Fasha" userId="S::mohammed.fasha@uop.edu.jo::cc64f42d-a1a6-4f08-b97b-0c37f877119f" providerId="AD" clId="Web-{66E75AB1-FCE8-0FCD-8995-E220AF9681CC}" dt="2025-03-15T06:53:19.395" v="143" actId="20577"/>
-          <ac:spMkLst>
-            <pc:docMk/>
-            <pc:sldMk cId="2282942957" sldId="456"/>
-            <ac:spMk id="2" creationId="{B641E847-78EB-D12D-1289-076C03040899}"/>
-          </ac:spMkLst>
-        </pc:spChg>
-        <pc:spChg chg="mod">
-          <ac:chgData name="Mohammed Fasha" userId="S::mohammed.fasha@uop.edu.jo::cc64f42d-a1a6-4f08-b97b-0c37f877119f" providerId="AD" clId="Web-{66E75AB1-FCE8-0FCD-8995-E220AF9681CC}" dt="2025-03-15T07:01:33.222" v="193" actId="20577"/>
-          <ac:spMkLst>
-            <pc:docMk/>
-            <pc:sldMk cId="2282942957" sldId="456"/>
-            <ac:spMk id="3" creationId="{370CEA9E-7399-77E7-47C4-29CCAD688E3D}"/>
-          </ac:spMkLst>
-        </pc:spChg>
       </pc:sldChg>
       <pc:sldChg chg="addSp delSp modSp add replId addAnim">
         <pc:chgData name="Mohammed Fasha" userId="S::mohammed.fasha@uop.edu.jo::cc64f42d-a1a6-4f08-b97b-0c37f877119f" providerId="AD" clId="Web-{66E75AB1-FCE8-0FCD-8995-E220AF9681CC}" dt="2025-03-15T07:00:17.530" v="170" actId="20577"/>
@@ -1747,38 +2121,6 @@
           <pc:docMk/>
           <pc:sldMk cId="1674895679" sldId="457"/>
         </pc:sldMkLst>
-        <pc:spChg chg="mod">
-          <ac:chgData name="Mohammed Fasha" userId="S::mohammed.fasha@uop.edu.jo::cc64f42d-a1a6-4f08-b97b-0c37f877119f" providerId="AD" clId="Web-{66E75AB1-FCE8-0FCD-8995-E220AF9681CC}" dt="2025-03-15T07:00:17.530" v="170" actId="20577"/>
-          <ac:spMkLst>
-            <pc:docMk/>
-            <pc:sldMk cId="1674895679" sldId="457"/>
-            <ac:spMk id="2" creationId="{1C61FB57-5DED-E50C-1567-36D9B32EDBAC}"/>
-          </ac:spMkLst>
-        </pc:spChg>
-        <pc:spChg chg="mod">
-          <ac:chgData name="Mohammed Fasha" userId="S::mohammed.fasha@uop.edu.jo::cc64f42d-a1a6-4f08-b97b-0c37f877119f" providerId="AD" clId="Web-{66E75AB1-FCE8-0FCD-8995-E220AF9681CC}" dt="2025-03-15T06:57:21.722" v="150" actId="14100"/>
-          <ac:spMkLst>
-            <pc:docMk/>
-            <pc:sldMk cId="1674895679" sldId="457"/>
-            <ac:spMk id="3" creationId="{B7528FB2-87E2-1D21-8D90-2EFD9759E534}"/>
-          </ac:spMkLst>
-        </pc:spChg>
-        <pc:picChg chg="add del mod">
-          <ac:chgData name="Mohammed Fasha" userId="S::mohammed.fasha@uop.edu.jo::cc64f42d-a1a6-4f08-b97b-0c37f877119f" providerId="AD" clId="Web-{66E75AB1-FCE8-0FCD-8995-E220AF9681CC}" dt="2025-03-15T06:57:27.238" v="152"/>
-          <ac:picMkLst>
-            <pc:docMk/>
-            <pc:sldMk cId="1674895679" sldId="457"/>
-            <ac:picMk id="4" creationId="{A3858177-300E-7078-A3BC-8E4C7D8BA9AF}"/>
-          </ac:picMkLst>
-        </pc:picChg>
-        <pc:picChg chg="add mod">
-          <ac:chgData name="Mohammed Fasha" userId="S::mohammed.fasha@uop.edu.jo::cc64f42d-a1a6-4f08-b97b-0c37f877119f" providerId="AD" clId="Web-{66E75AB1-FCE8-0FCD-8995-E220AF9681CC}" dt="2025-03-15T06:57:53.787" v="154" actId="1076"/>
-          <ac:picMkLst>
-            <pc:docMk/>
-            <pc:sldMk cId="1674895679" sldId="457"/>
-            <ac:picMk id="5" creationId="{636FA7FB-3AE2-6015-EDCA-D3841BBEA00C}"/>
-          </ac:picMkLst>
-        </pc:picChg>
       </pc:sldChg>
       <pc:sldChg chg="del">
         <pc:chgData name="Mohammed Fasha" userId="S::mohammed.fasha@uop.edu.jo::cc64f42d-a1a6-4f08-b97b-0c37f877119f" providerId="AD" clId="Web-{66E75AB1-FCE8-0FCD-8995-E220AF9681CC}" dt="2025-03-15T06:52:43.236" v="105"/>
@@ -1800,30 +2142,6 @@
           <pc:docMk/>
           <pc:sldMk cId="3292514151" sldId="458"/>
         </pc:sldMkLst>
-        <pc:spChg chg="mod">
-          <ac:chgData name="Mohammed Fasha" userId="S::mohammed.fasha@uop.edu.jo::cc64f42d-a1a6-4f08-b97b-0c37f877119f" providerId="AD" clId="Web-{66E75AB1-FCE8-0FCD-8995-E220AF9681CC}" dt="2025-03-15T07:01:24.191" v="192" actId="20577"/>
-          <ac:spMkLst>
-            <pc:docMk/>
-            <pc:sldMk cId="3292514151" sldId="458"/>
-            <ac:spMk id="2" creationId="{45EB7BEC-4D69-812E-F89E-4ADE17CABFD3}"/>
-          </ac:spMkLst>
-        </pc:spChg>
-        <pc:spChg chg="mod">
-          <ac:chgData name="Mohammed Fasha" userId="S::mohammed.fasha@uop.edu.jo::cc64f42d-a1a6-4f08-b97b-0c37f877119f" providerId="AD" clId="Web-{66E75AB1-FCE8-0FCD-8995-E220AF9681CC}" dt="2025-03-15T07:00:23.906" v="173" actId="14100"/>
-          <ac:spMkLst>
-            <pc:docMk/>
-            <pc:sldMk cId="3292514151" sldId="458"/>
-            <ac:spMk id="3" creationId="{CC874DA9-7000-FA16-2C22-09366EA22F8E}"/>
-          </ac:spMkLst>
-        </pc:spChg>
-        <pc:picChg chg="add mod">
-          <ac:chgData name="Mohammed Fasha" userId="S::mohammed.fasha@uop.edu.jo::cc64f42d-a1a6-4f08-b97b-0c37f877119f" providerId="AD" clId="Web-{66E75AB1-FCE8-0FCD-8995-E220AF9681CC}" dt="2025-03-15T07:00:58.783" v="176" actId="1076"/>
-          <ac:picMkLst>
-            <pc:docMk/>
-            <pc:sldMk cId="3292514151" sldId="458"/>
-            <ac:picMk id="4" creationId="{04FEF93C-E659-4588-019E-11ECBC9C1E25}"/>
-          </ac:picMkLst>
-        </pc:picChg>
       </pc:sldChg>
       <pc:sldChg chg="del">
         <pc:chgData name="Mohammed Fasha" userId="S::mohammed.fasha@uop.edu.jo::cc64f42d-a1a6-4f08-b97b-0c37f877119f" providerId="AD" clId="Web-{66E75AB1-FCE8-0FCD-8995-E220AF9681CC}" dt="2025-03-15T06:52:43.236" v="100"/>
@@ -1838,30 +2156,6 @@
           <pc:docMk/>
           <pc:sldMk cId="3675936543" sldId="459"/>
         </pc:sldMkLst>
-        <pc:spChg chg="mod">
-          <ac:chgData name="Mohammed Fasha" userId="S::mohammed.fasha@uop.edu.jo::cc64f42d-a1a6-4f08-b97b-0c37f877119f" providerId="AD" clId="Web-{66E75AB1-FCE8-0FCD-8995-E220AF9681CC}" dt="2025-03-15T07:02:09.037" v="208" actId="20577"/>
-          <ac:spMkLst>
-            <pc:docMk/>
-            <pc:sldMk cId="3675936543" sldId="459"/>
-            <ac:spMk id="2" creationId="{0B3ACAF2-DAEF-7BBA-0F42-12648ABEC081}"/>
-          </ac:spMkLst>
-        </pc:spChg>
-        <pc:spChg chg="mod">
-          <ac:chgData name="Mohammed Fasha" userId="S::mohammed.fasha@uop.edu.jo::cc64f42d-a1a6-4f08-b97b-0c37f877119f" providerId="AD" clId="Web-{66E75AB1-FCE8-0FCD-8995-E220AF9681CC}" dt="2025-03-15T07:02:04.334" v="196" actId="20577"/>
-          <ac:spMkLst>
-            <pc:docMk/>
-            <pc:sldMk cId="3675936543" sldId="459"/>
-            <ac:spMk id="3" creationId="{6F97936B-8C4D-ED10-13ED-8EE0239951F5}"/>
-          </ac:spMkLst>
-        </pc:spChg>
-        <pc:picChg chg="add mod">
-          <ac:chgData name="Mohammed Fasha" userId="S::mohammed.fasha@uop.edu.jo::cc64f42d-a1a6-4f08-b97b-0c37f877119f" providerId="AD" clId="Web-{66E75AB1-FCE8-0FCD-8995-E220AF9681CC}" dt="2025-03-15T07:02:26.163" v="210" actId="1076"/>
-          <ac:picMkLst>
-            <pc:docMk/>
-            <pc:sldMk cId="3675936543" sldId="459"/>
-            <ac:picMk id="4" creationId="{AB9BA58E-1DF8-D2A6-CB44-1B983B8A677E}"/>
-          </ac:picMkLst>
-        </pc:picChg>
       </pc:sldChg>
       <pc:sldChg chg="addSp modSp new ord addAnim">
         <pc:chgData name="Mohammed Fasha" userId="S::mohammed.fasha@uop.edu.jo::cc64f42d-a1a6-4f08-b97b-0c37f877119f" providerId="AD" clId="Web-{66E75AB1-FCE8-0FCD-8995-E220AF9681CC}" dt="2025-03-15T07:04:19.795" v="257"/>
@@ -1869,22 +2163,6 @@
           <pc:docMk/>
           <pc:sldMk cId="819366188" sldId="460"/>
         </pc:sldMkLst>
-        <pc:spChg chg="mod">
-          <ac:chgData name="Mohammed Fasha" userId="S::mohammed.fasha@uop.edu.jo::cc64f42d-a1a6-4f08-b97b-0c37f877119f" providerId="AD" clId="Web-{66E75AB1-FCE8-0FCD-8995-E220AF9681CC}" dt="2025-03-15T07:03:56.887" v="253" actId="14100"/>
-          <ac:spMkLst>
-            <pc:docMk/>
-            <pc:sldMk cId="819366188" sldId="460"/>
-            <ac:spMk id="3" creationId="{0F1F1C94-3747-2B3B-C88F-DC7404B91F95}"/>
-          </ac:spMkLst>
-        </pc:spChg>
-        <pc:picChg chg="add mod">
-          <ac:chgData name="Mohammed Fasha" userId="S::mohammed.fasha@uop.edu.jo::cc64f42d-a1a6-4f08-b97b-0c37f877119f" providerId="AD" clId="Web-{66E75AB1-FCE8-0FCD-8995-E220AF9681CC}" dt="2025-03-15T07:04:09.544" v="255" actId="1076"/>
-          <ac:picMkLst>
-            <pc:docMk/>
-            <pc:sldMk cId="819366188" sldId="460"/>
-            <ac:picMk id="4" creationId="{14D54A45-6B20-6430-76F9-AD84FDC40094}"/>
-          </ac:picMkLst>
-        </pc:picChg>
       </pc:sldChg>
       <pc:sldChg chg="del">
         <pc:chgData name="Mohammed Fasha" userId="S::mohammed.fasha@uop.edu.jo::cc64f42d-a1a6-4f08-b97b-0c37f877119f" providerId="AD" clId="Web-{66E75AB1-FCE8-0FCD-8995-E220AF9681CC}" dt="2025-03-15T06:52:43.236" v="99"/>
@@ -1899,22 +2177,6 @@
           <pc:docMk/>
           <pc:sldMk cId="247418909" sldId="461"/>
         </pc:sldMkLst>
-        <pc:spChg chg="mod">
-          <ac:chgData name="Mohammed Fasha" userId="S::mohammed.fasha@uop.edu.jo::cc64f42d-a1a6-4f08-b97b-0c37f877119f" providerId="AD" clId="Web-{66E75AB1-FCE8-0FCD-8995-E220AF9681CC}" dt="2025-03-15T07:04:35.749" v="263" actId="20577"/>
-          <ac:spMkLst>
-            <pc:docMk/>
-            <pc:sldMk cId="247418909" sldId="461"/>
-            <ac:spMk id="2" creationId="{4D21DB0D-2E23-686F-FCBA-3B3B56206A91}"/>
-          </ac:spMkLst>
-        </pc:spChg>
-        <pc:spChg chg="mod">
-          <ac:chgData name="Mohammed Fasha" userId="S::mohammed.fasha@uop.edu.jo::cc64f42d-a1a6-4f08-b97b-0c37f877119f" providerId="AD" clId="Web-{66E75AB1-FCE8-0FCD-8995-E220AF9681CC}" dt="2025-03-15T07:04:38.046" v="266" actId="20577"/>
-          <ac:spMkLst>
-            <pc:docMk/>
-            <pc:sldMk cId="247418909" sldId="461"/>
-            <ac:spMk id="3" creationId="{7183F8A0-72C4-77C2-DF53-34D853F65091}"/>
-          </ac:spMkLst>
-        </pc:spChg>
       </pc:sldChg>
       <pc:sldChg chg="addSp delSp modSp new">
         <pc:chgData name="Mohammed Fasha" userId="S::mohammed.fasha@uop.edu.jo::cc64f42d-a1a6-4f08-b97b-0c37f877119f" providerId="AD" clId="Web-{66E75AB1-FCE8-0FCD-8995-E220AF9681CC}" dt="2025-03-15T07:09:35.299" v="331" actId="1076"/>
@@ -1922,54 +2184,6 @@
           <pc:docMk/>
           <pc:sldMk cId="1157240725" sldId="462"/>
         </pc:sldMkLst>
-        <pc:spChg chg="mod">
-          <ac:chgData name="Mohammed Fasha" userId="S::mohammed.fasha@uop.edu.jo::cc64f42d-a1a6-4f08-b97b-0c37f877119f" providerId="AD" clId="Web-{66E75AB1-FCE8-0FCD-8995-E220AF9681CC}" dt="2025-03-15T07:07:27.072" v="311" actId="20577"/>
-          <ac:spMkLst>
-            <pc:docMk/>
-            <pc:sldMk cId="1157240725" sldId="462"/>
-            <ac:spMk id="2" creationId="{FD8ACEC8-0F55-9759-D03C-14EC0DAB9405}"/>
-          </ac:spMkLst>
-        </pc:spChg>
-        <pc:spChg chg="mod">
-          <ac:chgData name="Mohammed Fasha" userId="S::mohammed.fasha@uop.edu.jo::cc64f42d-a1a6-4f08-b97b-0c37f877119f" providerId="AD" clId="Web-{66E75AB1-FCE8-0FCD-8995-E220AF9681CC}" dt="2025-03-15T07:05:19.564" v="279" actId="14100"/>
-          <ac:spMkLst>
-            <pc:docMk/>
-            <pc:sldMk cId="1157240725" sldId="462"/>
-            <ac:spMk id="3" creationId="{2EC12319-03FE-522D-1B17-28A18671AD74}"/>
-          </ac:spMkLst>
-        </pc:spChg>
-        <pc:spChg chg="add mod">
-          <ac:chgData name="Mohammed Fasha" userId="S::mohammed.fasha@uop.edu.jo::cc64f42d-a1a6-4f08-b97b-0c37f877119f" providerId="AD" clId="Web-{66E75AB1-FCE8-0FCD-8995-E220AF9681CC}" dt="2025-03-15T07:09:29.814" v="329" actId="1076"/>
-          <ac:spMkLst>
-            <pc:docMk/>
-            <pc:sldMk cId="1157240725" sldId="462"/>
-            <ac:spMk id="6" creationId="{419C88E5-311B-7C37-EF21-759240673147}"/>
-          </ac:spMkLst>
-        </pc:spChg>
-        <pc:spChg chg="add mod">
-          <ac:chgData name="Mohammed Fasha" userId="S::mohammed.fasha@uop.edu.jo::cc64f42d-a1a6-4f08-b97b-0c37f877119f" providerId="AD" clId="Web-{66E75AB1-FCE8-0FCD-8995-E220AF9681CC}" dt="2025-03-15T07:09:27.157" v="328" actId="1076"/>
-          <ac:spMkLst>
-            <pc:docMk/>
-            <pc:sldMk cId="1157240725" sldId="462"/>
-            <ac:spMk id="7" creationId="{35A5277C-1397-7A8F-6AC4-A6499E15E61D}"/>
-          </ac:spMkLst>
-        </pc:spChg>
-        <pc:picChg chg="add del mod">
-          <ac:chgData name="Mohammed Fasha" userId="S::mohammed.fasha@uop.edu.jo::cc64f42d-a1a6-4f08-b97b-0c37f877119f" providerId="AD" clId="Web-{66E75AB1-FCE8-0FCD-8995-E220AF9681CC}" dt="2025-03-15T07:05:59.457" v="282"/>
-          <ac:picMkLst>
-            <pc:docMk/>
-            <pc:sldMk cId="1157240725" sldId="462"/>
-            <ac:picMk id="4" creationId="{51D19A64-1161-EC4F-4689-31E54D8932DA}"/>
-          </ac:picMkLst>
-        </pc:picChg>
-        <pc:picChg chg="add mod">
-          <ac:chgData name="Mohammed Fasha" userId="S::mohammed.fasha@uop.edu.jo::cc64f42d-a1a6-4f08-b97b-0c37f877119f" providerId="AD" clId="Web-{66E75AB1-FCE8-0FCD-8995-E220AF9681CC}" dt="2025-03-15T07:09:35.299" v="331" actId="1076"/>
-          <ac:picMkLst>
-            <pc:docMk/>
-            <pc:sldMk cId="1157240725" sldId="462"/>
-            <ac:picMk id="5" creationId="{B9235460-1193-17E8-C395-E3B702DEAFC0}"/>
-          </ac:picMkLst>
-        </pc:picChg>
       </pc:sldChg>
       <pc:sldChg chg="addSp modSp add replId">
         <pc:chgData name="Mohammed Fasha" userId="S::mohammed.fasha@uop.edu.jo::cc64f42d-a1a6-4f08-b97b-0c37f877119f" providerId="AD" clId="Web-{66E75AB1-FCE8-0FCD-8995-E220AF9681CC}" dt="2025-03-15T07:27:28.077" v="349" actId="1076"/>
@@ -1977,30 +2191,6 @@
           <pc:docMk/>
           <pc:sldMk cId="2617340595" sldId="463"/>
         </pc:sldMkLst>
-        <pc:spChg chg="mod">
-          <ac:chgData name="Mohammed Fasha" userId="S::mohammed.fasha@uop.edu.jo::cc64f42d-a1a6-4f08-b97b-0c37f877119f" providerId="AD" clId="Web-{66E75AB1-FCE8-0FCD-8995-E220AF9681CC}" dt="2025-03-15T07:27:24.436" v="348" actId="20577"/>
-          <ac:spMkLst>
-            <pc:docMk/>
-            <pc:sldMk cId="2617340595" sldId="463"/>
-            <ac:spMk id="3" creationId="{891DCAA0-5A3F-EEBE-021E-8D9D6B92B64A}"/>
-          </ac:spMkLst>
-        </pc:spChg>
-        <pc:spChg chg="add mod">
-          <ac:chgData name="Mohammed Fasha" userId="S::mohammed.fasha@uop.edu.jo::cc64f42d-a1a6-4f08-b97b-0c37f877119f" providerId="AD" clId="Web-{66E75AB1-FCE8-0FCD-8995-E220AF9681CC}" dt="2025-03-15T07:27:10.514" v="346" actId="1076"/>
-          <ac:spMkLst>
-            <pc:docMk/>
-            <pc:sldMk cId="2617340595" sldId="463"/>
-            <ac:spMk id="5" creationId="{0EE62ADA-E312-FE03-63AA-32558CEA7F2B}"/>
-          </ac:spMkLst>
-        </pc:spChg>
-        <pc:picChg chg="add mod">
-          <ac:chgData name="Mohammed Fasha" userId="S::mohammed.fasha@uop.edu.jo::cc64f42d-a1a6-4f08-b97b-0c37f877119f" providerId="AD" clId="Web-{66E75AB1-FCE8-0FCD-8995-E220AF9681CC}" dt="2025-03-15T07:27:28.077" v="349" actId="1076"/>
-          <ac:picMkLst>
-            <pc:docMk/>
-            <pc:sldMk cId="2617340595" sldId="463"/>
-            <ac:picMk id="4" creationId="{76C95208-81C7-5CF3-E454-2C18A3F25FC0}"/>
-          </ac:picMkLst>
-        </pc:picChg>
       </pc:sldChg>
       <pc:sldChg chg="del">
         <pc:chgData name="Mohammed Fasha" userId="S::mohammed.fasha@uop.edu.jo::cc64f42d-a1a6-4f08-b97b-0c37f877119f" providerId="AD" clId="Web-{66E75AB1-FCE8-0FCD-8995-E220AF9681CC}" dt="2025-03-15T06:52:43.236" v="102"/>
@@ -2228,6 +2418,201 @@
       </pc:sldChg>
     </pc:docChg>
   </pc:docChgLst>
+  <pc:docChgLst>
+    <pc:chgData name="Mohammed Fasha" userId="cc64f42d-a1a6-4f08-b97b-0c37f877119f" providerId="ADAL" clId="{4C71ED24-115E-432D-933D-C801DA3E52F1}"/>
+    <pc:docChg chg="delSld">
+      <pc:chgData name="Mohammed Fasha" userId="cc64f42d-a1a6-4f08-b97b-0c37f877119f" providerId="ADAL" clId="{4C71ED24-115E-432D-933D-C801DA3E52F1}" dt="2024-12-29T03:12:49.974" v="2" actId="47"/>
+      <pc:docMkLst>
+        <pc:docMk/>
+      </pc:docMkLst>
+      <pc:sldChg chg="del">
+        <pc:chgData name="Mohammed Fasha" userId="cc64f42d-a1a6-4f08-b97b-0c37f877119f" providerId="ADAL" clId="{4C71ED24-115E-432D-933D-C801DA3E52F1}" dt="2024-12-29T03:12:48.360" v="0" actId="47"/>
+        <pc:sldMkLst>
+          <pc:docMk/>
+          <pc:sldMk cId="2341000601" sldId="701"/>
+        </pc:sldMkLst>
+      </pc:sldChg>
+      <pc:sldChg chg="del">
+        <pc:chgData name="Mohammed Fasha" userId="cc64f42d-a1a6-4f08-b97b-0c37f877119f" providerId="ADAL" clId="{4C71ED24-115E-432D-933D-C801DA3E52F1}" dt="2024-12-29T03:12:49.133" v="1" actId="47"/>
+        <pc:sldMkLst>
+          <pc:docMk/>
+          <pc:sldMk cId="3519698944" sldId="702"/>
+        </pc:sldMkLst>
+      </pc:sldChg>
+      <pc:sldChg chg="del">
+        <pc:chgData name="Mohammed Fasha" userId="cc64f42d-a1a6-4f08-b97b-0c37f877119f" providerId="ADAL" clId="{4C71ED24-115E-432D-933D-C801DA3E52F1}" dt="2024-12-29T03:12:49.974" v="2" actId="47"/>
+        <pc:sldMkLst>
+          <pc:docMk/>
+          <pc:sldMk cId="3934257344" sldId="703"/>
+        </pc:sldMkLst>
+      </pc:sldChg>
+    </pc:docChg>
+  </pc:docChgLst>
+  <pc:docChgLst>
+    <pc:chgData name="Mohammed Fasha" userId="cc64f42d-a1a6-4f08-b97b-0c37f877119f" providerId="ADAL" clId="{6804A8E6-8D7F-46E3-B091-66A8F6B926BF}"/>
+    <pc:docChg chg="custSel modMainMaster">
+      <pc:chgData name="Mohammed Fasha" userId="cc64f42d-a1a6-4f08-b97b-0c37f877119f" providerId="ADAL" clId="{6804A8E6-8D7F-46E3-B091-66A8F6B926BF}" dt="2024-11-09T05:15:35.019" v="2" actId="1076"/>
+      <pc:docMkLst>
+        <pc:docMk/>
+      </pc:docMkLst>
+      <pc:sldMasterChg chg="delSp mod modSldLayout">
+        <pc:chgData name="Mohammed Fasha" userId="cc64f42d-a1a6-4f08-b97b-0c37f877119f" providerId="ADAL" clId="{6804A8E6-8D7F-46E3-B091-66A8F6B926BF}" dt="2024-11-09T05:15:35.019" v="2" actId="1076"/>
+        <pc:sldMasterMkLst>
+          <pc:docMk/>
+          <pc:sldMasterMk cId="742811419" sldId="2147483648"/>
+        </pc:sldMasterMkLst>
+        <pc:sldLayoutChg chg="addSp modSp mod">
+          <pc:chgData name="Mohammed Fasha" userId="cc64f42d-a1a6-4f08-b97b-0c37f877119f" providerId="ADAL" clId="{6804A8E6-8D7F-46E3-B091-66A8F6B926BF}" dt="2024-11-09T05:15:35.019" v="2" actId="1076"/>
+          <pc:sldLayoutMkLst>
+            <pc:docMk/>
+            <pc:sldMasterMk cId="742811419" sldId="2147483648"/>
+            <pc:sldLayoutMk cId="4063788262" sldId="2147483649"/>
+          </pc:sldLayoutMkLst>
+        </pc:sldLayoutChg>
+      </pc:sldMasterChg>
+    </pc:docChg>
+  </pc:docChgLst>
+  <pc:docChgLst>
+    <pc:chgData name="Mohammed Fasha" userId="cc64f42d-a1a6-4f08-b97b-0c37f877119f" providerId="ADAL" clId="{2E5FBF59-3168-4932-9518-582502FE1AD5}"/>
+    <pc:docChg chg="undo custSel delSld modSld">
+      <pc:chgData name="Mohammed Fasha" userId="cc64f42d-a1a6-4f08-b97b-0c37f877119f" providerId="ADAL" clId="{2E5FBF59-3168-4932-9518-582502FE1AD5}" dt="2024-12-24T08:08:19.987" v="550" actId="20577"/>
+      <pc:docMkLst>
+        <pc:docMk/>
+      </pc:docMkLst>
+      <pc:sldChg chg="delSp">
+        <pc:chgData name="Mohammed Fasha" userId="cc64f42d-a1a6-4f08-b97b-0c37f877119f" providerId="ADAL" clId="{2E5FBF59-3168-4932-9518-582502FE1AD5}" dt="2024-11-19T07:40:47.121" v="208" actId="478"/>
+        <pc:sldMkLst>
+          <pc:docMk/>
+          <pc:sldMk cId="391491219" sldId="428"/>
+        </pc:sldMkLst>
+      </pc:sldChg>
+      <pc:sldChg chg="modSp">
+        <pc:chgData name="Mohammed Fasha" userId="cc64f42d-a1a6-4f08-b97b-0c37f877119f" providerId="ADAL" clId="{2E5FBF59-3168-4932-9518-582502FE1AD5}" dt="2024-12-03T07:43:58.007" v="456" actId="1076"/>
+        <pc:sldMkLst>
+          <pc:docMk/>
+          <pc:sldMk cId="3339445507" sldId="430"/>
+        </pc:sldMkLst>
+      </pc:sldChg>
+      <pc:sldChg chg="modSp">
+        <pc:chgData name="Mohammed Fasha" userId="cc64f42d-a1a6-4f08-b97b-0c37f877119f" providerId="ADAL" clId="{2E5FBF59-3168-4932-9518-582502FE1AD5}" dt="2024-12-03T07:45:08.136" v="474" actId="20577"/>
+        <pc:sldMkLst>
+          <pc:docMk/>
+          <pc:sldMk cId="3389046835" sldId="431"/>
+        </pc:sldMkLst>
+      </pc:sldChg>
+      <pc:sldChg chg="modSp">
+        <pc:chgData name="Mohammed Fasha" userId="cc64f42d-a1a6-4f08-b97b-0c37f877119f" providerId="ADAL" clId="{2E5FBF59-3168-4932-9518-582502FE1AD5}" dt="2024-11-10T06:33:09.727" v="37" actId="207"/>
+        <pc:sldMkLst>
+          <pc:docMk/>
+          <pc:sldMk cId="2726994946" sldId="479"/>
+        </pc:sldMkLst>
+      </pc:sldChg>
+      <pc:sldChg chg="modSp">
+        <pc:chgData name="Mohammed Fasha" userId="cc64f42d-a1a6-4f08-b97b-0c37f877119f" providerId="ADAL" clId="{2E5FBF59-3168-4932-9518-582502FE1AD5}" dt="2024-11-19T07:44:28.766" v="211" actId="20577"/>
+        <pc:sldMkLst>
+          <pc:docMk/>
+          <pc:sldMk cId="2297456757" sldId="483"/>
+        </pc:sldMkLst>
+      </pc:sldChg>
+      <pc:sldChg chg="modSp">
+        <pc:chgData name="Mohammed Fasha" userId="cc64f42d-a1a6-4f08-b97b-0c37f877119f" providerId="ADAL" clId="{2E5FBF59-3168-4932-9518-582502FE1AD5}" dt="2024-11-10T06:45:09.392" v="40" actId="20577"/>
+        <pc:sldMkLst>
+          <pc:docMk/>
+          <pc:sldMk cId="3474268344" sldId="596"/>
+        </pc:sldMkLst>
+      </pc:sldChg>
+      <pc:sldChg chg="modSp">
+        <pc:chgData name="Mohammed Fasha" userId="cc64f42d-a1a6-4f08-b97b-0c37f877119f" providerId="ADAL" clId="{2E5FBF59-3168-4932-9518-582502FE1AD5}" dt="2024-12-03T07:47:21.561" v="476" actId="6549"/>
+        <pc:sldMkLst>
+          <pc:docMk/>
+          <pc:sldMk cId="399592497" sldId="613"/>
+        </pc:sldMkLst>
+      </pc:sldChg>
+      <pc:sldChg chg="modSp">
+        <pc:chgData name="Mohammed Fasha" userId="cc64f42d-a1a6-4f08-b97b-0c37f877119f" providerId="ADAL" clId="{2E5FBF59-3168-4932-9518-582502FE1AD5}" dt="2024-12-03T07:49:02.980" v="478" actId="207"/>
+        <pc:sldMkLst>
+          <pc:docMk/>
+          <pc:sldMk cId="3329135496" sldId="617"/>
+        </pc:sldMkLst>
+      </pc:sldChg>
+      <pc:sldChg chg="modSp">
+        <pc:chgData name="Mohammed Fasha" userId="cc64f42d-a1a6-4f08-b97b-0c37f877119f" providerId="ADAL" clId="{2E5FBF59-3168-4932-9518-582502FE1AD5}" dt="2024-12-24T08:05:16.608" v="482" actId="403"/>
+        <pc:sldMkLst>
+          <pc:docMk/>
+          <pc:sldMk cId="2990045589" sldId="659"/>
+        </pc:sldMkLst>
+      </pc:sldChg>
+      <pc:sldChg chg="modSp">
+        <pc:chgData name="Mohammed Fasha" userId="cc64f42d-a1a6-4f08-b97b-0c37f877119f" providerId="ADAL" clId="{2E5FBF59-3168-4932-9518-582502FE1AD5}" dt="2024-12-24T08:08:19.987" v="550" actId="20577"/>
+        <pc:sldMkLst>
+          <pc:docMk/>
+          <pc:sldMk cId="2680231355" sldId="669"/>
+        </pc:sldMkLst>
+      </pc:sldChg>
+      <pc:sldChg chg="addSp modSp">
+        <pc:chgData name="Mohammed Fasha" userId="cc64f42d-a1a6-4f08-b97b-0c37f877119f" providerId="ADAL" clId="{2E5FBF59-3168-4932-9518-582502FE1AD5}" dt="2024-12-24T08:05:52.910" v="488" actId="1076"/>
+        <pc:sldMkLst>
+          <pc:docMk/>
+          <pc:sldMk cId="916102856" sldId="685"/>
+        </pc:sldMkLst>
+      </pc:sldChg>
+      <pc:sldChg chg="modSp">
+        <pc:chgData name="Mohammed Fasha" userId="cc64f42d-a1a6-4f08-b97b-0c37f877119f" providerId="ADAL" clId="{2E5FBF59-3168-4932-9518-582502FE1AD5}" dt="2024-11-19T07:03:29.557" v="206" actId="207"/>
+        <pc:sldMkLst>
+          <pc:docMk/>
+          <pc:sldMk cId="32004852" sldId="708"/>
+        </pc:sldMkLst>
+      </pc:sldChg>
+    </pc:docChg>
+  </pc:docChgLst>
+  <pc:docChgLst>
+    <pc:chgData name="Mohammed Fasha" userId="S::mohammed.fasha@uop.edu.jo::cc64f42d-a1a6-4f08-b97b-0c37f877119f" providerId="AD" clId="Web-{62069D60-D12A-7A57-A3B1-F34941615567}"/>
+    <pc:docChg chg="modSld">
+      <pc:chgData name="Mohammed Fasha" userId="S::mohammed.fasha@uop.edu.jo::cc64f42d-a1a6-4f08-b97b-0c37f877119f" providerId="AD" clId="Web-{62069D60-D12A-7A57-A3B1-F34941615567}" dt="2025-03-17T14:17:40.226" v="99" actId="20577"/>
+      <pc:docMkLst>
+        <pc:docMk/>
+      </pc:docMkLst>
+      <pc:sldChg chg="addSp delSp modSp">
+        <pc:chgData name="Mohammed Fasha" userId="S::mohammed.fasha@uop.edu.jo::cc64f42d-a1a6-4f08-b97b-0c37f877119f" providerId="AD" clId="Web-{62069D60-D12A-7A57-A3B1-F34941615567}" dt="2025-03-17T14:17:40.226" v="99" actId="20577"/>
+        <pc:sldMkLst>
+          <pc:docMk/>
+          <pc:sldMk cId="885699272" sldId="468"/>
+        </pc:sldMkLst>
+        <pc:spChg chg="mod">
+          <ac:chgData name="Mohammed Fasha" userId="S::mohammed.fasha@uop.edu.jo::cc64f42d-a1a6-4f08-b97b-0c37f877119f" providerId="AD" clId="Web-{62069D60-D12A-7A57-A3B1-F34941615567}" dt="2025-03-17T14:13:19.467" v="50" actId="20577"/>
+          <ac:spMkLst>
+            <pc:docMk/>
+            <pc:sldMk cId="885699272" sldId="468"/>
+            <ac:spMk id="2" creationId="{D3EC4347-820C-CB6A-F020-EB8FFBE4BABA}"/>
+          </ac:spMkLst>
+        </pc:spChg>
+        <pc:spChg chg="mod">
+          <ac:chgData name="Mohammed Fasha" userId="S::mohammed.fasha@uop.edu.jo::cc64f42d-a1a6-4f08-b97b-0c37f877119f" providerId="AD" clId="Web-{62069D60-D12A-7A57-A3B1-F34941615567}" dt="2025-03-17T14:17:40.226" v="99" actId="20577"/>
+          <ac:spMkLst>
+            <pc:docMk/>
+            <pc:sldMk cId="885699272" sldId="468"/>
+            <ac:spMk id="3" creationId="{36111376-C375-652C-0E62-C877F88420F2}"/>
+          </ac:spMkLst>
+        </pc:spChg>
+        <pc:spChg chg="add del mod">
+          <ac:chgData name="Mohammed Fasha" userId="S::mohammed.fasha@uop.edu.jo::cc64f42d-a1a6-4f08-b97b-0c37f877119f" providerId="AD" clId="Web-{62069D60-D12A-7A57-A3B1-F34941615567}" dt="2025-03-17T14:17:18.756" v="94"/>
+          <ac:spMkLst>
+            <pc:docMk/>
+            <pc:sldMk cId="885699272" sldId="468"/>
+            <ac:spMk id="4" creationId="{A90527D2-81B9-90FA-BF74-CBF0666C564C}"/>
+          </ac:spMkLst>
+        </pc:spChg>
+        <pc:spChg chg="add del mod">
+          <ac:chgData name="Mohammed Fasha" userId="S::mohammed.fasha@uop.edu.jo::cc64f42d-a1a6-4f08-b97b-0c37f877119f" providerId="AD" clId="Web-{62069D60-D12A-7A57-A3B1-F34941615567}" dt="2025-03-17T14:15:35.596" v="85"/>
+          <ac:spMkLst>
+            <pc:docMk/>
+            <pc:sldMk cId="885699272" sldId="468"/>
+            <ac:spMk id="6" creationId="{5E345D0A-72FE-7529-30AA-B09F0C33044D}"/>
+          </ac:spMkLst>
+        </pc:spChg>
+      </pc:sldChg>
+    </pc:docChg>
+  </pc:docChgLst>
 </pc:chgInfo>
 </file>
 
@@ -2313,7 +2698,7 @@
           <a:p>
             <a:fld id="{13BA03A4-B9F1-404C-8A74-B1AFD6480953}" type="datetimeFigureOut">
               <a:rPr lang="en-US" smtClean="0"/>
-              <a:t>3/15/2025</a:t>
+              <a:t>3/18/2025</a:t>
             </a:fld>
             <a:endParaRPr lang="en-US"/>
           </a:p>
@@ -5724,7 +6109,7 @@
           <a:p>
             <a:fld id="{0DB78E95-DE77-44D3-BDB9-E242948FB112}" type="datetimeFigureOut">
               <a:rPr lang="en-US" smtClean="0"/>
-              <a:t>3/15/2025</a:t>
+              <a:t>3/18/2025</a:t>
             </a:fld>
             <a:endParaRPr lang="en-US"/>
           </a:p>
@@ -5952,7 +6337,7 @@
           <a:p>
             <a:fld id="{0DB78E95-DE77-44D3-BDB9-E242948FB112}" type="datetimeFigureOut">
               <a:rPr lang="en-US" smtClean="0"/>
-              <a:t>3/15/2025</a:t>
+              <a:t>3/18/2025</a:t>
             </a:fld>
             <a:endParaRPr lang="en-US"/>
           </a:p>
@@ -6160,7 +6545,7 @@
           <a:p>
             <a:fld id="{0DB78E95-DE77-44D3-BDB9-E242948FB112}" type="datetimeFigureOut">
               <a:rPr lang="en-US" smtClean="0"/>
-              <a:t>3/15/2025</a:t>
+              <a:t>3/18/2025</a:t>
             </a:fld>
             <a:endParaRPr lang="en-US"/>
           </a:p>
@@ -6888,7 +7273,7 @@
           <a:p>
             <a:fld id="{0DB78E95-DE77-44D3-BDB9-E242948FB112}" type="datetimeFigureOut">
               <a:rPr lang="en-US" smtClean="0"/>
-              <a:t>3/15/2025</a:t>
+              <a:t>3/18/2025</a:t>
             </a:fld>
             <a:endParaRPr lang="en-US"/>
           </a:p>
@@ -7267,7 +7652,7 @@
           <a:p>
             <a:fld id="{0DB78E95-DE77-44D3-BDB9-E242948FB112}" type="datetimeFigureOut">
               <a:rPr lang="en-US" smtClean="0"/>
-              <a:t>3/15/2025</a:t>
+              <a:t>3/18/2025</a:t>
             </a:fld>
             <a:endParaRPr lang="en-US"/>
           </a:p>
@@ -7679,7 +8064,7 @@
           <a:p>
             <a:fld id="{0DB78E95-DE77-44D3-BDB9-E242948FB112}" type="datetimeFigureOut">
               <a:rPr lang="en-US" smtClean="0"/>
-              <a:t>3/15/2025</a:t>
+              <a:t>3/18/2025</a:t>
             </a:fld>
             <a:endParaRPr lang="en-US"/>
           </a:p>
@@ -7820,7 +8205,7 @@
           <a:p>
             <a:fld id="{0DB78E95-DE77-44D3-BDB9-E242948FB112}" type="datetimeFigureOut">
               <a:rPr lang="en-US" smtClean="0"/>
-              <a:t>3/15/2025</a:t>
+              <a:t>3/18/2025</a:t>
             </a:fld>
             <a:endParaRPr lang="en-US"/>
           </a:p>
@@ -7933,7 +8318,7 @@
           <a:p>
             <a:fld id="{0DB78E95-DE77-44D3-BDB9-E242948FB112}" type="datetimeFigureOut">
               <a:rPr lang="en-US" smtClean="0"/>
-              <a:t>3/15/2025</a:t>
+              <a:t>3/18/2025</a:t>
             </a:fld>
             <a:endParaRPr lang="en-US"/>
           </a:p>
@@ -8244,7 +8629,7 @@
           <a:p>
             <a:fld id="{0DB78E95-DE77-44D3-BDB9-E242948FB112}" type="datetimeFigureOut">
               <a:rPr lang="en-US" smtClean="0"/>
-              <a:t>3/15/2025</a:t>
+              <a:t>3/18/2025</a:t>
             </a:fld>
             <a:endParaRPr lang="en-US"/>
           </a:p>
@@ -8532,7 +8917,7 @@
           <a:p>
             <a:fld id="{0DB78E95-DE77-44D3-BDB9-E242948FB112}" type="datetimeFigureOut">
               <a:rPr lang="en-US" smtClean="0"/>
-              <a:t>3/15/2025</a:t>
+              <a:t>3/18/2025</a:t>
             </a:fld>
             <a:endParaRPr lang="en-US"/>
           </a:p>
@@ -8773,7 +9158,7 @@
           <a:p>
             <a:fld id="{0DB78E95-DE77-44D3-BDB9-E242948FB112}" type="datetimeFigureOut">
               <a:rPr lang="en-US" smtClean="0"/>
-              <a:t>3/15/2025</a:t>
+              <a:t>3/18/2025</a:t>
             </a:fld>
             <a:endParaRPr lang="en-US"/>
           </a:p>
@@ -9344,7 +9729,7 @@
                 <a:ea typeface="Calibri Light"/>
                 <a:cs typeface="Calibri Light"/>
               </a:rPr>
-              <a:t>Word Embeddings</a:t>
+              <a:t>Introduction Word Embeddings</a:t>
             </a:r>
           </a:p>
         </p:txBody>
@@ -9370,7 +9755,7 @@
           <a:bodyPr/>
           <a:lstStyle/>
           <a:p>
-            <a:endParaRPr lang="en-US"/>
+            <a:endParaRPr lang="en-US" dirty="0"/>
           </a:p>
         </p:txBody>
       </p:sp>
@@ -9431,7 +9816,10 @@
           <a:bodyPr/>
           <a:lstStyle/>
           <a:p>
-            <a:endParaRPr lang="en-US"/>
+            <a:r>
+              <a:rPr lang="en-US" dirty="0"/>
+              <a:t>Practical Implementation: BERT in Python</a:t>
+            </a:r>
           </a:p>
         </p:txBody>
       </p:sp>
@@ -9453,10 +9841,420 @@
         </p:nvSpPr>
         <p:spPr/>
         <p:txBody>
-          <a:bodyPr/>
+          <a:bodyPr>
+            <a:normAutofit fontScale="62500" lnSpcReduction="20000"/>
+          </a:bodyPr>
           <a:lstStyle/>
           <a:p>
-            <a:endParaRPr lang="en-US"/>
+            <a:pPr marL="0" indent="0">
+              <a:lnSpc>
+                <a:spcPct val="120000"/>
+              </a:lnSpc>
+              <a:spcBef>
+                <a:spcPts val="0"/>
+              </a:spcBef>
+              <a:buNone/>
+            </a:pPr>
+            <a:r>
+              <a:rPr lang="en-US" dirty="0"/>
+              <a:t>import torch</a:t>
+            </a:r>
+          </a:p>
+          <a:p>
+            <a:pPr marL="0" indent="0">
+              <a:lnSpc>
+                <a:spcPct val="120000"/>
+              </a:lnSpc>
+              <a:spcBef>
+                <a:spcPts val="0"/>
+              </a:spcBef>
+              <a:buNone/>
+            </a:pPr>
+            <a:r>
+              <a:rPr lang="en-US" dirty="0"/>
+              <a:t>from transformers import </a:t>
+            </a:r>
+            <a:r>
+              <a:rPr lang="en-US" dirty="0" err="1"/>
+              <a:t>BertModel</a:t>
+            </a:r>
+            <a:r>
+              <a:rPr lang="en-US" dirty="0"/>
+              <a:t>, </a:t>
+            </a:r>
+            <a:r>
+              <a:rPr lang="en-US" dirty="0" err="1"/>
+              <a:t>BertTokenizer</a:t>
+            </a:r>
+            <a:endParaRPr lang="en-US" dirty="0"/>
+          </a:p>
+          <a:p>
+            <a:pPr marL="0" indent="0">
+              <a:lnSpc>
+                <a:spcPct val="120000"/>
+              </a:lnSpc>
+              <a:spcBef>
+                <a:spcPts val="0"/>
+              </a:spcBef>
+              <a:buNone/>
+            </a:pPr>
+            <a:r>
+              <a:rPr lang="en-US" dirty="0"/>
+              <a:t># Load pre-trained BERT model and tokenizer</a:t>
+            </a:r>
+          </a:p>
+          <a:p>
+            <a:pPr marL="0" indent="0">
+              <a:lnSpc>
+                <a:spcPct val="120000"/>
+              </a:lnSpc>
+              <a:spcBef>
+                <a:spcPts val="0"/>
+              </a:spcBef>
+              <a:buNone/>
+            </a:pPr>
+            <a:r>
+              <a:rPr lang="en-US" dirty="0"/>
+              <a:t>tokenizer = </a:t>
+            </a:r>
+            <a:r>
+              <a:rPr lang="en-US" dirty="0" err="1"/>
+              <a:t>BertTokenizer.from_pretrained</a:t>
+            </a:r>
+            <a:r>
+              <a:rPr lang="en-US" dirty="0"/>
+              <a:t>('</a:t>
+            </a:r>
+            <a:r>
+              <a:rPr lang="en-US" dirty="0" err="1"/>
+              <a:t>bert</a:t>
+            </a:r>
+            <a:r>
+              <a:rPr lang="en-US" dirty="0"/>
+              <a:t>-base-uncased')</a:t>
+            </a:r>
+          </a:p>
+          <a:p>
+            <a:pPr marL="0" indent="0">
+              <a:lnSpc>
+                <a:spcPct val="120000"/>
+              </a:lnSpc>
+              <a:spcBef>
+                <a:spcPts val="0"/>
+              </a:spcBef>
+              <a:buNone/>
+            </a:pPr>
+            <a:r>
+              <a:rPr lang="en-US" dirty="0"/>
+              <a:t>model = </a:t>
+            </a:r>
+            <a:r>
+              <a:rPr lang="en-US" dirty="0" err="1"/>
+              <a:t>BertModel.from_pretrained</a:t>
+            </a:r>
+            <a:r>
+              <a:rPr lang="en-US" dirty="0"/>
+              <a:t>('</a:t>
+            </a:r>
+            <a:r>
+              <a:rPr lang="en-US" dirty="0" err="1"/>
+              <a:t>bert</a:t>
+            </a:r>
+            <a:r>
+              <a:rPr lang="en-US" dirty="0"/>
+              <a:t>-base-uncased')</a:t>
+            </a:r>
+          </a:p>
+          <a:p>
+            <a:pPr marL="0" indent="0">
+              <a:lnSpc>
+                <a:spcPct val="120000"/>
+              </a:lnSpc>
+              <a:spcBef>
+                <a:spcPts val="0"/>
+              </a:spcBef>
+              <a:buNone/>
+            </a:pPr>
+            <a:r>
+              <a:rPr lang="en-US" dirty="0"/>
+              <a:t># Input text</a:t>
+            </a:r>
+          </a:p>
+          <a:p>
+            <a:pPr marL="0" indent="0">
+              <a:lnSpc>
+                <a:spcPct val="120000"/>
+              </a:lnSpc>
+              <a:spcBef>
+                <a:spcPts val="0"/>
+              </a:spcBef>
+              <a:buNone/>
+            </a:pPr>
+            <a:r>
+              <a:rPr lang="en-US" dirty="0"/>
+              <a:t>text = "The quick brown fox jumps over the lazy dog."</a:t>
+            </a:r>
+          </a:p>
+          <a:p>
+            <a:pPr marL="0" indent="0">
+              <a:lnSpc>
+                <a:spcPct val="120000"/>
+              </a:lnSpc>
+              <a:spcBef>
+                <a:spcPts val="0"/>
+              </a:spcBef>
+              <a:buNone/>
+            </a:pPr>
+            <a:r>
+              <a:rPr lang="en-US" dirty="0"/>
+              <a:t># Tokenize input</a:t>
+            </a:r>
+          </a:p>
+          <a:p>
+            <a:pPr marL="0" indent="0">
+              <a:lnSpc>
+                <a:spcPct val="120000"/>
+              </a:lnSpc>
+              <a:spcBef>
+                <a:spcPts val="0"/>
+              </a:spcBef>
+              <a:buNone/>
+            </a:pPr>
+            <a:r>
+              <a:rPr lang="en-US" dirty="0"/>
+              <a:t>inputs = tokenizer(text, </a:t>
+            </a:r>
+            <a:r>
+              <a:rPr lang="en-US" dirty="0" err="1"/>
+              <a:t>return_tensors</a:t>
+            </a:r>
+            <a:r>
+              <a:rPr lang="en-US" dirty="0"/>
+              <a:t>="pt")</a:t>
+            </a:r>
+          </a:p>
+          <a:p>
+            <a:pPr marL="0" indent="0">
+              <a:lnSpc>
+                <a:spcPct val="120000"/>
+              </a:lnSpc>
+              <a:spcBef>
+                <a:spcPts val="0"/>
+              </a:spcBef>
+              <a:buNone/>
+            </a:pPr>
+            <a:r>
+              <a:rPr lang="en-US" dirty="0"/>
+              <a:t># Get BERT embeddings</a:t>
+            </a:r>
+          </a:p>
+          <a:p>
+            <a:pPr marL="0" indent="0">
+              <a:lnSpc>
+                <a:spcPct val="120000"/>
+              </a:lnSpc>
+              <a:spcBef>
+                <a:spcPts val="0"/>
+              </a:spcBef>
+              <a:buNone/>
+            </a:pPr>
+            <a:r>
+              <a:rPr lang="en-US" dirty="0"/>
+              <a:t>with </a:t>
+            </a:r>
+            <a:r>
+              <a:rPr lang="en-US" dirty="0" err="1"/>
+              <a:t>torch.no_grad</a:t>
+            </a:r>
+            <a:r>
+              <a:rPr lang="en-US" dirty="0"/>
+              <a:t>():</a:t>
+            </a:r>
+          </a:p>
+          <a:p>
+            <a:pPr marL="0" indent="0">
+              <a:lnSpc>
+                <a:spcPct val="120000"/>
+              </a:lnSpc>
+              <a:spcBef>
+                <a:spcPts val="0"/>
+              </a:spcBef>
+              <a:buNone/>
+            </a:pPr>
+            <a:r>
+              <a:rPr lang="en-US" dirty="0"/>
+              <a:t>    outputs = model(**inputs)</a:t>
+            </a:r>
+          </a:p>
+          <a:p>
+            <a:pPr marL="0" indent="0">
+              <a:lnSpc>
+                <a:spcPct val="120000"/>
+              </a:lnSpc>
+              <a:spcBef>
+                <a:spcPts val="0"/>
+              </a:spcBef>
+              <a:buNone/>
+            </a:pPr>
+            <a:r>
+              <a:rPr lang="en-US" dirty="0"/>
+              <a:t># Last hidden states contain contextual embeddings for each token</a:t>
+            </a:r>
+          </a:p>
+          <a:p>
+            <a:pPr marL="0" indent="0">
+              <a:lnSpc>
+                <a:spcPct val="120000"/>
+              </a:lnSpc>
+              <a:spcBef>
+                <a:spcPts val="0"/>
+              </a:spcBef>
+              <a:buNone/>
+            </a:pPr>
+            <a:r>
+              <a:rPr lang="en-US" dirty="0" err="1"/>
+              <a:t>last_hidden_states</a:t>
+            </a:r>
+            <a:r>
+              <a:rPr lang="en-US" dirty="0"/>
+              <a:t> = </a:t>
+            </a:r>
+            <a:r>
+              <a:rPr lang="en-US" dirty="0" err="1"/>
+              <a:t>outputs.last_hidden_state</a:t>
+            </a:r>
+            <a:endParaRPr lang="en-US" dirty="0"/>
+          </a:p>
+          <a:p>
+            <a:pPr marL="0" indent="0">
+              <a:lnSpc>
+                <a:spcPct val="120000"/>
+              </a:lnSpc>
+              <a:spcBef>
+                <a:spcPts val="0"/>
+              </a:spcBef>
+              <a:buNone/>
+            </a:pPr>
+            <a:r>
+              <a:rPr lang="en-US" dirty="0"/>
+              <a:t># Get embedding for the first token (after [CLS])</a:t>
+            </a:r>
+          </a:p>
+          <a:p>
+            <a:pPr marL="0" indent="0">
+              <a:lnSpc>
+                <a:spcPct val="120000"/>
+              </a:lnSpc>
+              <a:spcBef>
+                <a:spcPts val="0"/>
+              </a:spcBef>
+              <a:buNone/>
+            </a:pPr>
+            <a:r>
+              <a:rPr lang="en-US" dirty="0" err="1"/>
+              <a:t>word_embedding</a:t>
+            </a:r>
+            <a:r>
+              <a:rPr lang="en-US" dirty="0"/>
+              <a:t> = </a:t>
+            </a:r>
+            <a:r>
+              <a:rPr lang="en-US" dirty="0" err="1"/>
+              <a:t>last_hidden_states</a:t>
+            </a:r>
+            <a:r>
+              <a:rPr lang="en-US" dirty="0"/>
+              <a:t>[0, 1].</a:t>
+            </a:r>
+            <a:r>
+              <a:rPr lang="en-US" dirty="0" err="1"/>
+              <a:t>numpy</a:t>
+            </a:r>
+            <a:r>
+              <a:rPr lang="en-US" dirty="0"/>
+              <a:t>()</a:t>
+            </a:r>
+          </a:p>
+          <a:p>
+            <a:pPr marL="0" indent="0">
+              <a:lnSpc>
+                <a:spcPct val="120000"/>
+              </a:lnSpc>
+              <a:spcBef>
+                <a:spcPts val="0"/>
+              </a:spcBef>
+              <a:buNone/>
+            </a:pPr>
+            <a:r>
+              <a:rPr lang="en-US" dirty="0"/>
+              <a:t>print(</a:t>
+            </a:r>
+            <a:r>
+              <a:rPr lang="en-US" dirty="0" err="1"/>
+              <a:t>f"BERT</a:t>
+            </a:r>
+            <a:r>
+              <a:rPr lang="en-US" dirty="0"/>
+              <a:t> embedding for 'The' (first 5 dimensions): {</a:t>
+            </a:r>
+            <a:r>
+              <a:rPr lang="en-US" dirty="0" err="1"/>
+              <a:t>word_embedding</a:t>
+            </a:r>
+            <a:r>
+              <a:rPr lang="en-US" dirty="0"/>
+              <a:t>[:5]}")</a:t>
+            </a:r>
+          </a:p>
+          <a:p>
+            <a:pPr marL="0" indent="0">
+              <a:lnSpc>
+                <a:spcPct val="120000"/>
+              </a:lnSpc>
+              <a:spcBef>
+                <a:spcPts val="0"/>
+              </a:spcBef>
+              <a:buNone/>
+            </a:pPr>
+            <a:r>
+              <a:rPr lang="en-US" dirty="0"/>
+              <a:t># Get embeddings for full sentence (CLS token)</a:t>
+            </a:r>
+          </a:p>
+          <a:p>
+            <a:pPr marL="0" indent="0">
+              <a:lnSpc>
+                <a:spcPct val="120000"/>
+              </a:lnSpc>
+              <a:spcBef>
+                <a:spcPts val="0"/>
+              </a:spcBef>
+              <a:buNone/>
+            </a:pPr>
+            <a:r>
+              <a:rPr lang="en-US" dirty="0" err="1"/>
+              <a:t>sentence_embedding</a:t>
+            </a:r>
+            <a:r>
+              <a:rPr lang="en-US" dirty="0"/>
+              <a:t> = </a:t>
+            </a:r>
+            <a:r>
+              <a:rPr lang="en-US" dirty="0" err="1"/>
+              <a:t>last_hidden_states</a:t>
+            </a:r>
+            <a:r>
+              <a:rPr lang="en-US" dirty="0"/>
+              <a:t>[0, 0].</a:t>
+            </a:r>
+            <a:r>
+              <a:rPr lang="en-US" dirty="0" err="1"/>
+              <a:t>numpy</a:t>
+            </a:r>
+            <a:r>
+              <a:rPr lang="en-US" dirty="0"/>
+              <a:t>()</a:t>
+            </a:r>
           </a:p>
         </p:txBody>
       </p:sp>
@@ -9841,8 +10639,8 @@
           </a:p>
         </p:txBody>
       </p:sp>
-      <mc:AlternateContent xmlns:mc="http://schemas.openxmlformats.org/markup-compatibility/2006">
-        <mc:Choice xmlns:a14="http://schemas.microsoft.com/office/drawing/2010/main" Requires="a14">
+      <mc:AlternateContent xmlns:mc="http://schemas.openxmlformats.org/markup-compatibility/2006" xmlns:a14="http://schemas.microsoft.com/office/drawing/2010/main">
+        <mc:Choice Requires="a14">
           <p:sp>
             <p:nvSpPr>
               <p:cNvPr id="5" name="TextBox 4"/>
@@ -9914,70 +10712,7 @@
                           </a:solidFill>
                           <a:latin typeface="Cambria Math" charset="0"/>
                         </a:rPr>
-                        <m:t>     0     </m:t>
-                      </m:r>
-                      <m:r>
-                        <a:rPr lang="en-US" sz="2400" i="1">
-                          <a:solidFill>
-                            <a:srgbClr val="0070C0"/>
-                          </a:solidFill>
-                          <a:latin typeface="Cambria Math" charset="0"/>
-                        </a:rPr>
-                        <m:t>0     0</m:t>
-                      </m:r>
-                      <m:r>
-                        <a:rPr lang="en-US" sz="2400" i="1">
-                          <a:solidFill>
-                            <a:srgbClr val="0070C0"/>
-                          </a:solidFill>
-                          <a:latin typeface="Cambria Math" charset="0"/>
-                        </a:rPr>
-                        <m:t>     </m:t>
-                      </m:r>
-                      <m:r>
-                        <a:rPr lang="en-US" sz="2400" i="1">
-                          <a:solidFill>
-                            <a:srgbClr val="0070C0"/>
-                          </a:solidFill>
-                          <a:latin typeface="Cambria Math" charset="0"/>
-                        </a:rPr>
-                        <m:t>0     0     0</m:t>
-                      </m:r>
-                      <m:r>
-                        <a:rPr lang="en-US" sz="2400" i="1">
-                          <a:solidFill>
-                            <a:srgbClr val="0070C0"/>
-                          </a:solidFill>
-                          <a:latin typeface="Cambria Math" charset="0"/>
-                        </a:rPr>
-                        <m:t>     </m:t>
-                      </m:r>
-                      <m:r>
-                        <a:rPr lang="en-US" sz="2400" i="1">
-                          <a:solidFill>
-                            <a:srgbClr val="0070C0"/>
-                          </a:solidFill>
-                          <a:latin typeface="Cambria Math" charset="0"/>
-                        </a:rPr>
-                        <m:t>0     0     0</m:t>
-                      </m:r>
-                      <m:r>
-                        <a:rPr lang="en-US" sz="2400" i="1">
-                          <a:solidFill>
-                            <a:srgbClr val="0070C0"/>
-                          </a:solidFill>
-                          <a:latin typeface="Cambria Math" charset="0"/>
-                        </a:rPr>
-                        <m:t> </m:t>
-                      </m:r>
-                      <m:r>
-                        <a:rPr lang="en-US" sz="2400" i="1">
-                          <a:solidFill>
-                            <a:srgbClr val="0070C0"/>
-                          </a:solidFill>
-                          <a:latin typeface="Cambria Math" charset="0"/>
-                        </a:rPr>
-                        <m:t>]</m:t>
+                        <m:t>     0     0     0     0     0     0     0     0     0 ]</m:t>
                       </m:r>
                     </m:oMath>
                   </m:oMathPara>
@@ -9995,7 +10730,7 @@
             </p:txBody>
           </p:sp>
         </mc:Choice>
-        <mc:Fallback>
+        <mc:Fallback xmlns="">
           <p:sp>
             <p:nvSpPr>
               <p:cNvPr id="5" name="TextBox 4"/>
@@ -10039,8 +10774,8 @@
           </p:sp>
         </mc:Fallback>
       </mc:AlternateContent>
-      <mc:AlternateContent xmlns:mc="http://schemas.openxmlformats.org/markup-compatibility/2006">
-        <mc:Choice xmlns:a14="http://schemas.microsoft.com/office/drawing/2010/main" Requires="a14">
+      <mc:AlternateContent xmlns:mc="http://schemas.openxmlformats.org/markup-compatibility/2006" xmlns:a14="http://schemas.microsoft.com/office/drawing/2010/main">
+        <mc:Choice Requires="a14">
           <p:sp>
             <p:nvSpPr>
               <p:cNvPr id="15" name="TextBox 14"/>
@@ -10112,70 +10847,7 @@
                           </a:solidFill>
                           <a:latin typeface="Cambria Math" charset="0"/>
                         </a:rPr>
-                        <m:t>     </m:t>
-                      </m:r>
-                      <m:r>
-                        <a:rPr lang="en-US" sz="2400" i="1">
-                          <a:solidFill>
-                            <a:srgbClr val="0070C0"/>
-                          </a:solidFill>
-                          <a:latin typeface="Cambria Math" charset="0"/>
-                        </a:rPr>
-                        <m:t>0     0</m:t>
-                      </m:r>
-                      <m:r>
-                        <a:rPr lang="en-US" sz="2400" i="1">
-                          <a:solidFill>
-                            <a:srgbClr val="0070C0"/>
-                          </a:solidFill>
-                          <a:latin typeface="Cambria Math" charset="0"/>
-                        </a:rPr>
-                        <m:t>     </m:t>
-                      </m:r>
-                      <m:r>
-                        <a:rPr lang="en-US" sz="2400" i="1">
-                          <a:solidFill>
-                            <a:srgbClr val="0070C0"/>
-                          </a:solidFill>
-                          <a:latin typeface="Cambria Math" charset="0"/>
-                        </a:rPr>
-                        <m:t>0     0     0</m:t>
-                      </m:r>
-                      <m:r>
-                        <a:rPr lang="en-US" sz="2400" i="1">
-                          <a:solidFill>
-                            <a:srgbClr val="0070C0"/>
-                          </a:solidFill>
-                          <a:latin typeface="Cambria Math" charset="0"/>
-                        </a:rPr>
-                        <m:t>     </m:t>
-                      </m:r>
-                      <m:r>
-                        <a:rPr lang="en-US" sz="2400" i="1">
-                          <a:solidFill>
-                            <a:srgbClr val="0070C0"/>
-                          </a:solidFill>
-                          <a:latin typeface="Cambria Math" charset="0"/>
-                        </a:rPr>
-                        <m:t>0     0     0</m:t>
-                      </m:r>
-                      <m:r>
-                        <a:rPr lang="en-US" sz="2400" i="1">
-                          <a:solidFill>
-                            <a:srgbClr val="0070C0"/>
-                          </a:solidFill>
-                          <a:latin typeface="Cambria Math" charset="0"/>
-                        </a:rPr>
-                        <m:t> </m:t>
-                      </m:r>
-                      <m:r>
-                        <a:rPr lang="en-US" sz="2400" i="1">
-                          <a:solidFill>
-                            <a:srgbClr val="0070C0"/>
-                          </a:solidFill>
-                          <a:latin typeface="Cambria Math" charset="0"/>
-                        </a:rPr>
-                        <m:t>]</m:t>
+                        <m:t>     0     0     0     0     0     0     0     0 ]</m:t>
                       </m:r>
                     </m:oMath>
                   </m:oMathPara>
@@ -10193,7 +10865,7 @@
             </p:txBody>
           </p:sp>
         </mc:Choice>
-        <mc:Fallback>
+        <mc:Fallback xmlns="">
           <p:sp>
             <p:nvSpPr>
               <p:cNvPr id="15" name="TextBox 14"/>
@@ -10237,8 +10909,8 @@
           </p:sp>
         </mc:Fallback>
       </mc:AlternateContent>
-      <mc:AlternateContent xmlns:mc="http://schemas.openxmlformats.org/markup-compatibility/2006">
-        <mc:Choice xmlns:a14="http://schemas.microsoft.com/office/drawing/2010/main" Requires="a14">
+      <mc:AlternateContent xmlns:mc="http://schemas.openxmlformats.org/markup-compatibility/2006" xmlns:a14="http://schemas.microsoft.com/office/drawing/2010/main">
+        <mc:Choice Requires="a14">
           <p:sp>
             <p:nvSpPr>
               <p:cNvPr id="16" name="TextBox 15"/>
@@ -10310,61 +10982,7 @@
                           </a:solidFill>
                           <a:latin typeface="Cambria Math" charset="0"/>
                         </a:rPr>
-                        <m:t>     0</m:t>
-                      </m:r>
-                      <m:r>
-                        <a:rPr lang="en-US" sz="2400" i="1">
-                          <a:solidFill>
-                            <a:srgbClr val="0070C0"/>
-                          </a:solidFill>
-                          <a:latin typeface="Cambria Math" charset="0"/>
-                        </a:rPr>
-                        <m:t>     </m:t>
-                      </m:r>
-                      <m:r>
-                        <a:rPr lang="en-US" sz="2400" i="1">
-                          <a:solidFill>
-                            <a:srgbClr val="0070C0"/>
-                          </a:solidFill>
-                          <a:latin typeface="Cambria Math" charset="0"/>
-                        </a:rPr>
-                        <m:t>0     0     0</m:t>
-                      </m:r>
-                      <m:r>
-                        <a:rPr lang="en-US" sz="2400" i="1">
-                          <a:solidFill>
-                            <a:srgbClr val="0070C0"/>
-                          </a:solidFill>
-                          <a:latin typeface="Cambria Math" charset="0"/>
-                        </a:rPr>
-                        <m:t>     </m:t>
-                      </m:r>
-                      <m:r>
-                        <a:rPr lang="en-US" sz="2400" i="1">
-                          <a:solidFill>
-                            <a:srgbClr val="0070C0"/>
-                          </a:solidFill>
-                          <a:latin typeface="Cambria Math" charset="0"/>
-                        </a:rPr>
-                        <m:t>0     0     0</m:t>
-                      </m:r>
-                      <m:r>
-                        <a:rPr lang="en-US" sz="2400" i="1">
-                          <a:solidFill>
-                            <a:srgbClr val="0070C0"/>
-                          </a:solidFill>
-                          <a:latin typeface="Cambria Math" charset="0"/>
-                        </a:rPr>
-                        <m:t> </m:t>
-                      </m:r>
-                      <m:r>
-                        <a:rPr lang="en-US" sz="2400" i="1">
-                          <a:solidFill>
-                            <a:srgbClr val="0070C0"/>
-                          </a:solidFill>
-                          <a:latin typeface="Cambria Math" charset="0"/>
-                        </a:rPr>
-                        <m:t>]</m:t>
+                        <m:t>     0     0     0     0     0     0     0 ]</m:t>
                       </m:r>
                     </m:oMath>
                   </m:oMathPara>
@@ -10382,7 +11000,7 @@
             </p:txBody>
           </p:sp>
         </mc:Choice>
-        <mc:Fallback>
+        <mc:Fallback xmlns="">
           <p:sp>
             <p:nvSpPr>
               <p:cNvPr id="16" name="TextBox 15"/>
@@ -18442,10 +19060,10 @@
       </p:grpSpPr>
       <p:sp>
         <p:nvSpPr>
-          <p:cNvPr id="2" name="Title 1">
+          <p:cNvPr id="5" name="Title 4">
             <a:extLst>
               <a:ext uri="{FF2B5EF4-FFF2-40B4-BE49-F238E27FC236}">
-                <a16:creationId xmlns:a16="http://schemas.microsoft.com/office/drawing/2014/main" id="{155C2314-3CF3-F0A9-685A-3156E5CE2674}"/>
+                <a16:creationId xmlns:a16="http://schemas.microsoft.com/office/drawing/2014/main" id="{41133BFA-5BB3-2A95-7FFB-71799237C144}"/>
               </a:ext>
             </a:extLst>
           </p:cNvPr>
@@ -18459,7 +19077,7 @@
         <p:spPr/>
         <p:txBody>
           <a:bodyPr>
-            <a:normAutofit/>
+            <a:normAutofit fontScale="90000"/>
           </a:bodyPr>
           <a:lstStyle/>
           <a:p>
@@ -18472,10 +19090,10 @@
       </p:sp>
       <p:sp>
         <p:nvSpPr>
-          <p:cNvPr id="3" name="Content Placeholder 2">
+          <p:cNvPr id="6" name="Text Placeholder 5">
             <a:extLst>
               <a:ext uri="{FF2B5EF4-FFF2-40B4-BE49-F238E27FC236}">
-                <a16:creationId xmlns:a16="http://schemas.microsoft.com/office/drawing/2014/main" id="{B1CD1ADE-0294-A1FB-F5E9-1676C5183664}"/>
+                <a16:creationId xmlns:a16="http://schemas.microsoft.com/office/drawing/2014/main" id="{F055FB20-75AA-C3E2-08F5-78605162D8E3}"/>
               </a:ext>
             </a:extLst>
           </p:cNvPr>
@@ -18483,7 +19101,7 @@
             <a:spLocks noGrp="1"/>
           </p:cNvSpPr>
           <p:nvPr>
-            <p:ph idx="1"/>
+            <p:ph type="body" idx="1"/>
           </p:nvPr>
         </p:nvSpPr>
         <p:spPr/>
@@ -18491,70 +19109,14 @@
           <a:bodyPr/>
           <a:lstStyle/>
           <a:p>
-            <a:pPr>
-              <a:buFont typeface="Arial" panose="020B0604020202020204" pitchFamily="34" charset="0"/>
-              <a:buChar char="•"/>
-            </a:pPr>
-            <a:r>
-              <a:rPr lang="en-US" b="1" dirty="0"/>
-              <a:t>Definition</a:t>
-            </a:r>
-            <a:r>
-              <a:rPr lang="en-US" dirty="0"/>
-              <a:t>: Word embeddings are vector representations of words in a continuous vector space</a:t>
-            </a:r>
-          </a:p>
-          <a:p>
-            <a:pPr>
-              <a:buFont typeface="Arial" panose="020B0604020202020204" pitchFamily="34" charset="0"/>
-              <a:buChar char="•"/>
-            </a:pPr>
-            <a:r>
-              <a:rPr lang="en-US" b="1" dirty="0"/>
-              <a:t>Purpose</a:t>
-            </a:r>
-            <a:r>
-              <a:rPr lang="en-US" dirty="0"/>
-              <a:t>: Capture semantic and syntactic relationships between words</a:t>
-            </a:r>
-          </a:p>
-          <a:p>
-            <a:pPr>
-              <a:buFont typeface="Arial" panose="020B0604020202020204" pitchFamily="34" charset="0"/>
-              <a:buChar char="•"/>
-            </a:pPr>
-            <a:r>
-              <a:rPr lang="en-US" b="1" dirty="0"/>
-              <a:t>Key innovation</a:t>
-            </a:r>
-            <a:r>
-              <a:rPr lang="en-US" dirty="0"/>
-              <a:t>: Words with similar meanings have similar vector representations</a:t>
-            </a:r>
-          </a:p>
-          <a:p>
-            <a:pPr>
-              <a:buFont typeface="Arial" panose="020B0604020202020204" pitchFamily="34" charset="0"/>
-              <a:buChar char="•"/>
-            </a:pPr>
-            <a:r>
-              <a:rPr lang="en-US" b="1" dirty="0"/>
-              <a:t>Foundation of modern NLP</a:t>
-            </a:r>
-            <a:r>
-              <a:rPr lang="en-US" dirty="0"/>
-              <a:t>: Enable machines to understand relationships between words</a:t>
-            </a:r>
-          </a:p>
-          <a:p>
-            <a:endParaRPr lang="en-US" dirty="0"/>
+            <a:endParaRPr lang="en-US"/>
           </a:p>
         </p:txBody>
       </p:sp>
     </p:spTree>
     <p:extLst>
       <p:ext uri="{BB962C8B-B14F-4D97-AF65-F5344CB8AC3E}">
-        <p14:creationId xmlns:p14="http://schemas.microsoft.com/office/powerpoint/2010/main" val="48836864"/>
+        <p14:creationId xmlns:p14="http://schemas.microsoft.com/office/powerpoint/2010/main" val="1668182246"/>
       </p:ext>
     </p:extLst>
   </p:cSld>
@@ -21738,7 +22300,7 @@
                           </a:solidFill>
                           <a:latin typeface="Cambria Math" charset="0"/>
                         </a:rPr>
-                        <m:t>0 </m:t>
+                        <m:t>0   </m:t>
                       </m:r>
                       <m:r>
                         <a:rPr lang="en-US" i="1">
@@ -21747,7 +22309,7 @@
                           </a:solidFill>
                           <a:latin typeface="Cambria Math" charset="0"/>
                         </a:rPr>
-                        <m:t>    </m:t>
+                        <m:t>  </m:t>
                       </m:r>
                     </m:oMath>
                   </m:oMathPara>
@@ -22625,7 +23187,7 @@
                           </a:solidFill>
                           <a:latin typeface="Cambria Math" charset="0"/>
                         </a:rPr>
-                        <m:t>0 </m:t>
+                        <m:t>0   </m:t>
                       </m:r>
                       <m:r>
                         <a:rPr lang="en-US" i="1">
@@ -22634,7 +23196,7 @@
                           </a:solidFill>
                           <a:latin typeface="Cambria Math" charset="0"/>
                         </a:rPr>
-                        <m:t>    </m:t>
+                        <m:t>  </m:t>
                       </m:r>
                     </m:oMath>
                   </m:oMathPara>
@@ -23939,7 +24501,7 @@
                           </a:solidFill>
                           <a:latin typeface="Cambria Math" charset="0"/>
                         </a:rPr>
-                        <m:t>0 </m:t>
+                        <m:t>0   </m:t>
                       </m:r>
                       <m:r>
                         <a:rPr lang="en-US" i="1">
@@ -23948,7 +24510,7 @@
                           </a:solidFill>
                           <a:latin typeface="Cambria Math" charset="0"/>
                         </a:rPr>
-                        <m:t>    </m:t>
+                        <m:t>  </m:t>
                       </m:r>
                     </m:oMath>
                   </m:oMathPara>
@@ -25073,7 +25635,7 @@
                           </a:solidFill>
                           <a:latin typeface="Cambria Math" charset="0"/>
                         </a:rPr>
-                        <m:t>0 </m:t>
+                        <m:t>0   </m:t>
                       </m:r>
                       <m:r>
                         <a:rPr lang="en-US" i="1">
@@ -25082,7 +25644,7 @@
                           </a:solidFill>
                           <a:latin typeface="Cambria Math" charset="0"/>
                         </a:rPr>
-                        <m:t>    </m:t>
+                        <m:t>  </m:t>
                       </m:r>
                     </m:oMath>
                   </m:oMathPara>
@@ -34259,7 +34821,7 @@
           <p:cNvPr id="2" name="Title 1">
             <a:extLst>
               <a:ext uri="{FF2B5EF4-FFF2-40B4-BE49-F238E27FC236}">
-                <a16:creationId xmlns:a16="http://schemas.microsoft.com/office/drawing/2014/main" id="{51BB7355-8D6D-8485-0894-0AB532961579}"/>
+                <a16:creationId xmlns:a16="http://schemas.microsoft.com/office/drawing/2014/main" id="{155C2314-3CF3-F0A9-685A-3156E5CE2674}"/>
               </a:ext>
             </a:extLst>
           </p:cNvPr>
@@ -34279,7 +34841,7 @@
           <a:p>
             <a:r>
               <a:rPr lang="en-US" dirty="0"/>
-              <a:t>The Evolution of Word Representations</a:t>
+              <a:t>Introduction to Word Embeddings</a:t>
             </a:r>
           </a:p>
         </p:txBody>
@@ -34289,7 +34851,7 @@
           <p:cNvPr id="3" name="Content Placeholder 2">
             <a:extLst>
               <a:ext uri="{FF2B5EF4-FFF2-40B4-BE49-F238E27FC236}">
-                <a16:creationId xmlns:a16="http://schemas.microsoft.com/office/drawing/2014/main" id="{978D9617-84BF-81D4-C219-85A58FE307F3}"/>
+                <a16:creationId xmlns:a16="http://schemas.microsoft.com/office/drawing/2014/main" id="{B1CD1ADE-0294-A1FB-F5E9-1676C5183664}"/>
               </a:ext>
             </a:extLst>
           </p:cNvPr>
@@ -34300,19 +34862,15 @@
             <p:ph idx="1"/>
           </p:nvPr>
         </p:nvSpPr>
-        <p:spPr/>
+        <p:spPr>
+          <a:xfrm>
+            <a:off x="838200" y="1706007"/>
+            <a:ext cx="5359400" cy="4991039"/>
+          </a:xfrm>
+        </p:spPr>
         <p:txBody>
           <a:bodyPr/>
           <a:lstStyle/>
-          <a:p>
-            <a:pPr>
-              <a:buNone/>
-            </a:pPr>
-            <a:r>
-              <a:rPr lang="en-US" b="1" dirty="0"/>
-              <a:t>Traditional Methods (Pre-2013)</a:t>
-            </a:r>
-          </a:p>
           <a:p>
             <a:pPr>
               <a:buFont typeface="Arial" panose="020B0604020202020204" pitchFamily="34" charset="0"/>
@@ -34320,11 +34878,11 @@
             </a:pPr>
             <a:r>
               <a:rPr lang="en-US" b="1" dirty="0"/>
-              <a:t>One-hot encoding</a:t>
+              <a:t>Definition</a:t>
             </a:r>
             <a:r>
               <a:rPr lang="en-US" dirty="0"/>
-              <a:t>: Sparse, binary vectors (dimension = vocabulary size)</a:t>
+              <a:t>: Word embeddings are vector representations of words in a continuous vector space</a:t>
             </a:r>
           </a:p>
           <a:p>
@@ -34334,41 +34892,39 @@
             </a:pPr>
             <a:r>
               <a:rPr lang="en-US" b="1" dirty="0"/>
-              <a:t>Limitations</a:t>
+              <a:t>Purpose</a:t>
             </a:r>
             <a:r>
               <a:rPr lang="en-US" dirty="0"/>
-              <a:t>: </a:t>
-            </a:r>
-          </a:p>
-          <a:p>
-            <a:pPr marL="742950" lvl="1" indent="-285750">
+              <a:t>: Capture semantic and syntactic relationships between words</a:t>
+            </a:r>
+          </a:p>
+          <a:p>
+            <a:pPr>
               <a:buFont typeface="Arial" panose="020B0604020202020204" pitchFamily="34" charset="0"/>
               <a:buChar char="•"/>
             </a:pPr>
             <a:r>
+              <a:rPr lang="en-US" b="1" dirty="0"/>
+              <a:t>Key innovation</a:t>
+            </a:r>
+            <a:r>
               <a:rPr lang="en-US" dirty="0"/>
-              <a:t>No notion of similarity between words</a:t>
-            </a:r>
-          </a:p>
-          <a:p>
-            <a:pPr marL="742950" lvl="1" indent="-285750">
+              <a:t>: Words with similar meanings have similar vector representations</a:t>
+            </a:r>
+          </a:p>
+          <a:p>
+            <a:pPr>
               <a:buFont typeface="Arial" panose="020B0604020202020204" pitchFamily="34" charset="0"/>
               <a:buChar char="•"/>
             </a:pPr>
             <a:r>
+              <a:rPr lang="en-US" b="1" dirty="0"/>
+              <a:t>Foundation of modern NLP</a:t>
+            </a:r>
+            <a:r>
               <a:rPr lang="en-US" dirty="0"/>
-              <a:t>Curse of dimensionality</a:t>
-            </a:r>
-          </a:p>
-          <a:p>
-            <a:pPr marL="742950" lvl="1" indent="-285750">
-              <a:buFont typeface="Arial" panose="020B0604020202020204" pitchFamily="34" charset="0"/>
-              <a:buChar char="•"/>
-            </a:pPr>
-            <a:r>
-              <a:rPr lang="en-US" dirty="0"/>
-              <a:t>No semantic information captured</a:t>
+              <a:t>: Enable machines to understand relationships between words</a:t>
             </a:r>
           </a:p>
           <a:p>
@@ -34376,466 +34932,40 @@
           </a:p>
         </p:txBody>
       </p:sp>
-      <p:graphicFrame>
-        <p:nvGraphicFramePr>
-          <p:cNvPr id="4" name="Content Placeholder 3">
+      <p:pic>
+        <p:nvPicPr>
+          <p:cNvPr id="5" name="Picture 4">
             <a:extLst>
               <a:ext uri="{FF2B5EF4-FFF2-40B4-BE49-F238E27FC236}">
-                <a16:creationId xmlns:a16="http://schemas.microsoft.com/office/drawing/2014/main" id="{E227B7C6-2CDC-88BB-C41D-BC7307D9374E}"/>
+                <a16:creationId xmlns:a16="http://schemas.microsoft.com/office/drawing/2014/main" id="{C6DBBC5E-1505-3C9E-BC4A-D989A6A248A4}"/>
               </a:ext>
             </a:extLst>
           </p:cNvPr>
-          <p:cNvGraphicFramePr>
-            <a:graphicFrameLocks/>
-          </p:cNvGraphicFramePr>
-          <p:nvPr>
-            <p:extLst>
-              <p:ext uri="{D42A27DB-BD31-4B8C-83A1-F6EECF244321}">
-                <p14:modId xmlns:p14="http://schemas.microsoft.com/office/powerpoint/2010/main" val="2514166198"/>
-              </p:ext>
-            </p:extLst>
-          </p:nvPr>
-        </p:nvGraphicFramePr>
-        <p:xfrm>
-          <a:off x="553994" y="4511032"/>
-          <a:ext cx="10515600" cy="1828800"/>
-        </p:xfrm>
-        <a:graphic>
-          <a:graphicData uri="http://schemas.openxmlformats.org/drawingml/2006/table">
-            <a:tbl>
-              <a:tblPr>
-                <a:tableStyleId>{616DA210-FB5B-4158-B5E0-FEB733F419BA}</a:tableStyleId>
-              </a:tblPr>
-              <a:tblGrid>
-                <a:gridCol w="2103120">
-                  <a:extLst>
-                    <a:ext uri="{9D8B030D-6E8A-4147-A177-3AD203B41FA5}">
-                      <a16:colId xmlns:a16="http://schemas.microsoft.com/office/drawing/2014/main" val="3090422750"/>
-                    </a:ext>
-                  </a:extLst>
-                </a:gridCol>
-                <a:gridCol w="2103120">
-                  <a:extLst>
-                    <a:ext uri="{9D8B030D-6E8A-4147-A177-3AD203B41FA5}">
-                      <a16:colId xmlns:a16="http://schemas.microsoft.com/office/drawing/2014/main" val="2090717841"/>
-                    </a:ext>
-                  </a:extLst>
-                </a:gridCol>
-                <a:gridCol w="2103120">
-                  <a:extLst>
-                    <a:ext uri="{9D8B030D-6E8A-4147-A177-3AD203B41FA5}">
-                      <a16:colId xmlns:a16="http://schemas.microsoft.com/office/drawing/2014/main" val="2254856482"/>
-                    </a:ext>
-                  </a:extLst>
-                </a:gridCol>
-                <a:gridCol w="2103120">
-                  <a:extLst>
-                    <a:ext uri="{9D8B030D-6E8A-4147-A177-3AD203B41FA5}">
-                      <a16:colId xmlns:a16="http://schemas.microsoft.com/office/drawing/2014/main" val="1422357000"/>
-                    </a:ext>
-                  </a:extLst>
-                </a:gridCol>
-                <a:gridCol w="2103120">
-                  <a:extLst>
-                    <a:ext uri="{9D8B030D-6E8A-4147-A177-3AD203B41FA5}">
-                      <a16:colId xmlns:a16="http://schemas.microsoft.com/office/drawing/2014/main" val="3260370378"/>
-                    </a:ext>
-                  </a:extLst>
-                </a:gridCol>
-              </a:tblGrid>
-              <a:tr h="0">
-                <a:tc>
-                  <a:txBody>
-                    <a:bodyPr/>
-                    <a:lstStyle/>
-                    <a:p>
-                      <a:pPr algn="ctr"/>
-                      <a:r>
-                        <a:rPr lang="en-US"/>
-                        <a:t>Word</a:t>
-                      </a:r>
-                    </a:p>
-                  </a:txBody>
-                  <a:tcPr anchor="ctr"/>
-                </a:tc>
-                <a:tc>
-                  <a:txBody>
-                    <a:bodyPr/>
-                    <a:lstStyle/>
-                    <a:p>
-                      <a:pPr algn="ctr"/>
-                      <a:r>
-                        <a:rPr lang="en-US"/>
-                        <a:t>Dimension 1 (cat)</a:t>
-                      </a:r>
-                    </a:p>
-                  </a:txBody>
-                  <a:tcPr anchor="ctr"/>
-                </a:tc>
-                <a:tc>
-                  <a:txBody>
-                    <a:bodyPr/>
-                    <a:lstStyle/>
-                    <a:p>
-                      <a:pPr algn="ctr"/>
-                      <a:r>
-                        <a:rPr lang="en-US"/>
-                        <a:t>Dimension 2 (dog)</a:t>
-                      </a:r>
-                    </a:p>
-                  </a:txBody>
-                  <a:tcPr anchor="ctr"/>
-                </a:tc>
-                <a:tc>
-                  <a:txBody>
-                    <a:bodyPr/>
-                    <a:lstStyle/>
-                    <a:p>
-                      <a:pPr algn="ctr"/>
-                      <a:r>
-                        <a:rPr lang="en-US"/>
-                        <a:t>Dimension 3 (fish)</a:t>
-                      </a:r>
-                    </a:p>
-                  </a:txBody>
-                  <a:tcPr anchor="ctr"/>
-                </a:tc>
-                <a:tc>
-                  <a:txBody>
-                    <a:bodyPr/>
-                    <a:lstStyle/>
-                    <a:p>
-                      <a:pPr algn="ctr"/>
-                      <a:r>
-                        <a:rPr lang="en-US"/>
-                        <a:t>Dimension 4 (bird)</a:t>
-                      </a:r>
-                    </a:p>
-                  </a:txBody>
-                  <a:tcPr anchor="ctr"/>
-                </a:tc>
-                <a:extLst>
-                  <a:ext uri="{0D108BD9-81ED-4DB2-BD59-A6C34878D82A}">
-                    <a16:rowId xmlns:a16="http://schemas.microsoft.com/office/drawing/2014/main" val="1967951625"/>
-                  </a:ext>
-                </a:extLst>
-              </a:tr>
-              <a:tr h="0">
-                <a:tc>
-                  <a:txBody>
-                    <a:bodyPr/>
-                    <a:lstStyle/>
-                    <a:p>
-                      <a:pPr algn="ctr"/>
-                      <a:r>
-                        <a:rPr lang="en-US" dirty="0"/>
-                        <a:t>cat</a:t>
-                      </a:r>
-                    </a:p>
-                  </a:txBody>
-                  <a:tcPr anchor="ctr"/>
-                </a:tc>
-                <a:tc>
-                  <a:txBody>
-                    <a:bodyPr/>
-                    <a:lstStyle/>
-                    <a:p>
-                      <a:pPr algn="ctr"/>
-                      <a:r>
-                        <a:rPr lang="en-US"/>
-                        <a:t>1</a:t>
-                      </a:r>
-                    </a:p>
-                  </a:txBody>
-                  <a:tcPr anchor="ctr"/>
-                </a:tc>
-                <a:tc>
-                  <a:txBody>
-                    <a:bodyPr/>
-                    <a:lstStyle/>
-                    <a:p>
-                      <a:pPr algn="ctr"/>
-                      <a:r>
-                        <a:rPr lang="en-US"/>
-                        <a:t>0</a:t>
-                      </a:r>
-                    </a:p>
-                  </a:txBody>
-                  <a:tcPr anchor="ctr"/>
-                </a:tc>
-                <a:tc>
-                  <a:txBody>
-                    <a:bodyPr/>
-                    <a:lstStyle/>
-                    <a:p>
-                      <a:pPr algn="ctr"/>
-                      <a:r>
-                        <a:rPr lang="en-US"/>
-                        <a:t>0</a:t>
-                      </a:r>
-                    </a:p>
-                  </a:txBody>
-                  <a:tcPr anchor="ctr"/>
-                </a:tc>
-                <a:tc>
-                  <a:txBody>
-                    <a:bodyPr/>
-                    <a:lstStyle/>
-                    <a:p>
-                      <a:pPr algn="ctr"/>
-                      <a:r>
-                        <a:rPr lang="en-US"/>
-                        <a:t>0</a:t>
-                      </a:r>
-                    </a:p>
-                  </a:txBody>
-                  <a:tcPr anchor="ctr"/>
-                </a:tc>
-                <a:extLst>
-                  <a:ext uri="{0D108BD9-81ED-4DB2-BD59-A6C34878D82A}">
-                    <a16:rowId xmlns:a16="http://schemas.microsoft.com/office/drawing/2014/main" val="3808267037"/>
-                  </a:ext>
-                </a:extLst>
-              </a:tr>
-              <a:tr h="0">
-                <a:tc>
-                  <a:txBody>
-                    <a:bodyPr/>
-                    <a:lstStyle/>
-                    <a:p>
-                      <a:pPr algn="ctr"/>
-                      <a:r>
-                        <a:rPr lang="en-US"/>
-                        <a:t>dog</a:t>
-                      </a:r>
-                    </a:p>
-                  </a:txBody>
-                  <a:tcPr anchor="ctr"/>
-                </a:tc>
-                <a:tc>
-                  <a:txBody>
-                    <a:bodyPr/>
-                    <a:lstStyle/>
-                    <a:p>
-                      <a:pPr algn="ctr"/>
-                      <a:r>
-                        <a:rPr lang="en-US"/>
-                        <a:t>0</a:t>
-                      </a:r>
-                    </a:p>
-                  </a:txBody>
-                  <a:tcPr anchor="ctr"/>
-                </a:tc>
-                <a:tc>
-                  <a:txBody>
-                    <a:bodyPr/>
-                    <a:lstStyle/>
-                    <a:p>
-                      <a:pPr algn="ctr"/>
-                      <a:r>
-                        <a:rPr lang="en-US"/>
-                        <a:t>1</a:t>
-                      </a:r>
-                    </a:p>
-                  </a:txBody>
-                  <a:tcPr anchor="ctr"/>
-                </a:tc>
-                <a:tc>
-                  <a:txBody>
-                    <a:bodyPr/>
-                    <a:lstStyle/>
-                    <a:p>
-                      <a:pPr algn="ctr"/>
-                      <a:r>
-                        <a:rPr lang="en-US"/>
-                        <a:t>0</a:t>
-                      </a:r>
-                    </a:p>
-                  </a:txBody>
-                  <a:tcPr anchor="ctr"/>
-                </a:tc>
-                <a:tc>
-                  <a:txBody>
-                    <a:bodyPr/>
-                    <a:lstStyle/>
-                    <a:p>
-                      <a:pPr algn="ctr"/>
-                      <a:r>
-                        <a:rPr lang="en-US"/>
-                        <a:t>0</a:t>
-                      </a:r>
-                    </a:p>
-                  </a:txBody>
-                  <a:tcPr anchor="ctr"/>
-                </a:tc>
-                <a:extLst>
-                  <a:ext uri="{0D108BD9-81ED-4DB2-BD59-A6C34878D82A}">
-                    <a16:rowId xmlns:a16="http://schemas.microsoft.com/office/drawing/2014/main" val="3594487148"/>
-                  </a:ext>
-                </a:extLst>
-              </a:tr>
-              <a:tr h="0">
-                <a:tc>
-                  <a:txBody>
-                    <a:bodyPr/>
-                    <a:lstStyle/>
-                    <a:p>
-                      <a:pPr algn="ctr"/>
-                      <a:r>
-                        <a:rPr lang="en-US"/>
-                        <a:t>fish</a:t>
-                      </a:r>
-                    </a:p>
-                  </a:txBody>
-                  <a:tcPr anchor="ctr"/>
-                </a:tc>
-                <a:tc>
-                  <a:txBody>
-                    <a:bodyPr/>
-                    <a:lstStyle/>
-                    <a:p>
-                      <a:pPr algn="ctr"/>
-                      <a:r>
-                        <a:rPr lang="en-US"/>
-                        <a:t>0</a:t>
-                      </a:r>
-                    </a:p>
-                  </a:txBody>
-                  <a:tcPr anchor="ctr"/>
-                </a:tc>
-                <a:tc>
-                  <a:txBody>
-                    <a:bodyPr/>
-                    <a:lstStyle/>
-                    <a:p>
-                      <a:pPr algn="ctr"/>
-                      <a:r>
-                        <a:rPr lang="en-US"/>
-                        <a:t>0</a:t>
-                      </a:r>
-                    </a:p>
-                  </a:txBody>
-                  <a:tcPr anchor="ctr"/>
-                </a:tc>
-                <a:tc>
-                  <a:txBody>
-                    <a:bodyPr/>
-                    <a:lstStyle/>
-                    <a:p>
-                      <a:pPr algn="ctr"/>
-                      <a:r>
-                        <a:rPr lang="en-US"/>
-                        <a:t>1</a:t>
-                      </a:r>
-                    </a:p>
-                  </a:txBody>
-                  <a:tcPr anchor="ctr"/>
-                </a:tc>
-                <a:tc>
-                  <a:txBody>
-                    <a:bodyPr/>
-                    <a:lstStyle/>
-                    <a:p>
-                      <a:pPr algn="ctr"/>
-                      <a:r>
-                        <a:rPr lang="en-US"/>
-                        <a:t>0</a:t>
-                      </a:r>
-                    </a:p>
-                  </a:txBody>
-                  <a:tcPr anchor="ctr"/>
-                </a:tc>
-                <a:extLst>
-                  <a:ext uri="{0D108BD9-81ED-4DB2-BD59-A6C34878D82A}">
-                    <a16:rowId xmlns:a16="http://schemas.microsoft.com/office/drawing/2014/main" val="642436981"/>
-                  </a:ext>
-                </a:extLst>
-              </a:tr>
-              <a:tr h="0">
-                <a:tc>
-                  <a:txBody>
-                    <a:bodyPr/>
-                    <a:lstStyle/>
-                    <a:p>
-                      <a:pPr algn="ctr"/>
-                      <a:r>
-                        <a:rPr lang="en-US"/>
-                        <a:t>bird</a:t>
-                      </a:r>
-                    </a:p>
-                  </a:txBody>
-                  <a:tcPr anchor="ctr"/>
-                </a:tc>
-                <a:tc>
-                  <a:txBody>
-                    <a:bodyPr/>
-                    <a:lstStyle/>
-                    <a:p>
-                      <a:pPr algn="ctr"/>
-                      <a:r>
-                        <a:rPr lang="en-US"/>
-                        <a:t>0</a:t>
-                      </a:r>
-                    </a:p>
-                  </a:txBody>
-                  <a:tcPr anchor="ctr"/>
-                </a:tc>
-                <a:tc>
-                  <a:txBody>
-                    <a:bodyPr/>
-                    <a:lstStyle/>
-                    <a:p>
-                      <a:pPr algn="ctr"/>
-                      <a:r>
-                        <a:rPr lang="en-US"/>
-                        <a:t>0</a:t>
-                      </a:r>
-                    </a:p>
-                  </a:txBody>
-                  <a:tcPr anchor="ctr"/>
-                </a:tc>
-                <a:tc>
-                  <a:txBody>
-                    <a:bodyPr/>
-                    <a:lstStyle/>
-                    <a:p>
-                      <a:pPr algn="ctr"/>
-                      <a:r>
-                        <a:rPr lang="en-US"/>
-                        <a:t>0</a:t>
-                      </a:r>
-                    </a:p>
-                  </a:txBody>
-                  <a:tcPr anchor="ctr"/>
-                </a:tc>
-                <a:tc>
-                  <a:txBody>
-                    <a:bodyPr/>
-                    <a:lstStyle/>
-                    <a:p>
-                      <a:pPr algn="ctr"/>
-                      <a:r>
-                        <a:rPr lang="en-US" dirty="0"/>
-                        <a:t>1</a:t>
-                      </a:r>
-                    </a:p>
-                  </a:txBody>
-                  <a:tcPr anchor="ctr"/>
-                </a:tc>
-                <a:extLst>
-                  <a:ext uri="{0D108BD9-81ED-4DB2-BD59-A6C34878D82A}">
-                    <a16:rowId xmlns:a16="http://schemas.microsoft.com/office/drawing/2014/main" val="2192422088"/>
-                  </a:ext>
-                </a:extLst>
-              </a:tr>
-            </a:tbl>
-          </a:graphicData>
-        </a:graphic>
-      </p:graphicFrame>
+          <p:cNvPicPr>
+            <a:picLocks noChangeAspect="1"/>
+          </p:cNvPicPr>
+          <p:nvPr/>
+        </p:nvPicPr>
+        <p:blipFill>
+          <a:blip r:embed="rId2"/>
+          <a:stretch>
+            <a:fillRect/>
+          </a:stretch>
+        </p:blipFill>
+        <p:spPr>
+          <a:xfrm>
+            <a:off x="6574806" y="1908299"/>
+            <a:ext cx="4778994" cy="4788747"/>
+          </a:xfrm>
+          <a:prstGeom prst="rect">
+            <a:avLst/>
+          </a:prstGeom>
+        </p:spPr>
+      </p:pic>
     </p:spTree>
     <p:extLst>
       <p:ext uri="{BB962C8B-B14F-4D97-AF65-F5344CB8AC3E}">
-        <p14:creationId xmlns:p14="http://schemas.microsoft.com/office/powerpoint/2010/main" val="928322667"/>
+        <p14:creationId xmlns:p14="http://schemas.microsoft.com/office/powerpoint/2010/main" val="48836864"/>
       </p:ext>
     </p:extLst>
   </p:cSld>
@@ -38482,6 +38612,614 @@
   <p:cSld>
     <p:spTree>
       <p:nvGrpSpPr>
+        <p:cNvPr id="1" name=""/>
+        <p:cNvGrpSpPr/>
+        <p:nvPr/>
+      </p:nvGrpSpPr>
+      <p:grpSpPr>
+        <a:xfrm>
+          <a:off x="0" y="0"/>
+          <a:ext cx="0" cy="0"/>
+          <a:chOff x="0" y="0"/>
+          <a:chExt cx="0" cy="0"/>
+        </a:xfrm>
+      </p:grpSpPr>
+      <p:sp>
+        <p:nvSpPr>
+          <p:cNvPr id="2" name="Title 1">
+            <a:extLst>
+              <a:ext uri="{FF2B5EF4-FFF2-40B4-BE49-F238E27FC236}">
+                <a16:creationId xmlns:a16="http://schemas.microsoft.com/office/drawing/2014/main" id="{51BB7355-8D6D-8485-0894-0AB532961579}"/>
+              </a:ext>
+            </a:extLst>
+          </p:cNvPr>
+          <p:cNvSpPr>
+            <a:spLocks noGrp="1"/>
+          </p:cNvSpPr>
+          <p:nvPr>
+            <p:ph type="title"/>
+          </p:nvPr>
+        </p:nvSpPr>
+        <p:spPr/>
+        <p:txBody>
+          <a:bodyPr>
+            <a:normAutofit/>
+          </a:bodyPr>
+          <a:lstStyle/>
+          <a:p>
+            <a:r>
+              <a:rPr lang="en-US" dirty="0"/>
+              <a:t>The Evolution of Word Representations</a:t>
+            </a:r>
+          </a:p>
+        </p:txBody>
+      </p:sp>
+      <p:sp>
+        <p:nvSpPr>
+          <p:cNvPr id="3" name="Content Placeholder 2">
+            <a:extLst>
+              <a:ext uri="{FF2B5EF4-FFF2-40B4-BE49-F238E27FC236}">
+                <a16:creationId xmlns:a16="http://schemas.microsoft.com/office/drawing/2014/main" id="{978D9617-84BF-81D4-C219-85A58FE307F3}"/>
+              </a:ext>
+            </a:extLst>
+          </p:cNvPr>
+          <p:cNvSpPr>
+            <a:spLocks noGrp="1"/>
+          </p:cNvSpPr>
+          <p:nvPr>
+            <p:ph idx="1"/>
+          </p:nvPr>
+        </p:nvSpPr>
+        <p:spPr/>
+        <p:txBody>
+          <a:bodyPr/>
+          <a:lstStyle/>
+          <a:p>
+            <a:pPr>
+              <a:buNone/>
+            </a:pPr>
+            <a:r>
+              <a:rPr lang="en-US" b="1" dirty="0"/>
+              <a:t>Traditional Methods (Pre-2013)</a:t>
+            </a:r>
+          </a:p>
+          <a:p>
+            <a:pPr>
+              <a:buFont typeface="Arial" panose="020B0604020202020204" pitchFamily="34" charset="0"/>
+              <a:buChar char="•"/>
+            </a:pPr>
+            <a:r>
+              <a:rPr lang="en-US" b="1" dirty="0"/>
+              <a:t>One-hot encoding</a:t>
+            </a:r>
+            <a:r>
+              <a:rPr lang="en-US" dirty="0"/>
+              <a:t>: Sparse, binary vectors (dimension = vocabulary size)</a:t>
+            </a:r>
+          </a:p>
+          <a:p>
+            <a:pPr>
+              <a:buFont typeface="Arial" panose="020B0604020202020204" pitchFamily="34" charset="0"/>
+              <a:buChar char="•"/>
+            </a:pPr>
+            <a:r>
+              <a:rPr lang="en-US" b="1" dirty="0"/>
+              <a:t>Limitations</a:t>
+            </a:r>
+            <a:r>
+              <a:rPr lang="en-US" dirty="0"/>
+              <a:t>: </a:t>
+            </a:r>
+          </a:p>
+          <a:p>
+            <a:pPr marL="742950" lvl="1" indent="-285750">
+              <a:buFont typeface="Arial" panose="020B0604020202020204" pitchFamily="34" charset="0"/>
+              <a:buChar char="•"/>
+            </a:pPr>
+            <a:r>
+              <a:rPr lang="en-US" dirty="0"/>
+              <a:t>No notion of similarity between words</a:t>
+            </a:r>
+          </a:p>
+          <a:p>
+            <a:pPr marL="742950" lvl="1" indent="-285750">
+              <a:buFont typeface="Arial" panose="020B0604020202020204" pitchFamily="34" charset="0"/>
+              <a:buChar char="•"/>
+            </a:pPr>
+            <a:r>
+              <a:rPr lang="en-US" dirty="0"/>
+              <a:t>Curse of dimensionality</a:t>
+            </a:r>
+          </a:p>
+          <a:p>
+            <a:pPr marL="742950" lvl="1" indent="-285750">
+              <a:buFont typeface="Arial" panose="020B0604020202020204" pitchFamily="34" charset="0"/>
+              <a:buChar char="•"/>
+            </a:pPr>
+            <a:r>
+              <a:rPr lang="en-US" dirty="0"/>
+              <a:t>No semantic information captured</a:t>
+            </a:r>
+          </a:p>
+          <a:p>
+            <a:endParaRPr lang="en-US" dirty="0"/>
+          </a:p>
+        </p:txBody>
+      </p:sp>
+      <p:graphicFrame>
+        <p:nvGraphicFramePr>
+          <p:cNvPr id="4" name="Content Placeholder 3">
+            <a:extLst>
+              <a:ext uri="{FF2B5EF4-FFF2-40B4-BE49-F238E27FC236}">
+                <a16:creationId xmlns:a16="http://schemas.microsoft.com/office/drawing/2014/main" id="{E227B7C6-2CDC-88BB-C41D-BC7307D9374E}"/>
+              </a:ext>
+            </a:extLst>
+          </p:cNvPr>
+          <p:cNvGraphicFramePr>
+            <a:graphicFrameLocks/>
+          </p:cNvGraphicFramePr>
+          <p:nvPr>
+            <p:extLst>
+              <p:ext uri="{D42A27DB-BD31-4B8C-83A1-F6EECF244321}">
+                <p14:modId xmlns:p14="http://schemas.microsoft.com/office/powerpoint/2010/main" val="2514166198"/>
+              </p:ext>
+            </p:extLst>
+          </p:nvPr>
+        </p:nvGraphicFramePr>
+        <p:xfrm>
+          <a:off x="553994" y="4511032"/>
+          <a:ext cx="10515600" cy="1828800"/>
+        </p:xfrm>
+        <a:graphic>
+          <a:graphicData uri="http://schemas.openxmlformats.org/drawingml/2006/table">
+            <a:tbl>
+              <a:tblPr>
+                <a:tableStyleId>{616DA210-FB5B-4158-B5E0-FEB733F419BA}</a:tableStyleId>
+              </a:tblPr>
+              <a:tblGrid>
+                <a:gridCol w="2103120">
+                  <a:extLst>
+                    <a:ext uri="{9D8B030D-6E8A-4147-A177-3AD203B41FA5}">
+                      <a16:colId xmlns:a16="http://schemas.microsoft.com/office/drawing/2014/main" val="3090422750"/>
+                    </a:ext>
+                  </a:extLst>
+                </a:gridCol>
+                <a:gridCol w="2103120">
+                  <a:extLst>
+                    <a:ext uri="{9D8B030D-6E8A-4147-A177-3AD203B41FA5}">
+                      <a16:colId xmlns:a16="http://schemas.microsoft.com/office/drawing/2014/main" val="2090717841"/>
+                    </a:ext>
+                  </a:extLst>
+                </a:gridCol>
+                <a:gridCol w="2103120">
+                  <a:extLst>
+                    <a:ext uri="{9D8B030D-6E8A-4147-A177-3AD203B41FA5}">
+                      <a16:colId xmlns:a16="http://schemas.microsoft.com/office/drawing/2014/main" val="2254856482"/>
+                    </a:ext>
+                  </a:extLst>
+                </a:gridCol>
+                <a:gridCol w="2103120">
+                  <a:extLst>
+                    <a:ext uri="{9D8B030D-6E8A-4147-A177-3AD203B41FA5}">
+                      <a16:colId xmlns:a16="http://schemas.microsoft.com/office/drawing/2014/main" val="1422357000"/>
+                    </a:ext>
+                  </a:extLst>
+                </a:gridCol>
+                <a:gridCol w="2103120">
+                  <a:extLst>
+                    <a:ext uri="{9D8B030D-6E8A-4147-A177-3AD203B41FA5}">
+                      <a16:colId xmlns:a16="http://schemas.microsoft.com/office/drawing/2014/main" val="3260370378"/>
+                    </a:ext>
+                  </a:extLst>
+                </a:gridCol>
+              </a:tblGrid>
+              <a:tr h="0">
+                <a:tc>
+                  <a:txBody>
+                    <a:bodyPr/>
+                    <a:lstStyle/>
+                    <a:p>
+                      <a:pPr algn="ctr"/>
+                      <a:r>
+                        <a:rPr lang="en-US"/>
+                        <a:t>Word</a:t>
+                      </a:r>
+                    </a:p>
+                  </a:txBody>
+                  <a:tcPr anchor="ctr"/>
+                </a:tc>
+                <a:tc>
+                  <a:txBody>
+                    <a:bodyPr/>
+                    <a:lstStyle/>
+                    <a:p>
+                      <a:pPr algn="ctr"/>
+                      <a:r>
+                        <a:rPr lang="en-US"/>
+                        <a:t>Dimension 1 (cat)</a:t>
+                      </a:r>
+                    </a:p>
+                  </a:txBody>
+                  <a:tcPr anchor="ctr"/>
+                </a:tc>
+                <a:tc>
+                  <a:txBody>
+                    <a:bodyPr/>
+                    <a:lstStyle/>
+                    <a:p>
+                      <a:pPr algn="ctr"/>
+                      <a:r>
+                        <a:rPr lang="en-US"/>
+                        <a:t>Dimension 2 (dog)</a:t>
+                      </a:r>
+                    </a:p>
+                  </a:txBody>
+                  <a:tcPr anchor="ctr"/>
+                </a:tc>
+                <a:tc>
+                  <a:txBody>
+                    <a:bodyPr/>
+                    <a:lstStyle/>
+                    <a:p>
+                      <a:pPr algn="ctr"/>
+                      <a:r>
+                        <a:rPr lang="en-US"/>
+                        <a:t>Dimension 3 (fish)</a:t>
+                      </a:r>
+                    </a:p>
+                  </a:txBody>
+                  <a:tcPr anchor="ctr"/>
+                </a:tc>
+                <a:tc>
+                  <a:txBody>
+                    <a:bodyPr/>
+                    <a:lstStyle/>
+                    <a:p>
+                      <a:pPr algn="ctr"/>
+                      <a:r>
+                        <a:rPr lang="en-US"/>
+                        <a:t>Dimension 4 (bird)</a:t>
+                      </a:r>
+                    </a:p>
+                  </a:txBody>
+                  <a:tcPr anchor="ctr"/>
+                </a:tc>
+                <a:extLst>
+                  <a:ext uri="{0D108BD9-81ED-4DB2-BD59-A6C34878D82A}">
+                    <a16:rowId xmlns:a16="http://schemas.microsoft.com/office/drawing/2014/main" val="1967951625"/>
+                  </a:ext>
+                </a:extLst>
+              </a:tr>
+              <a:tr h="0">
+                <a:tc>
+                  <a:txBody>
+                    <a:bodyPr/>
+                    <a:lstStyle/>
+                    <a:p>
+                      <a:pPr algn="ctr"/>
+                      <a:r>
+                        <a:rPr lang="en-US" dirty="0"/>
+                        <a:t>cat</a:t>
+                      </a:r>
+                    </a:p>
+                  </a:txBody>
+                  <a:tcPr anchor="ctr"/>
+                </a:tc>
+                <a:tc>
+                  <a:txBody>
+                    <a:bodyPr/>
+                    <a:lstStyle/>
+                    <a:p>
+                      <a:pPr algn="ctr"/>
+                      <a:r>
+                        <a:rPr lang="en-US"/>
+                        <a:t>1</a:t>
+                      </a:r>
+                    </a:p>
+                  </a:txBody>
+                  <a:tcPr anchor="ctr"/>
+                </a:tc>
+                <a:tc>
+                  <a:txBody>
+                    <a:bodyPr/>
+                    <a:lstStyle/>
+                    <a:p>
+                      <a:pPr algn="ctr"/>
+                      <a:r>
+                        <a:rPr lang="en-US"/>
+                        <a:t>0</a:t>
+                      </a:r>
+                    </a:p>
+                  </a:txBody>
+                  <a:tcPr anchor="ctr"/>
+                </a:tc>
+                <a:tc>
+                  <a:txBody>
+                    <a:bodyPr/>
+                    <a:lstStyle/>
+                    <a:p>
+                      <a:pPr algn="ctr"/>
+                      <a:r>
+                        <a:rPr lang="en-US"/>
+                        <a:t>0</a:t>
+                      </a:r>
+                    </a:p>
+                  </a:txBody>
+                  <a:tcPr anchor="ctr"/>
+                </a:tc>
+                <a:tc>
+                  <a:txBody>
+                    <a:bodyPr/>
+                    <a:lstStyle/>
+                    <a:p>
+                      <a:pPr algn="ctr"/>
+                      <a:r>
+                        <a:rPr lang="en-US"/>
+                        <a:t>0</a:t>
+                      </a:r>
+                    </a:p>
+                  </a:txBody>
+                  <a:tcPr anchor="ctr"/>
+                </a:tc>
+                <a:extLst>
+                  <a:ext uri="{0D108BD9-81ED-4DB2-BD59-A6C34878D82A}">
+                    <a16:rowId xmlns:a16="http://schemas.microsoft.com/office/drawing/2014/main" val="3808267037"/>
+                  </a:ext>
+                </a:extLst>
+              </a:tr>
+              <a:tr h="0">
+                <a:tc>
+                  <a:txBody>
+                    <a:bodyPr/>
+                    <a:lstStyle/>
+                    <a:p>
+                      <a:pPr algn="ctr"/>
+                      <a:r>
+                        <a:rPr lang="en-US"/>
+                        <a:t>dog</a:t>
+                      </a:r>
+                    </a:p>
+                  </a:txBody>
+                  <a:tcPr anchor="ctr"/>
+                </a:tc>
+                <a:tc>
+                  <a:txBody>
+                    <a:bodyPr/>
+                    <a:lstStyle/>
+                    <a:p>
+                      <a:pPr algn="ctr"/>
+                      <a:r>
+                        <a:rPr lang="en-US"/>
+                        <a:t>0</a:t>
+                      </a:r>
+                    </a:p>
+                  </a:txBody>
+                  <a:tcPr anchor="ctr"/>
+                </a:tc>
+                <a:tc>
+                  <a:txBody>
+                    <a:bodyPr/>
+                    <a:lstStyle/>
+                    <a:p>
+                      <a:pPr algn="ctr"/>
+                      <a:r>
+                        <a:rPr lang="en-US"/>
+                        <a:t>1</a:t>
+                      </a:r>
+                    </a:p>
+                  </a:txBody>
+                  <a:tcPr anchor="ctr"/>
+                </a:tc>
+                <a:tc>
+                  <a:txBody>
+                    <a:bodyPr/>
+                    <a:lstStyle/>
+                    <a:p>
+                      <a:pPr algn="ctr"/>
+                      <a:r>
+                        <a:rPr lang="en-US"/>
+                        <a:t>0</a:t>
+                      </a:r>
+                    </a:p>
+                  </a:txBody>
+                  <a:tcPr anchor="ctr"/>
+                </a:tc>
+                <a:tc>
+                  <a:txBody>
+                    <a:bodyPr/>
+                    <a:lstStyle/>
+                    <a:p>
+                      <a:pPr algn="ctr"/>
+                      <a:r>
+                        <a:rPr lang="en-US"/>
+                        <a:t>0</a:t>
+                      </a:r>
+                    </a:p>
+                  </a:txBody>
+                  <a:tcPr anchor="ctr"/>
+                </a:tc>
+                <a:extLst>
+                  <a:ext uri="{0D108BD9-81ED-4DB2-BD59-A6C34878D82A}">
+                    <a16:rowId xmlns:a16="http://schemas.microsoft.com/office/drawing/2014/main" val="3594487148"/>
+                  </a:ext>
+                </a:extLst>
+              </a:tr>
+              <a:tr h="0">
+                <a:tc>
+                  <a:txBody>
+                    <a:bodyPr/>
+                    <a:lstStyle/>
+                    <a:p>
+                      <a:pPr algn="ctr"/>
+                      <a:r>
+                        <a:rPr lang="en-US"/>
+                        <a:t>fish</a:t>
+                      </a:r>
+                    </a:p>
+                  </a:txBody>
+                  <a:tcPr anchor="ctr"/>
+                </a:tc>
+                <a:tc>
+                  <a:txBody>
+                    <a:bodyPr/>
+                    <a:lstStyle/>
+                    <a:p>
+                      <a:pPr algn="ctr"/>
+                      <a:r>
+                        <a:rPr lang="en-US"/>
+                        <a:t>0</a:t>
+                      </a:r>
+                    </a:p>
+                  </a:txBody>
+                  <a:tcPr anchor="ctr"/>
+                </a:tc>
+                <a:tc>
+                  <a:txBody>
+                    <a:bodyPr/>
+                    <a:lstStyle/>
+                    <a:p>
+                      <a:pPr algn="ctr"/>
+                      <a:r>
+                        <a:rPr lang="en-US"/>
+                        <a:t>0</a:t>
+                      </a:r>
+                    </a:p>
+                  </a:txBody>
+                  <a:tcPr anchor="ctr"/>
+                </a:tc>
+                <a:tc>
+                  <a:txBody>
+                    <a:bodyPr/>
+                    <a:lstStyle/>
+                    <a:p>
+                      <a:pPr algn="ctr"/>
+                      <a:r>
+                        <a:rPr lang="en-US"/>
+                        <a:t>1</a:t>
+                      </a:r>
+                    </a:p>
+                  </a:txBody>
+                  <a:tcPr anchor="ctr"/>
+                </a:tc>
+                <a:tc>
+                  <a:txBody>
+                    <a:bodyPr/>
+                    <a:lstStyle/>
+                    <a:p>
+                      <a:pPr algn="ctr"/>
+                      <a:r>
+                        <a:rPr lang="en-US"/>
+                        <a:t>0</a:t>
+                      </a:r>
+                    </a:p>
+                  </a:txBody>
+                  <a:tcPr anchor="ctr"/>
+                </a:tc>
+                <a:extLst>
+                  <a:ext uri="{0D108BD9-81ED-4DB2-BD59-A6C34878D82A}">
+                    <a16:rowId xmlns:a16="http://schemas.microsoft.com/office/drawing/2014/main" val="642436981"/>
+                  </a:ext>
+                </a:extLst>
+              </a:tr>
+              <a:tr h="0">
+                <a:tc>
+                  <a:txBody>
+                    <a:bodyPr/>
+                    <a:lstStyle/>
+                    <a:p>
+                      <a:pPr algn="ctr"/>
+                      <a:r>
+                        <a:rPr lang="en-US"/>
+                        <a:t>bird</a:t>
+                      </a:r>
+                    </a:p>
+                  </a:txBody>
+                  <a:tcPr anchor="ctr"/>
+                </a:tc>
+                <a:tc>
+                  <a:txBody>
+                    <a:bodyPr/>
+                    <a:lstStyle/>
+                    <a:p>
+                      <a:pPr algn="ctr"/>
+                      <a:r>
+                        <a:rPr lang="en-US"/>
+                        <a:t>0</a:t>
+                      </a:r>
+                    </a:p>
+                  </a:txBody>
+                  <a:tcPr anchor="ctr"/>
+                </a:tc>
+                <a:tc>
+                  <a:txBody>
+                    <a:bodyPr/>
+                    <a:lstStyle/>
+                    <a:p>
+                      <a:pPr algn="ctr"/>
+                      <a:r>
+                        <a:rPr lang="en-US"/>
+                        <a:t>0</a:t>
+                      </a:r>
+                    </a:p>
+                  </a:txBody>
+                  <a:tcPr anchor="ctr"/>
+                </a:tc>
+                <a:tc>
+                  <a:txBody>
+                    <a:bodyPr/>
+                    <a:lstStyle/>
+                    <a:p>
+                      <a:pPr algn="ctr"/>
+                      <a:r>
+                        <a:rPr lang="en-US"/>
+                        <a:t>0</a:t>
+                      </a:r>
+                    </a:p>
+                  </a:txBody>
+                  <a:tcPr anchor="ctr"/>
+                </a:tc>
+                <a:tc>
+                  <a:txBody>
+                    <a:bodyPr/>
+                    <a:lstStyle/>
+                    <a:p>
+                      <a:pPr algn="ctr"/>
+                      <a:r>
+                        <a:rPr lang="en-US" dirty="0"/>
+                        <a:t>1</a:t>
+                      </a:r>
+                    </a:p>
+                  </a:txBody>
+                  <a:tcPr anchor="ctr"/>
+                </a:tc>
+                <a:extLst>
+                  <a:ext uri="{0D108BD9-81ED-4DB2-BD59-A6C34878D82A}">
+                    <a16:rowId xmlns:a16="http://schemas.microsoft.com/office/drawing/2014/main" val="2192422088"/>
+                  </a:ext>
+                </a:extLst>
+              </a:tr>
+            </a:tbl>
+          </a:graphicData>
+        </a:graphic>
+      </p:graphicFrame>
+    </p:spTree>
+    <p:extLst>
+      <p:ext uri="{BB962C8B-B14F-4D97-AF65-F5344CB8AC3E}">
+        <p14:creationId xmlns:p14="http://schemas.microsoft.com/office/powerpoint/2010/main" val="928322667"/>
+      </p:ext>
+    </p:extLst>
+  </p:cSld>
+  <p:clrMapOvr>
+    <a:masterClrMapping/>
+  </p:clrMapOvr>
+</p:sld>
+</file>
+
+<file path=ppt/slides/slide5.xml><?xml version="1.0" encoding="utf-8"?>
+<p:sld xmlns:a="http://schemas.openxmlformats.org/drawingml/2006/main" xmlns:r="http://schemas.openxmlformats.org/officeDocument/2006/relationships" xmlns:p="http://schemas.openxmlformats.org/presentationml/2006/main">
+  <p:cSld>
+    <p:spTree>
+      <p:nvGrpSpPr>
         <p:cNvPr id="1" name="">
           <a:extLst>
             <a:ext uri="{FF2B5EF4-FFF2-40B4-BE49-F238E27FC236}">
@@ -39296,7 +40034,7 @@
 </p:sld>
 </file>
 
-<file path=ppt/slides/slide5.xml><?xml version="1.0" encoding="utf-8"?>
+<file path=ppt/slides/slide6.xml><?xml version="1.0" encoding="utf-8"?>
 <p:sld xmlns:a="http://schemas.openxmlformats.org/drawingml/2006/main" xmlns:r="http://schemas.openxmlformats.org/officeDocument/2006/relationships" xmlns:p="http://schemas.openxmlformats.org/presentationml/2006/main">
   <p:cSld>
     <p:spTree>
@@ -39594,7 +40332,7 @@
 </p:sld>
 </file>
 
-<file path=ppt/slides/slide6.xml><?xml version="1.0" encoding="utf-8"?>
+<file path=ppt/slides/slide7.xml><?xml version="1.0" encoding="utf-8"?>
 <p:sld xmlns:a="http://schemas.openxmlformats.org/drawingml/2006/main" xmlns:r="http://schemas.openxmlformats.org/officeDocument/2006/relationships" xmlns:p="http://schemas.openxmlformats.org/presentationml/2006/main">
   <p:cSld>
     <p:spTree>
@@ -39616,7 +40354,7 @@
           <p:cNvPr id="2" name="Title 1">
             <a:extLst>
               <a:ext uri="{FF2B5EF4-FFF2-40B4-BE49-F238E27FC236}">
-                <a16:creationId xmlns:a16="http://schemas.microsoft.com/office/drawing/2014/main" id="{8C9E7C8C-DC49-DED4-C444-A99FF140FB61}"/>
+                <a16:creationId xmlns:a16="http://schemas.microsoft.com/office/drawing/2014/main" id="{0B95EC20-6796-6447-BBF2-D090BB79FCD7}"/>
               </a:ext>
             </a:extLst>
           </p:cNvPr>
@@ -39632,7 +40370,7 @@
           <a:bodyPr/>
           <a:lstStyle/>
           <a:p>
-            <a:endParaRPr lang="en-US"/>
+            <a:endParaRPr lang="en-US" dirty="0"/>
           </a:p>
         </p:txBody>
       </p:sp>
@@ -39641,7 +40379,7 @@
           <p:cNvPr id="3" name="Content Placeholder 2">
             <a:extLst>
               <a:ext uri="{FF2B5EF4-FFF2-40B4-BE49-F238E27FC236}">
-                <a16:creationId xmlns:a16="http://schemas.microsoft.com/office/drawing/2014/main" id="{D4586A0B-3C3C-CE61-6FE2-FBE78CD3EEBA}"/>
+                <a16:creationId xmlns:a16="http://schemas.microsoft.com/office/drawing/2014/main" id="{F03A864D-27D6-2882-82A2-FC76937F57AC}"/>
               </a:ext>
             </a:extLst>
           </p:cNvPr>
@@ -39654,187 +40392,1161 @@
         </p:nvSpPr>
         <p:spPr/>
         <p:txBody>
-          <a:bodyPr/>
+          <a:bodyPr>
+            <a:normAutofit fontScale="92500"/>
+          </a:bodyPr>
           <a:lstStyle/>
           <a:p>
             <a:pPr marL="0" indent="0">
+              <a:lnSpc>
+                <a:spcPct val="120000"/>
+              </a:lnSpc>
+              <a:spcBef>
+                <a:spcPts val="0"/>
+              </a:spcBef>
               <a:buNone/>
             </a:pPr>
             <a:r>
-              <a:rPr lang="en-US" dirty="0"/>
-              <a:t>from </a:t>
-            </a:r>
-            <a:r>
-              <a:rPr lang="en-US" dirty="0" err="1"/>
-              <a:t>nltk.tokenize</a:t>
-            </a:r>
-            <a:r>
-              <a:rPr lang="en-US" dirty="0"/>
-              <a:t> import </a:t>
-            </a:r>
-            <a:r>
-              <a:rPr lang="en-US" dirty="0" err="1"/>
-              <a:t>word_tokenize</a:t>
-            </a:r>
-            <a:endParaRPr lang="en-US" dirty="0"/>
+              <a:rPr lang="en-US" sz="700" dirty="0">
+                <a:ea typeface="+mn-lt"/>
+                <a:cs typeface="+mn-lt"/>
+              </a:rPr>
+              <a:t>import </a:t>
+            </a:r>
+            <a:r>
+              <a:rPr lang="en-US" sz="700" dirty="0" err="1">
+                <a:ea typeface="+mn-lt"/>
+                <a:cs typeface="+mn-lt"/>
+              </a:rPr>
+              <a:t>gensim</a:t>
+            </a:r>
+            <a:endParaRPr lang="en-US" sz="700" dirty="0">
+              <a:ea typeface="+mn-lt"/>
+              <a:cs typeface="+mn-lt"/>
+            </a:endParaRPr>
           </a:p>
           <a:p>
             <a:pPr marL="0" indent="0">
+              <a:lnSpc>
+                <a:spcPct val="120000"/>
+              </a:lnSpc>
+              <a:spcBef>
+                <a:spcPts val="0"/>
+              </a:spcBef>
               <a:buNone/>
             </a:pPr>
             <a:r>
-              <a:rPr lang="en-US" dirty="0" err="1"/>
-              <a:t>nltk.download</a:t>
-            </a:r>
-            <a:r>
-              <a:rPr lang="en-US" dirty="0"/>
-              <a:t>('</a:t>
-            </a:r>
-            <a:r>
-              <a:rPr lang="en-US" dirty="0" err="1"/>
-              <a:t>punkt</a:t>
-            </a:r>
-            <a:r>
-              <a:rPr lang="en-US" dirty="0"/>
-              <a:t>') #punkt is a pretrained tokenization model used for splitting text into sentences and words.</a:t>
+              <a:rPr lang="en-US" sz="700" dirty="0">
+                <a:ea typeface="+mn-lt"/>
+                <a:cs typeface="+mn-lt"/>
+              </a:rPr>
+              <a:t>from </a:t>
+            </a:r>
+            <a:r>
+              <a:rPr lang="en-US" sz="700" dirty="0" err="1">
+                <a:ea typeface="+mn-lt"/>
+                <a:cs typeface="+mn-lt"/>
+              </a:rPr>
+              <a:t>gensim.models</a:t>
+            </a:r>
+            <a:r>
+              <a:rPr lang="en-US" sz="700" dirty="0">
+                <a:ea typeface="+mn-lt"/>
+                <a:cs typeface="+mn-lt"/>
+              </a:rPr>
+              <a:t> import Word2Vec</a:t>
             </a:r>
           </a:p>
           <a:p>
             <a:pPr marL="0" indent="0">
+              <a:lnSpc>
+                <a:spcPct val="120000"/>
+              </a:lnSpc>
+              <a:spcBef>
+                <a:spcPts val="0"/>
+              </a:spcBef>
               <a:buNone/>
             </a:pPr>
             <a:r>
-              <a:rPr lang="en-US" dirty="0"/>
-              <a:t>sentence = "Large language models are revolutionizing business applications."</a:t>
-            </a:r>
+              <a:rPr lang="en-US" sz="700" dirty="0">
+                <a:ea typeface="+mn-lt"/>
+                <a:cs typeface="+mn-lt"/>
+              </a:rPr>
+              <a:t>import </a:t>
+            </a:r>
+            <a:r>
+              <a:rPr lang="en-US" sz="700" dirty="0" err="1">
+                <a:ea typeface="+mn-lt"/>
+                <a:cs typeface="+mn-lt"/>
+              </a:rPr>
+              <a:t>nltk</a:t>
+            </a:r>
+            <a:endParaRPr lang="en-US" sz="700" dirty="0">
+              <a:ea typeface="+mn-lt"/>
+              <a:cs typeface="+mn-lt"/>
+            </a:endParaRPr>
           </a:p>
           <a:p>
             <a:pPr marL="0" indent="0">
+              <a:lnSpc>
+                <a:spcPct val="120000"/>
+              </a:lnSpc>
+              <a:spcBef>
+                <a:spcPts val="0"/>
+              </a:spcBef>
               <a:buNone/>
             </a:pPr>
             <a:r>
-              <a:rPr lang="en-US" dirty="0"/>
-              <a:t>tokens = </a:t>
-            </a:r>
-            <a:r>
-              <a:rPr lang="en-US" dirty="0" err="1"/>
+              <a:rPr lang="en-US" sz="700" dirty="0">
+                <a:ea typeface="+mn-lt"/>
+                <a:cs typeface="+mn-lt"/>
+              </a:rPr>
+              <a:t>from </a:t>
+            </a:r>
+            <a:r>
+              <a:rPr lang="en-US" sz="700" dirty="0" err="1">
+                <a:ea typeface="+mn-lt"/>
+                <a:cs typeface="+mn-lt"/>
+              </a:rPr>
+              <a:t>nltk.tokenize</a:t>
+            </a:r>
+            <a:r>
+              <a:rPr lang="en-US" sz="700" dirty="0">
+                <a:ea typeface="+mn-lt"/>
+                <a:cs typeface="+mn-lt"/>
+              </a:rPr>
+              <a:t> import </a:t>
+            </a:r>
+            <a:r>
+              <a:rPr lang="en-US" sz="700" dirty="0" err="1">
+                <a:ea typeface="+mn-lt"/>
+                <a:cs typeface="+mn-lt"/>
+              </a:rPr>
               <a:t>word_tokenize</a:t>
             </a:r>
-            <a:r>
-              <a:rPr lang="en-US" dirty="0"/>
-              <a:t>(sentence)</a:t>
-            </a:r>
+            <a:endParaRPr lang="en-US" sz="700" dirty="0">
+              <a:ea typeface="+mn-lt"/>
+              <a:cs typeface="+mn-lt"/>
+            </a:endParaRPr>
           </a:p>
           <a:p>
             <a:pPr marL="0" indent="0">
+              <a:lnSpc>
+                <a:spcPct val="120000"/>
+              </a:lnSpc>
+              <a:spcBef>
+                <a:spcPts val="0"/>
+              </a:spcBef>
               <a:buNone/>
             </a:pPr>
             <a:r>
-              <a:rPr lang="en-US" dirty="0"/>
-              <a:t>print(tokens)</a:t>
+              <a:rPr lang="en-US" sz="700" dirty="0" err="1">
+                <a:ea typeface="+mn-lt"/>
+                <a:cs typeface="+mn-lt"/>
+              </a:rPr>
+              <a:t>nltk.download</a:t>
+            </a:r>
+            <a:r>
+              <a:rPr lang="en-US" sz="700" dirty="0">
+                <a:ea typeface="+mn-lt"/>
+                <a:cs typeface="+mn-lt"/>
+              </a:rPr>
+              <a:t>('</a:t>
+            </a:r>
+            <a:r>
+              <a:rPr lang="en-US" sz="700" dirty="0" err="1">
+                <a:ea typeface="+mn-lt"/>
+                <a:cs typeface="+mn-lt"/>
+              </a:rPr>
+              <a:t>punkt</a:t>
+            </a:r>
+            <a:r>
+              <a:rPr lang="en-US" sz="700" dirty="0">
+                <a:ea typeface="+mn-lt"/>
+                <a:cs typeface="+mn-lt"/>
+              </a:rPr>
+              <a:t>')</a:t>
             </a:r>
           </a:p>
           <a:p>
             <a:pPr marL="0" indent="0">
+              <a:lnSpc>
+                <a:spcPct val="120000"/>
+              </a:lnSpc>
+              <a:spcBef>
+                <a:spcPts val="0"/>
+              </a:spcBef>
               <a:buNone/>
             </a:pPr>
             <a:r>
-              <a:rPr lang="en-US" dirty="0"/>
-              <a:t># Output: ['Large', 'language', 'models', 'are', 'revolutionizing', 'business', 'applications', '.']</a:t>
-            </a:r>
+              <a:rPr lang="en-US" sz="700" dirty="0">
+                <a:ea typeface="+mn-lt"/>
+                <a:cs typeface="+mn-lt"/>
+              </a:rPr>
+              <a:t> # Sample corpus</a:t>
+            </a:r>
+          </a:p>
+          <a:p>
+            <a:pPr marL="0" indent="0">
+              <a:lnSpc>
+                <a:spcPct val="120000"/>
+              </a:lnSpc>
+              <a:spcBef>
+                <a:spcPts val="0"/>
+              </a:spcBef>
+              <a:buNone/>
+            </a:pPr>
+            <a:r>
+              <a:rPr lang="en-US" sz="700" dirty="0">
+                <a:ea typeface="+mn-lt"/>
+                <a:cs typeface="+mn-lt"/>
+              </a:rPr>
+              <a:t>sentences = [</a:t>
+            </a:r>
+          </a:p>
+          <a:p>
+            <a:pPr marL="0" indent="0">
+              <a:lnSpc>
+                <a:spcPct val="120000"/>
+              </a:lnSpc>
+              <a:spcBef>
+                <a:spcPts val="0"/>
+              </a:spcBef>
+              <a:buNone/>
+            </a:pPr>
+            <a:r>
+              <a:rPr lang="en-US" sz="700" dirty="0">
+                <a:ea typeface="+mn-lt"/>
+                <a:cs typeface="+mn-lt"/>
+              </a:rPr>
+              <a:t>    "Large language models are transforming business applications",</a:t>
+            </a:r>
+          </a:p>
+          <a:p>
+            <a:pPr marL="0" indent="0">
+              <a:lnSpc>
+                <a:spcPct val="120000"/>
+              </a:lnSpc>
+              <a:spcBef>
+                <a:spcPts val="0"/>
+              </a:spcBef>
+              <a:buNone/>
+            </a:pPr>
+            <a:r>
+              <a:rPr lang="en-US" sz="700" dirty="0">
+                <a:ea typeface="+mn-lt"/>
+                <a:cs typeface="+mn-lt"/>
+              </a:rPr>
+              <a:t>    "Natural language processing helps computers understand human language",</a:t>
+            </a:r>
+          </a:p>
+          <a:p>
+            <a:pPr marL="0" indent="0">
+              <a:lnSpc>
+                <a:spcPct val="120000"/>
+              </a:lnSpc>
+              <a:spcBef>
+                <a:spcPts val="0"/>
+              </a:spcBef>
+              <a:buNone/>
+            </a:pPr>
+            <a:r>
+              <a:rPr lang="en-US" sz="700" dirty="0">
+                <a:ea typeface="+mn-lt"/>
+                <a:cs typeface="+mn-lt"/>
+              </a:rPr>
+              <a:t>    "Word embeddings capture semantic relationships between words",</a:t>
+            </a:r>
+          </a:p>
+          <a:p>
+            <a:pPr marL="0" indent="0">
+              <a:lnSpc>
+                <a:spcPct val="120000"/>
+              </a:lnSpc>
+              <a:spcBef>
+                <a:spcPts val="0"/>
+              </a:spcBef>
+              <a:buNone/>
+            </a:pPr>
+            <a:r>
+              <a:rPr lang="en-US" sz="700" dirty="0">
+                <a:ea typeface="+mn-lt"/>
+                <a:cs typeface="+mn-lt"/>
+              </a:rPr>
+              <a:t>    "Neural networks learn distributed representations of words",</a:t>
+            </a:r>
+          </a:p>
+          <a:p>
+            <a:pPr marL="0" indent="0">
+              <a:lnSpc>
+                <a:spcPct val="120000"/>
+              </a:lnSpc>
+              <a:spcBef>
+                <a:spcPts val="0"/>
+              </a:spcBef>
+              <a:buNone/>
+            </a:pPr>
+            <a:r>
+              <a:rPr lang="en-US" sz="700" dirty="0">
+                <a:ea typeface="+mn-lt"/>
+                <a:cs typeface="+mn-lt"/>
+              </a:rPr>
+              <a:t>    "Businesses use language models for various applications",</a:t>
+            </a:r>
+          </a:p>
+          <a:p>
+            <a:pPr marL="0" indent="0">
+              <a:lnSpc>
+                <a:spcPct val="120000"/>
+              </a:lnSpc>
+              <a:spcBef>
+                <a:spcPts val="0"/>
+              </a:spcBef>
+              <a:buNone/>
+            </a:pPr>
+            <a:r>
+              <a:rPr lang="en-US" sz="700" dirty="0">
+                <a:ea typeface="+mn-lt"/>
+                <a:cs typeface="+mn-lt"/>
+              </a:rPr>
+              <a:t>    "Customer service can be improved with language technology",</a:t>
+            </a:r>
+          </a:p>
+          <a:p>
+            <a:pPr marL="0" indent="0">
+              <a:lnSpc>
+                <a:spcPct val="120000"/>
+              </a:lnSpc>
+              <a:spcBef>
+                <a:spcPts val="0"/>
+              </a:spcBef>
+              <a:buNone/>
+            </a:pPr>
+            <a:r>
+              <a:rPr lang="en-US" sz="700" dirty="0">
+                <a:ea typeface="+mn-lt"/>
+                <a:cs typeface="+mn-lt"/>
+              </a:rPr>
+              <a:t>    "Modern language models require significant computing resources",</a:t>
+            </a:r>
+          </a:p>
+          <a:p>
+            <a:pPr marL="0" indent="0">
+              <a:lnSpc>
+                <a:spcPct val="120000"/>
+              </a:lnSpc>
+              <a:spcBef>
+                <a:spcPts val="0"/>
+              </a:spcBef>
+              <a:buNone/>
+            </a:pPr>
+            <a:r>
+              <a:rPr lang="en-US" sz="700" dirty="0">
+                <a:ea typeface="+mn-lt"/>
+                <a:cs typeface="+mn-lt"/>
+              </a:rPr>
+              <a:t>    "Language models can generate human-like text for businesses"]</a:t>
+            </a:r>
+            <a:endParaRPr lang="en-US" sz="700" dirty="0">
+              <a:ea typeface="Calibri" panose="020F0502020204030204"/>
+              <a:cs typeface="Calibri" panose="020F0502020204030204"/>
+            </a:endParaRPr>
+          </a:p>
+          <a:p>
+            <a:pPr marL="0" indent="0">
+              <a:lnSpc>
+                <a:spcPct val="120000"/>
+              </a:lnSpc>
+              <a:spcBef>
+                <a:spcPts val="0"/>
+              </a:spcBef>
+              <a:buNone/>
+            </a:pPr>
+            <a:r>
+              <a:rPr lang="en-US" sz="700" dirty="0">
+                <a:ea typeface="+mn-lt"/>
+                <a:cs typeface="+mn-lt"/>
+              </a:rPr>
+              <a:t># Tokenize the sentences</a:t>
+            </a:r>
+          </a:p>
+          <a:p>
+            <a:pPr marL="0" indent="0">
+              <a:lnSpc>
+                <a:spcPct val="120000"/>
+              </a:lnSpc>
+              <a:spcBef>
+                <a:spcPts val="0"/>
+              </a:spcBef>
+              <a:buNone/>
+            </a:pPr>
+            <a:r>
+              <a:rPr lang="en-US" sz="700" dirty="0" err="1">
+                <a:ea typeface="+mn-lt"/>
+                <a:cs typeface="+mn-lt"/>
+              </a:rPr>
+              <a:t>tokenized_sentences</a:t>
+            </a:r>
+            <a:r>
+              <a:rPr lang="en-US" sz="700" dirty="0">
+                <a:ea typeface="+mn-lt"/>
+                <a:cs typeface="+mn-lt"/>
+              </a:rPr>
+              <a:t> = [</a:t>
+            </a:r>
+            <a:r>
+              <a:rPr lang="en-US" sz="700" dirty="0" err="1">
+                <a:ea typeface="+mn-lt"/>
+                <a:cs typeface="+mn-lt"/>
+              </a:rPr>
+              <a:t>word_tokenize</a:t>
+            </a:r>
+            <a:r>
+              <a:rPr lang="en-US" sz="700" dirty="0">
+                <a:ea typeface="+mn-lt"/>
+                <a:cs typeface="+mn-lt"/>
+              </a:rPr>
+              <a:t>(</a:t>
+            </a:r>
+            <a:r>
+              <a:rPr lang="en-US" sz="700" dirty="0" err="1">
+                <a:ea typeface="+mn-lt"/>
+                <a:cs typeface="+mn-lt"/>
+              </a:rPr>
+              <a:t>sentence.lower</a:t>
+            </a:r>
+            <a:r>
+              <a:rPr lang="en-US" sz="700" dirty="0">
+                <a:ea typeface="+mn-lt"/>
+                <a:cs typeface="+mn-lt"/>
+              </a:rPr>
+              <a:t>()) for sentence in sentences]</a:t>
+            </a:r>
+          </a:p>
+          <a:p>
+            <a:pPr marL="0" indent="0">
+              <a:lnSpc>
+                <a:spcPct val="120000"/>
+              </a:lnSpc>
+              <a:spcBef>
+                <a:spcPts val="0"/>
+              </a:spcBef>
+              <a:buNone/>
+            </a:pPr>
+            <a:r>
+              <a:rPr lang="en-US" sz="700" dirty="0">
+                <a:ea typeface="+mn-lt"/>
+                <a:cs typeface="+mn-lt"/>
+              </a:rPr>
+              <a:t># Train Word2Vec model</a:t>
+            </a:r>
+            <a:endParaRPr lang="en-US" sz="700" dirty="0">
+              <a:ea typeface="Calibri" panose="020F0502020204030204"/>
+              <a:cs typeface="Calibri" panose="020F0502020204030204"/>
+            </a:endParaRPr>
+          </a:p>
+          <a:p>
+            <a:pPr marL="0" indent="0">
+              <a:lnSpc>
+                <a:spcPct val="120000"/>
+              </a:lnSpc>
+              <a:spcBef>
+                <a:spcPts val="0"/>
+              </a:spcBef>
+              <a:buNone/>
+            </a:pPr>
+            <a:r>
+              <a:rPr lang="en-US" sz="700" dirty="0">
+                <a:ea typeface="+mn-lt"/>
+                <a:cs typeface="+mn-lt"/>
+              </a:rPr>
+              <a:t>model = Word2Vec(sentences=</a:t>
+            </a:r>
+            <a:r>
+              <a:rPr lang="en-US" sz="700" dirty="0" err="1">
+                <a:ea typeface="+mn-lt"/>
+                <a:cs typeface="+mn-lt"/>
+              </a:rPr>
+              <a:t>tokenized_sentences</a:t>
+            </a:r>
+            <a:r>
+              <a:rPr lang="en-US" sz="700" dirty="0">
+                <a:ea typeface="+mn-lt"/>
+                <a:cs typeface="+mn-lt"/>
+              </a:rPr>
+              <a:t>, </a:t>
+            </a:r>
+          </a:p>
+          <a:p>
+            <a:pPr marL="0" indent="0">
+              <a:lnSpc>
+                <a:spcPct val="120000"/>
+              </a:lnSpc>
+              <a:spcBef>
+                <a:spcPts val="0"/>
+              </a:spcBef>
+              <a:buNone/>
+            </a:pPr>
+            <a:r>
+              <a:rPr lang="en-US" sz="700" dirty="0">
+                <a:ea typeface="+mn-lt"/>
+                <a:cs typeface="+mn-lt"/>
+              </a:rPr>
+              <a:t>                 </a:t>
+            </a:r>
+            <a:r>
+              <a:rPr lang="en-US" sz="700" dirty="0" err="1">
+                <a:ea typeface="+mn-lt"/>
+                <a:cs typeface="+mn-lt"/>
+              </a:rPr>
+              <a:t>vector_size</a:t>
+            </a:r>
+            <a:r>
+              <a:rPr lang="en-US" sz="700" dirty="0">
+                <a:ea typeface="+mn-lt"/>
+                <a:cs typeface="+mn-lt"/>
+              </a:rPr>
+              <a:t>=100,  # Embedding dimension</a:t>
+            </a:r>
+          </a:p>
+          <a:p>
+            <a:pPr marL="0" indent="0">
+              <a:lnSpc>
+                <a:spcPct val="120000"/>
+              </a:lnSpc>
+              <a:spcBef>
+                <a:spcPts val="0"/>
+              </a:spcBef>
+              <a:buNone/>
+            </a:pPr>
+            <a:r>
+              <a:rPr lang="en-US" sz="700" dirty="0">
+                <a:ea typeface="+mn-lt"/>
+                <a:cs typeface="+mn-lt"/>
+              </a:rPr>
+              <a:t>                 window=5,         # Context window size</a:t>
+            </a:r>
+          </a:p>
+          <a:p>
+            <a:pPr marL="0" indent="0">
+              <a:lnSpc>
+                <a:spcPct val="120000"/>
+              </a:lnSpc>
+              <a:spcBef>
+                <a:spcPts val="0"/>
+              </a:spcBef>
+              <a:buNone/>
+            </a:pPr>
+            <a:r>
+              <a:rPr lang="en-US" sz="700" dirty="0">
+                <a:ea typeface="+mn-lt"/>
+                <a:cs typeface="+mn-lt"/>
+              </a:rPr>
+              <a:t>                 </a:t>
+            </a:r>
+            <a:r>
+              <a:rPr lang="en-US" sz="700" dirty="0" err="1">
+                <a:ea typeface="+mn-lt"/>
+                <a:cs typeface="+mn-lt"/>
+              </a:rPr>
+              <a:t>min_count</a:t>
+            </a:r>
+            <a:r>
+              <a:rPr lang="en-US" sz="700" dirty="0">
+                <a:ea typeface="+mn-lt"/>
+                <a:cs typeface="+mn-lt"/>
+              </a:rPr>
+              <a:t>=1,      # Minimum word frequency</a:t>
+            </a:r>
+          </a:p>
+          <a:p>
+            <a:pPr marL="0" indent="0">
+              <a:lnSpc>
+                <a:spcPct val="120000"/>
+              </a:lnSpc>
+              <a:spcBef>
+                <a:spcPts val="0"/>
+              </a:spcBef>
+              <a:buNone/>
+            </a:pPr>
+            <a:r>
+              <a:rPr lang="en-US" sz="700" dirty="0">
+                <a:ea typeface="+mn-lt"/>
+                <a:cs typeface="+mn-lt"/>
+              </a:rPr>
+              <a:t>                 workers=4)        # Number of threads</a:t>
+            </a:r>
+          </a:p>
+          <a:p>
+            <a:pPr marL="0" indent="0">
+              <a:lnSpc>
+                <a:spcPct val="120000"/>
+              </a:lnSpc>
+              <a:spcBef>
+                <a:spcPts val="0"/>
+              </a:spcBef>
+              <a:buNone/>
+            </a:pPr>
+            <a:r>
+              <a:rPr lang="en-US" sz="700" dirty="0">
+                <a:ea typeface="+mn-lt"/>
+                <a:cs typeface="+mn-lt"/>
+              </a:rPr>
+              <a:t># Save the model</a:t>
+            </a:r>
+            <a:endParaRPr lang="en-US" sz="700" dirty="0">
+              <a:ea typeface="Calibri" panose="020F0502020204030204"/>
+              <a:cs typeface="Calibri" panose="020F0502020204030204"/>
+            </a:endParaRPr>
+          </a:p>
+          <a:p>
+            <a:pPr marL="0" indent="0">
+              <a:lnSpc>
+                <a:spcPct val="120000"/>
+              </a:lnSpc>
+              <a:spcBef>
+                <a:spcPts val="0"/>
+              </a:spcBef>
+              <a:buNone/>
+            </a:pPr>
+            <a:r>
+              <a:rPr lang="en-US" sz="700" dirty="0" err="1">
+                <a:ea typeface="+mn-lt"/>
+                <a:cs typeface="+mn-lt"/>
+              </a:rPr>
+              <a:t>model.save</a:t>
+            </a:r>
+            <a:r>
+              <a:rPr lang="en-US" sz="700" dirty="0">
+                <a:ea typeface="+mn-lt"/>
+                <a:cs typeface="+mn-lt"/>
+              </a:rPr>
+              <a:t>("word2vec.model")</a:t>
+            </a:r>
+          </a:p>
+          <a:p>
+            <a:pPr marL="0" indent="0">
+              <a:lnSpc>
+                <a:spcPct val="120000"/>
+              </a:lnSpc>
+              <a:spcBef>
+                <a:spcPts val="0"/>
+              </a:spcBef>
+              <a:buNone/>
+            </a:pPr>
+            <a:endParaRPr lang="en-US" sz="700" dirty="0">
+              <a:ea typeface="Calibri" panose="020F0502020204030204"/>
+              <a:cs typeface="Calibri" panose="020F0502020204030204"/>
+            </a:endParaRPr>
+          </a:p>
+          <a:p>
+            <a:pPr marL="0" indent="0">
+              <a:lnSpc>
+                <a:spcPct val="120000"/>
+              </a:lnSpc>
+              <a:spcBef>
+                <a:spcPts val="0"/>
+              </a:spcBef>
+              <a:buNone/>
+            </a:pPr>
+            <a:r>
+              <a:rPr lang="en-US" sz="700" dirty="0">
+                <a:ea typeface="+mn-lt"/>
+                <a:cs typeface="+mn-lt"/>
+              </a:rPr>
+              <a:t># Find the most similar words to "language"</a:t>
+            </a:r>
+            <a:endParaRPr lang="en-US" sz="700" dirty="0">
+              <a:ea typeface="Calibri" panose="020F0502020204030204"/>
+              <a:cs typeface="Calibri" panose="020F0502020204030204"/>
+            </a:endParaRPr>
+          </a:p>
+          <a:p>
+            <a:pPr marL="0" indent="0">
+              <a:lnSpc>
+                <a:spcPct val="120000"/>
+              </a:lnSpc>
+              <a:spcBef>
+                <a:spcPts val="0"/>
+              </a:spcBef>
+              <a:buNone/>
+            </a:pPr>
+            <a:r>
+              <a:rPr lang="en-US" sz="700" dirty="0" err="1">
+                <a:ea typeface="+mn-lt"/>
+                <a:cs typeface="+mn-lt"/>
+              </a:rPr>
+              <a:t>similar_words</a:t>
+            </a:r>
+            <a:r>
+              <a:rPr lang="en-US" sz="700" dirty="0">
+                <a:ea typeface="+mn-lt"/>
+                <a:cs typeface="+mn-lt"/>
+              </a:rPr>
+              <a:t> = </a:t>
+            </a:r>
+            <a:r>
+              <a:rPr lang="en-US" sz="700" dirty="0" err="1">
+                <a:ea typeface="+mn-lt"/>
+                <a:cs typeface="+mn-lt"/>
+              </a:rPr>
+              <a:t>model.wv.most_similar</a:t>
+            </a:r>
+            <a:r>
+              <a:rPr lang="en-US" sz="700" dirty="0">
+                <a:ea typeface="+mn-lt"/>
+                <a:cs typeface="+mn-lt"/>
+              </a:rPr>
+              <a:t>("language", </a:t>
+            </a:r>
+            <a:r>
+              <a:rPr lang="en-US" sz="700" dirty="0" err="1">
+                <a:ea typeface="+mn-lt"/>
+                <a:cs typeface="+mn-lt"/>
+              </a:rPr>
+              <a:t>topn</a:t>
+            </a:r>
+            <a:r>
+              <a:rPr lang="en-US" sz="700" dirty="0">
+                <a:ea typeface="+mn-lt"/>
+                <a:cs typeface="+mn-lt"/>
+              </a:rPr>
+              <a:t>=5)</a:t>
+            </a:r>
+          </a:p>
+          <a:p>
+            <a:pPr marL="0" indent="0">
+              <a:lnSpc>
+                <a:spcPct val="120000"/>
+              </a:lnSpc>
+              <a:spcBef>
+                <a:spcPts val="0"/>
+              </a:spcBef>
+              <a:buNone/>
+            </a:pPr>
+            <a:r>
+              <a:rPr lang="en-US" sz="700" dirty="0">
+                <a:ea typeface="+mn-lt"/>
+                <a:cs typeface="+mn-lt"/>
+              </a:rPr>
+              <a:t>print("Words most similar to 'language':")</a:t>
+            </a:r>
+            <a:endParaRPr lang="en-US" sz="700" dirty="0">
+              <a:ea typeface="Calibri" panose="020F0502020204030204"/>
+              <a:cs typeface="Calibri" panose="020F0502020204030204"/>
+            </a:endParaRPr>
+          </a:p>
+          <a:p>
+            <a:pPr marL="0" indent="0">
+              <a:lnSpc>
+                <a:spcPct val="120000"/>
+              </a:lnSpc>
+              <a:spcBef>
+                <a:spcPts val="0"/>
+              </a:spcBef>
+              <a:buNone/>
+            </a:pPr>
+            <a:r>
+              <a:rPr lang="en-US" sz="700" dirty="0">
+                <a:ea typeface="+mn-lt"/>
+                <a:cs typeface="+mn-lt"/>
+              </a:rPr>
+              <a:t>for word, similarity in </a:t>
+            </a:r>
+            <a:r>
+              <a:rPr lang="en-US" sz="700" dirty="0" err="1">
+                <a:ea typeface="+mn-lt"/>
+                <a:cs typeface="+mn-lt"/>
+              </a:rPr>
+              <a:t>similar_words</a:t>
+            </a:r>
+            <a:r>
+              <a:rPr lang="en-US" sz="700" dirty="0">
+                <a:ea typeface="+mn-lt"/>
+                <a:cs typeface="+mn-lt"/>
+              </a:rPr>
+              <a:t>:</a:t>
+            </a:r>
+            <a:endParaRPr lang="en-US" sz="700" dirty="0">
+              <a:ea typeface="Calibri" panose="020F0502020204030204"/>
+              <a:cs typeface="Calibri" panose="020F0502020204030204"/>
+            </a:endParaRPr>
+          </a:p>
+          <a:p>
+            <a:pPr marL="0" indent="0">
+              <a:lnSpc>
+                <a:spcPct val="120000"/>
+              </a:lnSpc>
+              <a:spcBef>
+                <a:spcPts val="0"/>
+              </a:spcBef>
+              <a:buNone/>
+            </a:pPr>
+            <a:r>
+              <a:rPr lang="en-US" sz="700" dirty="0">
+                <a:ea typeface="+mn-lt"/>
+                <a:cs typeface="+mn-lt"/>
+              </a:rPr>
+              <a:t>    print(f"{word}: {similarity:.4f}")</a:t>
+            </a:r>
+            <a:endParaRPr lang="en-US" sz="700" dirty="0">
+              <a:ea typeface="Calibri" panose="020F0502020204030204"/>
+              <a:cs typeface="Calibri" panose="020F0502020204030204"/>
+            </a:endParaRPr>
+          </a:p>
+          <a:p>
+            <a:pPr marL="0" indent="0">
+              <a:lnSpc>
+                <a:spcPct val="120000"/>
+              </a:lnSpc>
+              <a:spcBef>
+                <a:spcPts val="0"/>
+              </a:spcBef>
+              <a:buNone/>
+            </a:pPr>
+            <a:endParaRPr lang="en-US" sz="700" dirty="0">
+              <a:ea typeface="Calibri" panose="020F0502020204030204"/>
+              <a:cs typeface="Calibri" panose="020F0502020204030204"/>
+            </a:endParaRPr>
+          </a:p>
+          <a:p>
+            <a:pPr marL="0" indent="0">
+              <a:lnSpc>
+                <a:spcPct val="120000"/>
+              </a:lnSpc>
+              <a:spcBef>
+                <a:spcPts val="0"/>
+              </a:spcBef>
+              <a:buNone/>
+            </a:pPr>
+            <a:r>
+              <a:rPr lang="en-US" sz="700" dirty="0">
+                <a:ea typeface="+mn-lt"/>
+                <a:cs typeface="+mn-lt"/>
+              </a:rPr>
+              <a:t># Vector for a specific word</a:t>
+            </a:r>
+            <a:endParaRPr lang="en-US" sz="700" dirty="0">
+              <a:ea typeface="Calibri" panose="020F0502020204030204"/>
+              <a:cs typeface="Calibri" panose="020F0502020204030204"/>
+            </a:endParaRPr>
+          </a:p>
+          <a:p>
+            <a:pPr marL="0" indent="0">
+              <a:lnSpc>
+                <a:spcPct val="120000"/>
+              </a:lnSpc>
+              <a:spcBef>
+                <a:spcPts val="0"/>
+              </a:spcBef>
+              <a:buNone/>
+            </a:pPr>
+            <a:r>
+              <a:rPr lang="en-US" sz="700" dirty="0" err="1">
+                <a:ea typeface="+mn-lt"/>
+                <a:cs typeface="+mn-lt"/>
+              </a:rPr>
+              <a:t>word_vector</a:t>
+            </a:r>
+            <a:r>
+              <a:rPr lang="en-US" sz="700" dirty="0">
+                <a:ea typeface="+mn-lt"/>
+                <a:cs typeface="+mn-lt"/>
+              </a:rPr>
+              <a:t> = </a:t>
+            </a:r>
+            <a:r>
+              <a:rPr lang="en-US" sz="700" dirty="0" err="1">
+                <a:ea typeface="+mn-lt"/>
+                <a:cs typeface="+mn-lt"/>
+              </a:rPr>
+              <a:t>model.wv</a:t>
+            </a:r>
+            <a:r>
+              <a:rPr lang="en-US" sz="700" dirty="0">
+                <a:ea typeface="+mn-lt"/>
+                <a:cs typeface="+mn-lt"/>
+              </a:rPr>
+              <a:t>["business"]</a:t>
+            </a:r>
+          </a:p>
+          <a:p>
+            <a:pPr marL="0" indent="0">
+              <a:lnSpc>
+                <a:spcPct val="120000"/>
+              </a:lnSpc>
+              <a:spcBef>
+                <a:spcPts val="0"/>
+              </a:spcBef>
+              <a:buNone/>
+            </a:pPr>
+            <a:r>
+              <a:rPr lang="en-US" sz="700" dirty="0">
+                <a:ea typeface="+mn-lt"/>
+                <a:cs typeface="+mn-lt"/>
+              </a:rPr>
+              <a:t>print(f"\</a:t>
+            </a:r>
+            <a:r>
+              <a:rPr lang="en-US" sz="700" dirty="0" err="1">
+                <a:ea typeface="+mn-lt"/>
+                <a:cs typeface="+mn-lt"/>
+              </a:rPr>
+              <a:t>nVector</a:t>
+            </a:r>
+            <a:r>
+              <a:rPr lang="en-US" sz="700" dirty="0">
+                <a:ea typeface="+mn-lt"/>
+                <a:cs typeface="+mn-lt"/>
+              </a:rPr>
+              <a:t> for 'business' (first 10 dimensions):\n{</a:t>
+            </a:r>
+            <a:r>
+              <a:rPr lang="en-US" sz="700" dirty="0" err="1">
+                <a:ea typeface="+mn-lt"/>
+                <a:cs typeface="+mn-lt"/>
+              </a:rPr>
+              <a:t>word_vector</a:t>
+            </a:r>
+            <a:r>
+              <a:rPr lang="en-US" sz="700" dirty="0">
+                <a:ea typeface="+mn-lt"/>
+                <a:cs typeface="+mn-lt"/>
+              </a:rPr>
+              <a:t>[:10]}")</a:t>
+            </a:r>
+          </a:p>
+          <a:p>
+            <a:pPr marL="0" indent="0">
+              <a:lnSpc>
+                <a:spcPct val="120000"/>
+              </a:lnSpc>
+              <a:spcBef>
+                <a:spcPts val="0"/>
+              </a:spcBef>
+              <a:buNone/>
+            </a:pPr>
+            <a:endParaRPr lang="en-US" sz="700" dirty="0">
+              <a:ea typeface="Calibri" panose="020F0502020204030204"/>
+              <a:cs typeface="Calibri" panose="020F0502020204030204"/>
+            </a:endParaRPr>
+          </a:p>
+          <a:p>
+            <a:pPr marL="0" indent="0">
+              <a:lnSpc>
+                <a:spcPct val="120000"/>
+              </a:lnSpc>
+              <a:spcBef>
+                <a:spcPts val="0"/>
+              </a:spcBef>
+              <a:buNone/>
+            </a:pPr>
+            <a:r>
+              <a:rPr lang="en-US" sz="700" dirty="0">
+                <a:ea typeface="+mn-lt"/>
+                <a:cs typeface="+mn-lt"/>
+              </a:rPr>
+              <a:t># Word analogies</a:t>
+            </a:r>
+            <a:endParaRPr lang="en-US" sz="700" dirty="0">
+              <a:ea typeface="Calibri" panose="020F0502020204030204"/>
+              <a:cs typeface="Calibri" panose="020F0502020204030204"/>
+            </a:endParaRPr>
+          </a:p>
+          <a:p>
+            <a:pPr marL="0" indent="0">
+              <a:lnSpc>
+                <a:spcPct val="120000"/>
+              </a:lnSpc>
+              <a:spcBef>
+                <a:spcPts val="0"/>
+              </a:spcBef>
+              <a:buNone/>
+            </a:pPr>
+            <a:r>
+              <a:rPr lang="en-US" sz="700" dirty="0" err="1">
+                <a:ea typeface="+mn-lt"/>
+                <a:cs typeface="+mn-lt"/>
+              </a:rPr>
+              <a:t>analogy_result</a:t>
+            </a:r>
+            <a:r>
+              <a:rPr lang="en-US" sz="700" dirty="0">
+                <a:ea typeface="+mn-lt"/>
+                <a:cs typeface="+mn-lt"/>
+              </a:rPr>
+              <a:t> = </a:t>
+            </a:r>
+            <a:r>
+              <a:rPr lang="en-US" sz="700" dirty="0" err="1">
+                <a:ea typeface="+mn-lt"/>
+                <a:cs typeface="+mn-lt"/>
+              </a:rPr>
+              <a:t>model.wv.most_similar</a:t>
+            </a:r>
+            <a:r>
+              <a:rPr lang="en-US" sz="700" dirty="0">
+                <a:ea typeface="+mn-lt"/>
+                <a:cs typeface="+mn-lt"/>
+              </a:rPr>
+              <a:t>(positive=["business", "language"], </a:t>
+            </a:r>
+          </a:p>
+          <a:p>
+            <a:pPr marL="0" indent="0">
+              <a:lnSpc>
+                <a:spcPct val="120000"/>
+              </a:lnSpc>
+              <a:spcBef>
+                <a:spcPts val="0"/>
+              </a:spcBef>
+              <a:buNone/>
+            </a:pPr>
+            <a:r>
+              <a:rPr lang="en-US" sz="700" dirty="0">
+                <a:ea typeface="+mn-lt"/>
+                <a:cs typeface="+mn-lt"/>
+              </a:rPr>
+              <a:t>                                     negative=["models"], </a:t>
+            </a:r>
+            <a:endParaRPr lang="en-US" sz="700" dirty="0">
+              <a:ea typeface="Calibri" panose="020F0502020204030204"/>
+              <a:cs typeface="Calibri" panose="020F0502020204030204"/>
+            </a:endParaRPr>
+          </a:p>
+          <a:p>
+            <a:pPr marL="0" indent="0">
+              <a:lnSpc>
+                <a:spcPct val="120000"/>
+              </a:lnSpc>
+              <a:spcBef>
+                <a:spcPts val="0"/>
+              </a:spcBef>
+              <a:buNone/>
+            </a:pPr>
+            <a:r>
+              <a:rPr lang="en-US" sz="700" dirty="0">
+                <a:ea typeface="+mn-lt"/>
+                <a:cs typeface="+mn-lt"/>
+              </a:rPr>
+              <a:t>                                     </a:t>
+            </a:r>
+            <a:r>
+              <a:rPr lang="en-US" sz="700" dirty="0" err="1">
+                <a:ea typeface="+mn-lt"/>
+                <a:cs typeface="+mn-lt"/>
+              </a:rPr>
+              <a:t>topn</a:t>
+            </a:r>
+            <a:r>
+              <a:rPr lang="en-US" sz="700" dirty="0">
+                <a:ea typeface="+mn-lt"/>
+                <a:cs typeface="+mn-lt"/>
+              </a:rPr>
+              <a:t>=3)</a:t>
+            </a:r>
+          </a:p>
+          <a:p>
+            <a:pPr marL="0" indent="0">
+              <a:lnSpc>
+                <a:spcPct val="120000"/>
+              </a:lnSpc>
+              <a:spcBef>
+                <a:spcPts val="0"/>
+              </a:spcBef>
+              <a:buNone/>
+            </a:pPr>
+            <a:r>
+              <a:rPr lang="en-US" sz="700" dirty="0">
+                <a:ea typeface="+mn-lt"/>
+                <a:cs typeface="+mn-lt"/>
+              </a:rPr>
+              <a:t>print("\</a:t>
+            </a:r>
+            <a:r>
+              <a:rPr lang="en-US" sz="700" dirty="0" err="1">
+                <a:ea typeface="+mn-lt"/>
+                <a:cs typeface="+mn-lt"/>
+              </a:rPr>
+              <a:t>nAnalogy</a:t>
+            </a:r>
+            <a:r>
+              <a:rPr lang="en-US" sz="700" dirty="0">
+                <a:ea typeface="+mn-lt"/>
+                <a:cs typeface="+mn-lt"/>
+              </a:rPr>
+              <a:t> results:")</a:t>
+            </a:r>
+          </a:p>
+          <a:p>
+            <a:pPr marL="0" indent="0">
+              <a:lnSpc>
+                <a:spcPct val="120000"/>
+              </a:lnSpc>
+              <a:spcBef>
+                <a:spcPts val="0"/>
+              </a:spcBef>
+              <a:buNone/>
+            </a:pPr>
+            <a:r>
+              <a:rPr lang="en-US" sz="700" dirty="0">
+                <a:ea typeface="+mn-lt"/>
+                <a:cs typeface="+mn-lt"/>
+              </a:rPr>
+              <a:t>for word, similarity in </a:t>
+            </a:r>
+            <a:r>
+              <a:rPr lang="en-US" sz="700" dirty="0" err="1">
+                <a:ea typeface="+mn-lt"/>
+                <a:cs typeface="+mn-lt"/>
+              </a:rPr>
+              <a:t>analogy_result</a:t>
+            </a:r>
+            <a:r>
+              <a:rPr lang="en-US" sz="700" dirty="0">
+                <a:ea typeface="+mn-lt"/>
+                <a:cs typeface="+mn-lt"/>
+              </a:rPr>
+              <a:t>:</a:t>
+            </a:r>
+            <a:endParaRPr lang="en-US" sz="700" dirty="0">
+              <a:ea typeface="Calibri" panose="020F0502020204030204"/>
+              <a:cs typeface="Calibri" panose="020F0502020204030204"/>
+            </a:endParaRPr>
+          </a:p>
+          <a:p>
+            <a:pPr marL="0" indent="0">
+              <a:lnSpc>
+                <a:spcPct val="120000"/>
+              </a:lnSpc>
+              <a:spcBef>
+                <a:spcPts val="0"/>
+              </a:spcBef>
+              <a:buNone/>
+            </a:pPr>
+            <a:r>
+              <a:rPr lang="en-US" sz="700" dirty="0">
+                <a:ea typeface="+mn-lt"/>
+                <a:cs typeface="+mn-lt"/>
+              </a:rPr>
+              <a:t>    print(f"{word}: {similarity:.4f}")</a:t>
+            </a:r>
+            <a:endParaRPr lang="en-US" sz="700" dirty="0"/>
+          </a:p>
+          <a:p>
+            <a:pPr marL="0">
+              <a:spcBef>
+                <a:spcPts val="0"/>
+              </a:spcBef>
+            </a:pPr>
+            <a:endParaRPr lang="en-US" sz="700" dirty="0"/>
           </a:p>
         </p:txBody>
       </p:sp>
     </p:spTree>
     <p:extLst>
       <p:ext uri="{BB962C8B-B14F-4D97-AF65-F5344CB8AC3E}">
-        <p14:creationId xmlns:p14="http://schemas.microsoft.com/office/powerpoint/2010/main" val="1353442942"/>
-      </p:ext>
-    </p:extLst>
-  </p:cSld>
-  <p:clrMapOvr>
-    <a:masterClrMapping/>
-  </p:clrMapOvr>
-</p:sld>
-</file>
-
-<file path=ppt/slides/slide7.xml><?xml version="1.0" encoding="utf-8"?>
-<p:sld xmlns:a="http://schemas.openxmlformats.org/drawingml/2006/main" xmlns:r="http://schemas.openxmlformats.org/officeDocument/2006/relationships" xmlns:p="http://schemas.openxmlformats.org/presentationml/2006/main">
-  <p:cSld>
-    <p:spTree>
-      <p:nvGrpSpPr>
-        <p:cNvPr id="1" name="">
-          <a:extLst>
-            <a:ext uri="{FF2B5EF4-FFF2-40B4-BE49-F238E27FC236}">
-              <a16:creationId xmlns:a16="http://schemas.microsoft.com/office/drawing/2014/main" id="{91E9DF0A-1EB6-F2E0-0498-37207FA05FF4}"/>
-            </a:ext>
-          </a:extLst>
-        </p:cNvPr>
-        <p:cNvGrpSpPr/>
-        <p:nvPr/>
-      </p:nvGrpSpPr>
-      <p:grpSpPr>
-        <a:xfrm>
-          <a:off x="0" y="0"/>
-          <a:ext cx="0" cy="0"/>
-          <a:chOff x="0" y="0"/>
-          <a:chExt cx="0" cy="0"/>
-        </a:xfrm>
-      </p:grpSpPr>
-      <p:sp>
-        <p:nvSpPr>
-          <p:cNvPr id="2" name="Title 1">
-            <a:extLst>
-              <a:ext uri="{FF2B5EF4-FFF2-40B4-BE49-F238E27FC236}">
-                <a16:creationId xmlns:a16="http://schemas.microsoft.com/office/drawing/2014/main" id="{D3EC4347-820C-CB6A-F020-EB8FFBE4BABA}"/>
-              </a:ext>
-            </a:extLst>
-          </p:cNvPr>
-          <p:cNvSpPr>
-            <a:spLocks noGrp="1"/>
-          </p:cNvSpPr>
-          <p:nvPr>
-            <p:ph type="title"/>
-          </p:nvPr>
-        </p:nvSpPr>
-        <p:spPr/>
-        <p:txBody>
-          <a:bodyPr/>
-          <a:lstStyle/>
-          <a:p>
-            <a:endParaRPr lang="en-US"/>
-          </a:p>
-        </p:txBody>
-      </p:sp>
-      <p:sp>
-        <p:nvSpPr>
-          <p:cNvPr id="3" name="Content Placeholder 2">
-            <a:extLst>
-              <a:ext uri="{FF2B5EF4-FFF2-40B4-BE49-F238E27FC236}">
-                <a16:creationId xmlns:a16="http://schemas.microsoft.com/office/drawing/2014/main" id="{36111376-C375-652C-0E62-C877F88420F2}"/>
-              </a:ext>
-            </a:extLst>
-          </p:cNvPr>
-          <p:cNvSpPr>
-            <a:spLocks noGrp="1"/>
-          </p:cNvSpPr>
-          <p:nvPr>
-            <p:ph idx="1"/>
-          </p:nvPr>
-        </p:nvSpPr>
-        <p:spPr/>
-        <p:txBody>
-          <a:bodyPr/>
-          <a:lstStyle/>
-          <a:p>
-            <a:endParaRPr lang="en-US"/>
-          </a:p>
-        </p:txBody>
-      </p:sp>
-    </p:spTree>
-    <p:extLst>
-      <p:ext uri="{BB962C8B-B14F-4D97-AF65-F5344CB8AC3E}">
-        <p14:creationId xmlns:p14="http://schemas.microsoft.com/office/powerpoint/2010/main" val="885699272"/>
+        <p14:creationId xmlns:p14="http://schemas.microsoft.com/office/powerpoint/2010/main" val="1729735699"/>
       </p:ext>
     </p:extLst>
   </p:cSld>
@@ -39888,7 +41600,10 @@
           <a:bodyPr/>
           <a:lstStyle/>
           <a:p>
-            <a:endParaRPr lang="en-US"/>
+            <a:r>
+              <a:rPr lang="en-US" dirty="0"/>
+              <a:t>Practical Implementation: Word2Vec in Python</a:t>
+            </a:r>
           </a:p>
         </p:txBody>
       </p:sp>
@@ -39908,12 +41623,304 @@
             <p:ph idx="1"/>
           </p:nvPr>
         </p:nvSpPr>
-        <p:spPr/>
+        <p:spPr>
+          <a:xfrm>
+            <a:off x="838200" y="1644223"/>
+            <a:ext cx="10515600" cy="5213777"/>
+          </a:xfrm>
+        </p:spPr>
         <p:txBody>
-          <a:bodyPr/>
+          <a:bodyPr>
+            <a:normAutofit fontScale="40000" lnSpcReduction="20000"/>
+          </a:bodyPr>
           <a:lstStyle/>
           <a:p>
+            <a:pPr marL="0" indent="0">
+              <a:buNone/>
+            </a:pPr>
+            <a:r>
+              <a:rPr lang="en-US" dirty="0"/>
+              <a:t>import </a:t>
+            </a:r>
+            <a:r>
+              <a:rPr lang="en-US" dirty="0" err="1"/>
+              <a:t>gensim.downloader</a:t>
+            </a:r>
+            <a:r>
+              <a:rPr lang="en-US" dirty="0"/>
+              <a:t> as </a:t>
+            </a:r>
+            <a:r>
+              <a:rPr lang="en-US" dirty="0" err="1"/>
+              <a:t>api</a:t>
+            </a:r>
+            <a:endParaRPr lang="en-US" dirty="0"/>
+          </a:p>
+          <a:p>
+            <a:pPr marL="0" indent="0">
+              <a:buNone/>
+            </a:pPr>
+            <a:r>
+              <a:rPr lang="en-US" dirty="0"/>
+              <a:t>from </a:t>
+            </a:r>
+            <a:r>
+              <a:rPr lang="en-US" dirty="0" err="1"/>
+              <a:t>gensim.models</a:t>
+            </a:r>
+            <a:r>
+              <a:rPr lang="en-US" dirty="0"/>
+              <a:t> import Word2Vec</a:t>
+            </a:r>
+          </a:p>
+          <a:p>
+            <a:pPr marL="0" indent="0">
+              <a:buNone/>
+            </a:pPr>
+            <a:r>
+              <a:rPr lang="en-US" dirty="0"/>
+              <a:t>import </a:t>
+            </a:r>
+            <a:r>
+              <a:rPr lang="en-US" dirty="0" err="1"/>
+              <a:t>numpy</a:t>
+            </a:r>
+            <a:r>
+              <a:rPr lang="en-US" dirty="0"/>
+              <a:t> as np</a:t>
+            </a:r>
+          </a:p>
+          <a:p>
+            <a:pPr marL="0" indent="0">
+              <a:buNone/>
+            </a:pPr>
             <a:endParaRPr lang="en-US"/>
+          </a:p>
+          <a:p>
+            <a:pPr marL="0" indent="0">
+              <a:buNone/>
+            </a:pPr>
+            <a:r>
+              <a:rPr lang="en-US"/>
+              <a:t># </a:t>
+            </a:r>
+            <a:r>
+              <a:rPr lang="en-US" dirty="0"/>
+              <a:t>Load pre-trained Word2Vec model</a:t>
+            </a:r>
+          </a:p>
+          <a:p>
+            <a:pPr marL="0" indent="0">
+              <a:buNone/>
+            </a:pPr>
+            <a:r>
+              <a:rPr lang="en-US" dirty="0"/>
+              <a:t>word2vec_model = </a:t>
+            </a:r>
+            <a:r>
+              <a:rPr lang="en-US" dirty="0" err="1"/>
+              <a:t>api.load</a:t>
+            </a:r>
+            <a:r>
+              <a:rPr lang="en-US" dirty="0"/>
+              <a:t>('word2vec-google-news-300’)</a:t>
+            </a:r>
+          </a:p>
+          <a:p>
+            <a:pPr marL="0" indent="0">
+              <a:buNone/>
+            </a:pPr>
+            <a:endParaRPr lang="en-US" dirty="0"/>
+          </a:p>
+          <a:p>
+            <a:pPr marL="0" indent="0">
+              <a:buNone/>
+            </a:pPr>
+            <a:r>
+              <a:rPr lang="en-US" dirty="0"/>
+              <a:t># Find similar words</a:t>
+            </a:r>
+          </a:p>
+          <a:p>
+            <a:pPr marL="0" indent="0">
+              <a:buNone/>
+            </a:pPr>
+            <a:r>
+              <a:rPr lang="en-US" dirty="0" err="1"/>
+              <a:t>similar_words</a:t>
+            </a:r>
+            <a:r>
+              <a:rPr lang="en-US" dirty="0"/>
+              <a:t> = word2vec_model.most_similar('computer', </a:t>
+            </a:r>
+            <a:r>
+              <a:rPr lang="en-US" dirty="0" err="1"/>
+              <a:t>topn</a:t>
+            </a:r>
+            <a:r>
+              <a:rPr lang="en-US" dirty="0"/>
+              <a:t>=5)</a:t>
+            </a:r>
+          </a:p>
+          <a:p>
+            <a:pPr marL="0" indent="0">
+              <a:buNone/>
+            </a:pPr>
+            <a:r>
+              <a:rPr lang="en-US" dirty="0"/>
+              <a:t>print("Words similar to 'computer':", </a:t>
+            </a:r>
+            <a:r>
+              <a:rPr lang="en-US" dirty="0" err="1"/>
+              <a:t>similar_words</a:t>
+            </a:r>
+            <a:r>
+              <a:rPr lang="en-US" dirty="0"/>
+              <a:t>)</a:t>
+            </a:r>
+          </a:p>
+          <a:p>
+            <a:pPr marL="0" indent="0">
+              <a:buNone/>
+            </a:pPr>
+            <a:endParaRPr lang="en-US" dirty="0"/>
+          </a:p>
+          <a:p>
+            <a:pPr marL="0" indent="0">
+              <a:buNone/>
+            </a:pPr>
+            <a:r>
+              <a:rPr lang="en-US" dirty="0"/>
+              <a:t># Word analogies</a:t>
+            </a:r>
+          </a:p>
+          <a:p>
+            <a:pPr marL="0" indent="0">
+              <a:buNone/>
+            </a:pPr>
+            <a:r>
+              <a:rPr lang="en-US" dirty="0"/>
+              <a:t>result = word2vec_model.most_similar(positive=['woman', 'king'], negative=['man'], </a:t>
+            </a:r>
+            <a:r>
+              <a:rPr lang="en-US" dirty="0" err="1"/>
+              <a:t>topn</a:t>
+            </a:r>
+            <a:r>
+              <a:rPr lang="en-US" dirty="0"/>
+              <a:t>=1)</a:t>
+            </a:r>
+          </a:p>
+          <a:p>
+            <a:pPr marL="0" indent="0">
+              <a:buNone/>
+            </a:pPr>
+            <a:r>
+              <a:rPr lang="en-US" dirty="0"/>
+              <a:t>print("king - man + woman =", result)</a:t>
+            </a:r>
+          </a:p>
+          <a:p>
+            <a:pPr marL="0" indent="0">
+              <a:buNone/>
+            </a:pPr>
+            <a:endParaRPr lang="en-US" dirty="0"/>
+          </a:p>
+          <a:p>
+            <a:pPr marL="0" indent="0">
+              <a:buNone/>
+            </a:pPr>
+            <a:r>
+              <a:rPr lang="en-US" dirty="0"/>
+              <a:t># Train your own Word2Vec model</a:t>
+            </a:r>
+          </a:p>
+          <a:p>
+            <a:pPr marL="0" indent="0">
+              <a:buNone/>
+            </a:pPr>
+            <a:r>
+              <a:rPr lang="en-US" dirty="0"/>
+              <a:t>sentences = [["cat", "say", "meow"], ["dog", "say", "woof"]]</a:t>
+            </a:r>
+          </a:p>
+          <a:p>
+            <a:pPr marL="0" indent="0">
+              <a:buNone/>
+            </a:pPr>
+            <a:r>
+              <a:rPr lang="en-US" dirty="0"/>
+              <a:t>model = Word2Vec(sentences, </a:t>
+            </a:r>
+            <a:r>
+              <a:rPr lang="en-US" dirty="0" err="1"/>
+              <a:t>vector_size</a:t>
+            </a:r>
+            <a:r>
+              <a:rPr lang="en-US" dirty="0"/>
+              <a:t>=100, window=5, </a:t>
+            </a:r>
+            <a:r>
+              <a:rPr lang="en-US" dirty="0" err="1"/>
+              <a:t>min_count</a:t>
+            </a:r>
+            <a:r>
+              <a:rPr lang="en-US" dirty="0"/>
+              <a:t>=1, workers=4)</a:t>
+            </a:r>
+          </a:p>
+          <a:p>
+            <a:pPr marL="0" indent="0">
+              <a:buNone/>
+            </a:pPr>
+            <a:endParaRPr lang="en-US" dirty="0"/>
+          </a:p>
+          <a:p>
+            <a:pPr marL="0" indent="0">
+              <a:buNone/>
+            </a:pPr>
+            <a:r>
+              <a:rPr lang="en-US" dirty="0"/>
+              <a:t># Get vector for a word</a:t>
+            </a:r>
+          </a:p>
+          <a:p>
+            <a:pPr marL="0" indent="0">
+              <a:buNone/>
+            </a:pPr>
+            <a:r>
+              <a:rPr lang="en-US" dirty="0" err="1"/>
+              <a:t>cat_vector</a:t>
+            </a:r>
+            <a:r>
+              <a:rPr lang="en-US" dirty="0"/>
+              <a:t> = </a:t>
+            </a:r>
+            <a:r>
+              <a:rPr lang="en-US" dirty="0" err="1"/>
+              <a:t>model.wv</a:t>
+            </a:r>
+            <a:r>
+              <a:rPr lang="en-US" dirty="0"/>
+              <a:t>['cat']</a:t>
+            </a:r>
+          </a:p>
+          <a:p>
+            <a:pPr marL="0" indent="0">
+              <a:buNone/>
+            </a:pPr>
+            <a:r>
+              <a:rPr lang="en-US" dirty="0"/>
+              <a:t>print("Vector for 'cat':", </a:t>
+            </a:r>
+            <a:r>
+              <a:rPr lang="en-US" dirty="0" err="1"/>
+              <a:t>cat_vector</a:t>
+            </a:r>
+            <a:r>
+              <a:rPr lang="en-US" dirty="0"/>
+              <a:t>[:5])  # Show first 5 dimensions</a:t>
+            </a:r>
           </a:p>
         </p:txBody>
       </p:sp>
@@ -39974,7 +41981,18 @@
           <a:bodyPr/>
           <a:lstStyle/>
           <a:p>
-            <a:endParaRPr lang="en-US"/>
+            <a:r>
+              <a:rPr lang="en-US" dirty="0"/>
+              <a:t>Practical Implementation: </a:t>
+            </a:r>
+            <a:r>
+              <a:rPr lang="en-US" dirty="0" err="1"/>
+              <a:t>GloVe</a:t>
+            </a:r>
+            <a:r>
+              <a:rPr lang="en-US" dirty="0"/>
+              <a:t> in Python</a:t>
+            </a:r>
           </a:p>
         </p:txBody>
       </p:sp>
@@ -39996,10 +42014,527 @@
         </p:nvSpPr>
         <p:spPr/>
         <p:txBody>
-          <a:bodyPr/>
+          <a:bodyPr>
+            <a:normAutofit fontScale="55000" lnSpcReduction="20000"/>
+          </a:bodyPr>
           <a:lstStyle/>
           <a:p>
-            <a:endParaRPr lang="en-US"/>
+            <a:pPr marL="0" indent="0">
+              <a:lnSpc>
+                <a:spcPct val="120000"/>
+              </a:lnSpc>
+              <a:spcBef>
+                <a:spcPts val="0"/>
+              </a:spcBef>
+              <a:buNone/>
+            </a:pPr>
+            <a:r>
+              <a:rPr lang="en-US" dirty="0"/>
+              <a:t>import </a:t>
+            </a:r>
+            <a:r>
+              <a:rPr lang="en-US" dirty="0" err="1"/>
+              <a:t>numpy</a:t>
+            </a:r>
+            <a:r>
+              <a:rPr lang="en-US" dirty="0"/>
+              <a:t> as np</a:t>
+            </a:r>
+          </a:p>
+          <a:p>
+            <a:pPr marL="0" indent="0">
+              <a:lnSpc>
+                <a:spcPct val="120000"/>
+              </a:lnSpc>
+              <a:spcBef>
+                <a:spcPts val="0"/>
+              </a:spcBef>
+              <a:buNone/>
+            </a:pPr>
+            <a:r>
+              <a:rPr lang="en-US" dirty="0"/>
+              <a:t>from </a:t>
+            </a:r>
+            <a:r>
+              <a:rPr lang="en-US" dirty="0" err="1"/>
+              <a:t>sklearn.metrics.pairwise</a:t>
+            </a:r>
+            <a:r>
+              <a:rPr lang="en-US" dirty="0"/>
+              <a:t> import </a:t>
+            </a:r>
+            <a:r>
+              <a:rPr lang="en-US" dirty="0" err="1"/>
+              <a:t>cosine_similarity</a:t>
+            </a:r>
+            <a:endParaRPr lang="en-US" dirty="0"/>
+          </a:p>
+          <a:p>
+            <a:pPr marL="0" indent="0">
+              <a:lnSpc>
+                <a:spcPct val="120000"/>
+              </a:lnSpc>
+              <a:spcBef>
+                <a:spcPts val="0"/>
+              </a:spcBef>
+              <a:buNone/>
+            </a:pPr>
+            <a:r>
+              <a:rPr lang="en-US" dirty="0"/>
+              <a:t># Function to load </a:t>
+            </a:r>
+            <a:r>
+              <a:rPr lang="en-US" dirty="0" err="1"/>
+              <a:t>GloVe</a:t>
+            </a:r>
+            <a:r>
+              <a:rPr lang="en-US" dirty="0"/>
+              <a:t> vectors</a:t>
+            </a:r>
+          </a:p>
+          <a:p>
+            <a:pPr marL="0" indent="0">
+              <a:lnSpc>
+                <a:spcPct val="120000"/>
+              </a:lnSpc>
+              <a:spcBef>
+                <a:spcPts val="0"/>
+              </a:spcBef>
+              <a:buNone/>
+            </a:pPr>
+            <a:r>
+              <a:rPr lang="en-US" dirty="0"/>
+              <a:t>def </a:t>
+            </a:r>
+            <a:r>
+              <a:rPr lang="en-US" dirty="0" err="1"/>
+              <a:t>load_glove_vectors</a:t>
+            </a:r>
+            <a:r>
+              <a:rPr lang="en-US" dirty="0"/>
+              <a:t>(</a:t>
+            </a:r>
+            <a:r>
+              <a:rPr lang="en-US" dirty="0" err="1"/>
+              <a:t>file_path</a:t>
+            </a:r>
+            <a:r>
+              <a:rPr lang="en-US" dirty="0"/>
+              <a:t>):</a:t>
+            </a:r>
+          </a:p>
+          <a:p>
+            <a:pPr marL="0" indent="0">
+              <a:lnSpc>
+                <a:spcPct val="120000"/>
+              </a:lnSpc>
+              <a:spcBef>
+                <a:spcPts val="0"/>
+              </a:spcBef>
+              <a:buNone/>
+            </a:pPr>
+            <a:r>
+              <a:rPr lang="en-US" dirty="0"/>
+              <a:t>    </a:t>
+            </a:r>
+            <a:r>
+              <a:rPr lang="en-US" dirty="0" err="1"/>
+              <a:t>embeddings_dict</a:t>
+            </a:r>
+            <a:r>
+              <a:rPr lang="en-US" dirty="0"/>
+              <a:t> = {}</a:t>
+            </a:r>
+          </a:p>
+          <a:p>
+            <a:pPr marL="0" indent="0">
+              <a:lnSpc>
+                <a:spcPct val="120000"/>
+              </a:lnSpc>
+              <a:spcBef>
+                <a:spcPts val="0"/>
+              </a:spcBef>
+              <a:buNone/>
+            </a:pPr>
+            <a:r>
+              <a:rPr lang="en-US" dirty="0"/>
+              <a:t>    with open(</a:t>
+            </a:r>
+            <a:r>
+              <a:rPr lang="en-US" dirty="0" err="1"/>
+              <a:t>file_path</a:t>
+            </a:r>
+            <a:r>
+              <a:rPr lang="en-US" dirty="0"/>
+              <a:t>, 'r', encoding='utf-8') as f:</a:t>
+            </a:r>
+          </a:p>
+          <a:p>
+            <a:pPr marL="0" indent="0">
+              <a:lnSpc>
+                <a:spcPct val="120000"/>
+              </a:lnSpc>
+              <a:spcBef>
+                <a:spcPts val="0"/>
+              </a:spcBef>
+              <a:buNone/>
+            </a:pPr>
+            <a:r>
+              <a:rPr lang="en-US" dirty="0"/>
+              <a:t>        for line in f:</a:t>
+            </a:r>
+          </a:p>
+          <a:p>
+            <a:pPr marL="0" indent="0">
+              <a:lnSpc>
+                <a:spcPct val="120000"/>
+              </a:lnSpc>
+              <a:spcBef>
+                <a:spcPts val="0"/>
+              </a:spcBef>
+              <a:buNone/>
+            </a:pPr>
+            <a:r>
+              <a:rPr lang="en-US" dirty="0"/>
+              <a:t>            values = </a:t>
+            </a:r>
+            <a:r>
+              <a:rPr lang="en-US" dirty="0" err="1"/>
+              <a:t>line.split</a:t>
+            </a:r>
+            <a:r>
+              <a:rPr lang="en-US" dirty="0"/>
+              <a:t>()</a:t>
+            </a:r>
+          </a:p>
+          <a:p>
+            <a:pPr marL="0" indent="0">
+              <a:lnSpc>
+                <a:spcPct val="120000"/>
+              </a:lnSpc>
+              <a:spcBef>
+                <a:spcPts val="0"/>
+              </a:spcBef>
+              <a:buNone/>
+            </a:pPr>
+            <a:r>
+              <a:rPr lang="en-US" dirty="0"/>
+              <a:t>            word = values[0]</a:t>
+            </a:r>
+          </a:p>
+          <a:p>
+            <a:pPr marL="0" indent="0">
+              <a:lnSpc>
+                <a:spcPct val="120000"/>
+              </a:lnSpc>
+              <a:spcBef>
+                <a:spcPts val="0"/>
+              </a:spcBef>
+              <a:buNone/>
+            </a:pPr>
+            <a:r>
+              <a:rPr lang="en-US" dirty="0"/>
+              <a:t>            vector = </a:t>
+            </a:r>
+            <a:r>
+              <a:rPr lang="en-US" dirty="0" err="1"/>
+              <a:t>np.array</a:t>
+            </a:r>
+            <a:r>
+              <a:rPr lang="en-US" dirty="0"/>
+              <a:t>(values[1:], </a:t>
+            </a:r>
+            <a:r>
+              <a:rPr lang="en-US" dirty="0" err="1"/>
+              <a:t>dtype</a:t>
+            </a:r>
+            <a:r>
+              <a:rPr lang="en-US" dirty="0"/>
+              <a:t>='float32')</a:t>
+            </a:r>
+          </a:p>
+          <a:p>
+            <a:pPr marL="0" indent="0">
+              <a:lnSpc>
+                <a:spcPct val="120000"/>
+              </a:lnSpc>
+              <a:spcBef>
+                <a:spcPts val="0"/>
+              </a:spcBef>
+              <a:buNone/>
+            </a:pPr>
+            <a:r>
+              <a:rPr lang="en-US" dirty="0"/>
+              <a:t>            </a:t>
+            </a:r>
+            <a:r>
+              <a:rPr lang="en-US" dirty="0" err="1"/>
+              <a:t>embeddings_dict</a:t>
+            </a:r>
+            <a:r>
+              <a:rPr lang="en-US" dirty="0"/>
+              <a:t>[word] = vector</a:t>
+            </a:r>
+          </a:p>
+          <a:p>
+            <a:pPr marL="0" indent="0">
+              <a:lnSpc>
+                <a:spcPct val="120000"/>
+              </a:lnSpc>
+              <a:spcBef>
+                <a:spcPts val="0"/>
+              </a:spcBef>
+              <a:buNone/>
+            </a:pPr>
+            <a:r>
+              <a:rPr lang="en-US" dirty="0"/>
+              <a:t>    return </a:t>
+            </a:r>
+            <a:r>
+              <a:rPr lang="en-US" dirty="0" err="1"/>
+              <a:t>embeddings_dict</a:t>
+            </a:r>
+            <a:endParaRPr lang="en-US" dirty="0"/>
+          </a:p>
+          <a:p>
+            <a:pPr marL="0" indent="0">
+              <a:lnSpc>
+                <a:spcPct val="120000"/>
+              </a:lnSpc>
+              <a:spcBef>
+                <a:spcPts val="0"/>
+              </a:spcBef>
+              <a:buNone/>
+            </a:pPr>
+            <a:r>
+              <a:rPr lang="en-US" dirty="0"/>
+              <a:t># Load pre-trained </a:t>
+            </a:r>
+            <a:r>
+              <a:rPr lang="en-US" dirty="0" err="1"/>
+              <a:t>GloVe</a:t>
+            </a:r>
+            <a:r>
+              <a:rPr lang="en-US" dirty="0"/>
+              <a:t> vectors</a:t>
+            </a:r>
+          </a:p>
+          <a:p>
+            <a:pPr marL="0" indent="0">
+              <a:lnSpc>
+                <a:spcPct val="120000"/>
+              </a:lnSpc>
+              <a:spcBef>
+                <a:spcPts val="0"/>
+              </a:spcBef>
+              <a:buNone/>
+            </a:pPr>
+            <a:r>
+              <a:rPr lang="en-US" dirty="0" err="1"/>
+              <a:t>glove_vectors</a:t>
+            </a:r>
+            <a:r>
+              <a:rPr lang="en-US" dirty="0"/>
+              <a:t> = </a:t>
+            </a:r>
+            <a:r>
+              <a:rPr lang="en-US" dirty="0" err="1"/>
+              <a:t>load_glove_vectors</a:t>
+            </a:r>
+            <a:r>
+              <a:rPr lang="en-US" dirty="0"/>
+              <a:t>('glove.6B.100d.txt')</a:t>
+            </a:r>
+          </a:p>
+          <a:p>
+            <a:pPr marL="0" indent="0">
+              <a:lnSpc>
+                <a:spcPct val="120000"/>
+              </a:lnSpc>
+              <a:spcBef>
+                <a:spcPts val="0"/>
+              </a:spcBef>
+              <a:buNone/>
+            </a:pPr>
+            <a:r>
+              <a:rPr lang="en-US" dirty="0"/>
+              <a:t># Calculate word similarity</a:t>
+            </a:r>
+          </a:p>
+          <a:p>
+            <a:pPr marL="0" indent="0">
+              <a:lnSpc>
+                <a:spcPct val="120000"/>
+              </a:lnSpc>
+              <a:spcBef>
+                <a:spcPts val="0"/>
+              </a:spcBef>
+              <a:buNone/>
+            </a:pPr>
+            <a:r>
+              <a:rPr lang="en-US" dirty="0"/>
+              <a:t>def </a:t>
+            </a:r>
+            <a:r>
+              <a:rPr lang="en-US" dirty="0" err="1"/>
+              <a:t>get_similarity</a:t>
+            </a:r>
+            <a:r>
+              <a:rPr lang="en-US" dirty="0"/>
+              <a:t>(word1, word2, embeddings):</a:t>
+            </a:r>
+          </a:p>
+          <a:p>
+            <a:pPr marL="0" indent="0">
+              <a:lnSpc>
+                <a:spcPct val="120000"/>
+              </a:lnSpc>
+              <a:spcBef>
+                <a:spcPts val="0"/>
+              </a:spcBef>
+              <a:buNone/>
+            </a:pPr>
+            <a:r>
+              <a:rPr lang="en-US" dirty="0"/>
+              <a:t>    if word1 in embeddings and word2 in embeddings:</a:t>
+            </a:r>
+          </a:p>
+          <a:p>
+            <a:pPr marL="0" indent="0">
+              <a:lnSpc>
+                <a:spcPct val="120000"/>
+              </a:lnSpc>
+              <a:spcBef>
+                <a:spcPts val="0"/>
+              </a:spcBef>
+              <a:buNone/>
+            </a:pPr>
+            <a:r>
+              <a:rPr lang="en-US" dirty="0"/>
+              <a:t>        vec1 = embeddings[word1].reshape(1, -1)</a:t>
+            </a:r>
+          </a:p>
+          <a:p>
+            <a:pPr marL="0" indent="0">
+              <a:lnSpc>
+                <a:spcPct val="120000"/>
+              </a:lnSpc>
+              <a:spcBef>
+                <a:spcPts val="0"/>
+              </a:spcBef>
+              <a:buNone/>
+            </a:pPr>
+            <a:r>
+              <a:rPr lang="en-US" dirty="0"/>
+              <a:t>        vec2 = embeddings[word2].reshape(1, -1)</a:t>
+            </a:r>
+          </a:p>
+          <a:p>
+            <a:pPr marL="0" indent="0">
+              <a:lnSpc>
+                <a:spcPct val="120000"/>
+              </a:lnSpc>
+              <a:spcBef>
+                <a:spcPts val="0"/>
+              </a:spcBef>
+              <a:buNone/>
+            </a:pPr>
+            <a:r>
+              <a:rPr lang="en-US" dirty="0"/>
+              <a:t>        return </a:t>
+            </a:r>
+            <a:r>
+              <a:rPr lang="en-US" dirty="0" err="1"/>
+              <a:t>cosine_similarity</a:t>
+            </a:r>
+            <a:r>
+              <a:rPr lang="en-US" dirty="0"/>
+              <a:t>(vec1, vec2)[0][0]</a:t>
+            </a:r>
+          </a:p>
+          <a:p>
+            <a:pPr marL="0" indent="0">
+              <a:lnSpc>
+                <a:spcPct val="120000"/>
+              </a:lnSpc>
+              <a:spcBef>
+                <a:spcPts val="0"/>
+              </a:spcBef>
+              <a:buNone/>
+            </a:pPr>
+            <a:r>
+              <a:rPr lang="en-US" dirty="0"/>
+              <a:t>    return None</a:t>
+            </a:r>
+          </a:p>
+          <a:p>
+            <a:pPr marL="0" indent="0">
+              <a:lnSpc>
+                <a:spcPct val="120000"/>
+              </a:lnSpc>
+              <a:spcBef>
+                <a:spcPts val="0"/>
+              </a:spcBef>
+              <a:buNone/>
+            </a:pPr>
+            <a:r>
+              <a:rPr lang="en-US" dirty="0"/>
+              <a:t># Example usage</a:t>
+            </a:r>
+          </a:p>
+          <a:p>
+            <a:pPr marL="0" indent="0">
+              <a:lnSpc>
+                <a:spcPct val="120000"/>
+              </a:lnSpc>
+              <a:spcBef>
+                <a:spcPts val="0"/>
+              </a:spcBef>
+              <a:buNone/>
+            </a:pPr>
+            <a:r>
+              <a:rPr lang="en-US" dirty="0"/>
+              <a:t>similarity = </a:t>
+            </a:r>
+            <a:r>
+              <a:rPr lang="en-US" dirty="0" err="1"/>
+              <a:t>get_similarity</a:t>
+            </a:r>
+            <a:r>
+              <a:rPr lang="en-US" dirty="0"/>
+              <a:t>('king', 'queen', </a:t>
+            </a:r>
+            <a:r>
+              <a:rPr lang="en-US" dirty="0" err="1"/>
+              <a:t>glove_vectors</a:t>
+            </a:r>
+            <a:r>
+              <a:rPr lang="en-US" dirty="0"/>
+              <a:t>)</a:t>
+            </a:r>
+          </a:p>
+          <a:p>
+            <a:pPr marL="0" indent="0">
+              <a:lnSpc>
+                <a:spcPct val="120000"/>
+              </a:lnSpc>
+              <a:spcBef>
+                <a:spcPts val="0"/>
+              </a:spcBef>
+              <a:buNone/>
+            </a:pPr>
+            <a:r>
+              <a:rPr lang="en-US" dirty="0"/>
+              <a:t>print(</a:t>
+            </a:r>
+            <a:r>
+              <a:rPr lang="en-US" dirty="0" err="1"/>
+              <a:t>f"Similarity</a:t>
+            </a:r>
+            <a:r>
+              <a:rPr lang="en-US" dirty="0"/>
+              <a:t> between 'king' and 'queen': {similarity:.4f}")</a:t>
+            </a:r>
           </a:p>
         </p:txBody>
       </p:sp>
